--- a/HelpResourcesSources/TechnicalNotes/FLEx 9.1 Conceptual Model - Grammar and interlinear model.pptx
+++ b/HelpResourcesSources/TechnicalNotes/FLEx 9.1 Conceptual Model - Grammar and interlinear model.pptx
@@ -23,37 +23,37 @@
     <p:sldId id="272" r:id="rId17"/>
     <p:sldId id="273" r:id="rId18"/>
     <p:sldId id="274" r:id="rId19"/>
-    <p:sldId id="275" r:id="rId20"/>
-    <p:sldId id="276" r:id="rId21"/>
-    <p:sldId id="277" r:id="rId22"/>
-    <p:sldId id="278" r:id="rId23"/>
-    <p:sldId id="279" r:id="rId24"/>
-    <p:sldId id="280" r:id="rId25"/>
-    <p:sldId id="281" r:id="rId26"/>
-    <p:sldId id="282" r:id="rId27"/>
-    <p:sldId id="283" r:id="rId28"/>
-    <p:sldId id="264" r:id="rId29"/>
-    <p:sldId id="285" r:id="rId30"/>
-    <p:sldId id="286" r:id="rId31"/>
-    <p:sldId id="287" r:id="rId32"/>
-    <p:sldId id="288" r:id="rId33"/>
-    <p:sldId id="289" r:id="rId34"/>
-    <p:sldId id="291" r:id="rId35"/>
-    <p:sldId id="292" r:id="rId36"/>
-    <p:sldId id="293" r:id="rId37"/>
-    <p:sldId id="294" r:id="rId38"/>
-    <p:sldId id="295" r:id="rId39"/>
-    <p:sldId id="296" r:id="rId40"/>
-    <p:sldId id="297" r:id="rId41"/>
-    <p:sldId id="299" r:id="rId42"/>
-    <p:sldId id="300" r:id="rId43"/>
-    <p:sldId id="302" r:id="rId44"/>
-    <p:sldId id="306" r:id="rId45"/>
-    <p:sldId id="301" r:id="rId46"/>
-    <p:sldId id="307" r:id="rId47"/>
-    <p:sldId id="303" r:id="rId48"/>
-    <p:sldId id="304" r:id="rId49"/>
-    <p:sldId id="305" r:id="rId50"/>
+    <p:sldId id="308" r:id="rId20"/>
+    <p:sldId id="275" r:id="rId21"/>
+    <p:sldId id="276" r:id="rId22"/>
+    <p:sldId id="277" r:id="rId23"/>
+    <p:sldId id="278" r:id="rId24"/>
+    <p:sldId id="279" r:id="rId25"/>
+    <p:sldId id="280" r:id="rId26"/>
+    <p:sldId id="281" r:id="rId27"/>
+    <p:sldId id="282" r:id="rId28"/>
+    <p:sldId id="283" r:id="rId29"/>
+    <p:sldId id="264" r:id="rId30"/>
+    <p:sldId id="285" r:id="rId31"/>
+    <p:sldId id="286" r:id="rId32"/>
+    <p:sldId id="287" r:id="rId33"/>
+    <p:sldId id="288" r:id="rId34"/>
+    <p:sldId id="289" r:id="rId35"/>
+    <p:sldId id="291" r:id="rId36"/>
+    <p:sldId id="292" r:id="rId37"/>
+    <p:sldId id="293" r:id="rId38"/>
+    <p:sldId id="294" r:id="rId39"/>
+    <p:sldId id="295" r:id="rId40"/>
+    <p:sldId id="296" r:id="rId41"/>
+    <p:sldId id="297" r:id="rId42"/>
+    <p:sldId id="299" r:id="rId43"/>
+    <p:sldId id="300" r:id="rId44"/>
+    <p:sldId id="302" r:id="rId45"/>
+    <p:sldId id="306" r:id="rId46"/>
+    <p:sldId id="301" r:id="rId47"/>
+    <p:sldId id="307" r:id="rId48"/>
+    <p:sldId id="303" r:id="rId49"/>
+    <p:sldId id="304" r:id="rId50"/>
     <p:sldId id="284" r:id="rId51"/>
   </p:sldIdLst>
   <p:sldSz cx="12192000" cy="6858000"/>
@@ -161,6 +161,18 @@
 </p:presentation>
 </file>
 
+<file path=ppt/commentAuthors.xml><?xml version="1.0" encoding="utf-8"?>
+<p:cmAuthorLst xmlns:a="http://schemas.openxmlformats.org/drawingml/2006/main" xmlns:r="http://schemas.openxmlformats.org/officeDocument/2006/relationships" xmlns:p="http://schemas.openxmlformats.org/presentationml/2006/main">
+  <p:cmAuthor id="1" name="Ken Zook" initials="KZ" lastIdx="0" clrIdx="0">
+    <p:extLst>
+      <p:ext uri="{19B8F6BF-5375-455C-9EA6-DF929625EA0E}">
+        <p15:presenceInfo xmlns:p15="http://schemas.microsoft.com/office/powerpoint/2012/main" userId="S-1-5-21-2075735302-1962817296-126092852-1044" providerId="AD"/>
+      </p:ext>
+    </p:extLst>
+  </p:cmAuthor>
+</p:cmAuthorLst>
+</file>
+
 <file path=ppt/slideLayouts/slideLayout1.xml><?xml version="1.0" encoding="utf-8"?>
 <p:sldLayout xmlns:a="http://schemas.openxmlformats.org/drawingml/2006/main" xmlns:r="http://schemas.openxmlformats.org/officeDocument/2006/relationships" xmlns:p="http://schemas.openxmlformats.org/presentationml/2006/main" type="title" preserve="1">
   <p:cSld name="Title Slide">
@@ -308,7 +320,7 @@
           <a:p>
             <a:fld id="{33088F3C-9E81-4E49-8427-25161F1C0BC9}" type="datetimeFigureOut">
               <a:rPr lang="en-US" smtClean="0"/>
-              <a:t>5/14/2024</a:t>
+              <a:t>6/21/2024</a:t>
             </a:fld>
             <a:endParaRPr lang="en-US" dirty="0"/>
           </a:p>
@@ -506,7 +518,7 @@
           <a:p>
             <a:fld id="{33088F3C-9E81-4E49-8427-25161F1C0BC9}" type="datetimeFigureOut">
               <a:rPr lang="en-US" smtClean="0"/>
-              <a:t>5/14/2024</a:t>
+              <a:t>6/21/2024</a:t>
             </a:fld>
             <a:endParaRPr lang="en-US" dirty="0"/>
           </a:p>
@@ -714,7 +726,7 @@
           <a:p>
             <a:fld id="{33088F3C-9E81-4E49-8427-25161F1C0BC9}" type="datetimeFigureOut">
               <a:rPr lang="en-US" smtClean="0"/>
-              <a:t>5/14/2024</a:t>
+              <a:t>6/21/2024</a:t>
             </a:fld>
             <a:endParaRPr lang="en-US" dirty="0"/>
           </a:p>
@@ -912,7 +924,7 @@
           <a:p>
             <a:fld id="{33088F3C-9E81-4E49-8427-25161F1C0BC9}" type="datetimeFigureOut">
               <a:rPr lang="en-US" smtClean="0"/>
-              <a:t>5/14/2024</a:t>
+              <a:t>6/21/2024</a:t>
             </a:fld>
             <a:endParaRPr lang="en-US" dirty="0"/>
           </a:p>
@@ -1187,7 +1199,7 @@
           <a:p>
             <a:fld id="{33088F3C-9E81-4E49-8427-25161F1C0BC9}" type="datetimeFigureOut">
               <a:rPr lang="en-US" smtClean="0"/>
-              <a:t>5/14/2024</a:t>
+              <a:t>6/21/2024</a:t>
             </a:fld>
             <a:endParaRPr lang="en-US" dirty="0"/>
           </a:p>
@@ -1452,7 +1464,7 @@
           <a:p>
             <a:fld id="{33088F3C-9E81-4E49-8427-25161F1C0BC9}" type="datetimeFigureOut">
               <a:rPr lang="en-US" smtClean="0"/>
-              <a:t>5/14/2024</a:t>
+              <a:t>6/21/2024</a:t>
             </a:fld>
             <a:endParaRPr lang="en-US" dirty="0"/>
           </a:p>
@@ -1864,7 +1876,7 @@
           <a:p>
             <a:fld id="{33088F3C-9E81-4E49-8427-25161F1C0BC9}" type="datetimeFigureOut">
               <a:rPr lang="en-US" smtClean="0"/>
-              <a:t>5/14/2024</a:t>
+              <a:t>6/21/2024</a:t>
             </a:fld>
             <a:endParaRPr lang="en-US" dirty="0"/>
           </a:p>
@@ -2005,7 +2017,7 @@
           <a:p>
             <a:fld id="{33088F3C-9E81-4E49-8427-25161F1C0BC9}" type="datetimeFigureOut">
               <a:rPr lang="en-US" smtClean="0"/>
-              <a:t>5/14/2024</a:t>
+              <a:t>6/21/2024</a:t>
             </a:fld>
             <a:endParaRPr lang="en-US" dirty="0"/>
           </a:p>
@@ -2118,7 +2130,7 @@
           <a:p>
             <a:fld id="{33088F3C-9E81-4E49-8427-25161F1C0BC9}" type="datetimeFigureOut">
               <a:rPr lang="en-US" smtClean="0"/>
-              <a:t>5/14/2024</a:t>
+              <a:t>6/21/2024</a:t>
             </a:fld>
             <a:endParaRPr lang="en-US" dirty="0"/>
           </a:p>
@@ -2429,7 +2441,7 @@
           <a:p>
             <a:fld id="{33088F3C-9E81-4E49-8427-25161F1C0BC9}" type="datetimeFigureOut">
               <a:rPr lang="en-US" smtClean="0"/>
-              <a:t>5/14/2024</a:t>
+              <a:t>6/21/2024</a:t>
             </a:fld>
             <a:endParaRPr lang="en-US" dirty="0"/>
           </a:p>
@@ -2717,7 +2729,7 @@
           <a:p>
             <a:fld id="{33088F3C-9E81-4E49-8427-25161F1C0BC9}" type="datetimeFigureOut">
               <a:rPr lang="en-US" smtClean="0"/>
-              <a:t>5/14/2024</a:t>
+              <a:t>6/21/2024</a:t>
             </a:fld>
             <a:endParaRPr lang="en-US" dirty="0"/>
           </a:p>
@@ -2958,7 +2970,7 @@
           <a:p>
             <a:fld id="{33088F3C-9E81-4E49-8427-25161F1C0BC9}" type="datetimeFigureOut">
               <a:rPr lang="en-US" smtClean="0"/>
-              <a:t>5/14/2024</a:t>
+              <a:t>6/21/2024</a:t>
             </a:fld>
             <a:endParaRPr lang="en-US" dirty="0"/>
           </a:p>
@@ -4030,8 +4042,8 @@
         </p:blipFill>
         <p:spPr>
           <a:xfrm>
-            <a:off x="444304" y="2713968"/>
-            <a:ext cx="4254305" cy="3293575"/>
+            <a:off x="261257" y="2713968"/>
+            <a:ext cx="4669973" cy="3293575"/>
           </a:xfrm>
           <a:prstGeom prst="rect">
             <a:avLst/>
@@ -4927,7 +4939,7 @@
           <a:p>
             <a:r>
               <a:rPr lang="en-US" dirty="0"/>
-              <a:t>The Analyses reference sequence property on Segment stores a reference for each </a:t>
+              <a:t>The Analyses reference sequence property on Segment stores a reference to each </a:t>
             </a:r>
             <a:r>
               <a:rPr lang="en-US" dirty="0" err="1"/>
@@ -5265,7 +5277,7 @@
           <a:p>
             <a:r>
               <a:rPr lang="en-US" dirty="0"/>
-              <a:t>Interlinear: Analyses</a:t>
+              <a:t>Interlinear: Wordforms continued</a:t>
             </a:r>
           </a:p>
         </p:txBody>
@@ -5300,111 +5312,45 @@
           <a:p>
             <a:r>
               <a:rPr lang="en-US" dirty="0"/>
-              <a:t>Suppose the lexicon already has a definition for ‘lion’ and ‘garçon’? The interlinear display will now show this in the Analyze tab</a:t>
-            </a:r>
-          </a:p>
-          <a:p>
-            <a:endParaRPr lang="en-US" dirty="0"/>
-          </a:p>
-          <a:p>
-            <a:endParaRPr lang="en-US" dirty="0"/>
-          </a:p>
-          <a:p>
-            <a:endParaRPr lang="en-US" dirty="0"/>
-          </a:p>
-          <a:p>
-            <a:endParaRPr lang="en-US" dirty="0"/>
-          </a:p>
-          <a:p>
-            <a:r>
-              <a:rPr lang="en-US" dirty="0"/>
-              <a:t>Word Analyses will now show this</a:t>
-            </a:r>
-            <a:br>
-              <a:rPr lang="en-US" dirty="0"/>
-            </a:br>
-            <a:r>
-              <a:rPr lang="en-US" dirty="0"/>
-              <a:t>for ‘garçon’</a:t>
-            </a:r>
-          </a:p>
-          <a:p>
-            <a:r>
-              <a:rPr lang="en-US" dirty="0"/>
-              <a:t>The user hasn’t done anything to the text, but FLEx found two words in the lexicon that matched a wordform, so it automatically created an analysis candidate that is shown in blue in the interlinear Analyze tab.</a:t>
-            </a:r>
-          </a:p>
-          <a:p>
-            <a:endParaRPr lang="en-US" dirty="0"/>
-          </a:p>
-          <a:p>
-            <a:endParaRPr lang="en-US" dirty="0"/>
-          </a:p>
-          <a:p>
-            <a:endParaRPr lang="en-US" dirty="0"/>
-          </a:p>
-        </p:txBody>
-      </p:sp>
-      <p:pic>
-        <p:nvPicPr>
-          <p:cNvPr id="6" name="Picture 5">
-            <a:extLst>
-              <a:ext uri="{FF2B5EF4-FFF2-40B4-BE49-F238E27FC236}">
-                <a16:creationId xmlns:a16="http://schemas.microsoft.com/office/drawing/2014/main" id="{8D1917AA-A722-4F06-8DE6-7443C532EDF9}"/>
-              </a:ext>
-            </a:extLst>
-          </p:cNvPr>
-          <p:cNvPicPr/>
-          <p:nvPr/>
-        </p:nvPicPr>
-        <p:blipFill>
-          <a:blip r:embed="rId2"/>
-          <a:stretch>
-            <a:fillRect/>
-          </a:stretch>
-        </p:blipFill>
-        <p:spPr>
-          <a:xfrm>
-            <a:off x="838200" y="1743075"/>
-            <a:ext cx="5125061" cy="1868377"/>
-          </a:xfrm>
-          <a:prstGeom prst="rect">
-            <a:avLst/>
-          </a:prstGeom>
-        </p:spPr>
-      </p:pic>
-      <p:pic>
-        <p:nvPicPr>
-          <p:cNvPr id="7" name="Picture 6">
-            <a:extLst>
-              <a:ext uri="{FF2B5EF4-FFF2-40B4-BE49-F238E27FC236}">
-                <a16:creationId xmlns:a16="http://schemas.microsoft.com/office/drawing/2014/main" id="{CE4D3150-144E-4A87-A057-17F67B421C73}"/>
-              </a:ext>
-            </a:extLst>
-          </p:cNvPr>
-          <p:cNvPicPr/>
-          <p:nvPr/>
-        </p:nvPicPr>
-        <p:blipFill>
-          <a:blip r:embed="rId3"/>
-          <a:stretch>
-            <a:fillRect/>
-          </a:stretch>
-        </p:blipFill>
-        <p:spPr>
-          <a:xfrm>
-            <a:off x="6602043" y="1743075"/>
-            <a:ext cx="4019066" cy="3057733"/>
-          </a:xfrm>
-          <a:prstGeom prst="rect">
-            <a:avLst/>
-          </a:prstGeom>
-        </p:spPr>
-      </p:pic>
+              <a:t>Wordforms should be unique. If duplicates somehow occur, you can run Tools &gt; Utilities &gt; Merge Duplicate Wordforms to merge them together. This will copy the analyses from the duplicate ones into a single wordform. After running this, you should run Tools &gt; Utilities &gt; Merge Duplicate Analyses. This will merge any duplicate analyses in the wordforms.</a:t>
+            </a:r>
+          </a:p>
+          <a:p>
+            <a:r>
+              <a:rPr lang="en-US" dirty="0"/>
+              <a:t>FLEx can interlinearize texts in different vernacular writing systems. There are various issues involved in doing this. See section 13, </a:t>
+            </a:r>
+            <a:r>
+              <a:rPr lang="en-US" dirty="0" err="1"/>
+              <a:t>Interlinearizing</a:t>
+            </a:r>
+            <a:r>
+              <a:rPr lang="en-US"/>
+              <a:t> with multiple scripts in </a:t>
+            </a:r>
+            <a:r>
+              <a:rPr lang="en-US" u="sng">
+                <a:hlinkClick r:id="rId2"/>
+              </a:rPr>
+              <a:t>https://downloads.languagetechnology.org/fieldworks/Documentation/Flex_tips.pdf</a:t>
+            </a:r>
+            <a:r>
+              <a:rPr lang="en-US"/>
+              <a:t> before attempting to do this.</a:t>
+            </a:r>
+          </a:p>
+          <a:p>
+            <a:endParaRPr lang="en-US" dirty="0"/>
+          </a:p>
+          <a:p>
+            <a:endParaRPr lang="en-US" dirty="0"/>
+          </a:p>
+        </p:txBody>
+      </p:sp>
     </p:spTree>
     <p:extLst>
       <p:ext uri="{BB962C8B-B14F-4D97-AF65-F5344CB8AC3E}">
-        <p14:creationId xmlns:p14="http://schemas.microsoft.com/office/powerpoint/2010/main" val="1759270809"/>
+        <p14:creationId xmlns:p14="http://schemas.microsoft.com/office/powerpoint/2010/main" val="219992315"/>
       </p:ext>
     </p:extLst>
   </p:cSld>
@@ -5583,18 +5529,124 @@
           <a:chExt cx="0" cy="0"/>
         </a:xfrm>
       </p:grpSpPr>
+      <p:sp>
+        <p:nvSpPr>
+          <p:cNvPr id="4" name="Title 1">
+            <a:extLst>
+              <a:ext uri="{FF2B5EF4-FFF2-40B4-BE49-F238E27FC236}">
+                <a16:creationId xmlns:a16="http://schemas.microsoft.com/office/drawing/2014/main" id="{D020DABE-C917-4086-9913-77F3DFBC8176}"/>
+              </a:ext>
+            </a:extLst>
+          </p:cNvPr>
+          <p:cNvSpPr>
+            <a:spLocks noGrp="1"/>
+          </p:cNvSpPr>
+          <p:nvPr>
+            <p:ph type="title"/>
+          </p:nvPr>
+        </p:nvSpPr>
+        <p:spPr>
+          <a:xfrm>
+            <a:off x="838200" y="136525"/>
+            <a:ext cx="10515600" cy="803275"/>
+          </a:xfrm>
+        </p:spPr>
+        <p:txBody>
+          <a:bodyPr/>
+          <a:lstStyle/>
+          <a:p>
+            <a:r>
+              <a:rPr lang="en-US" dirty="0"/>
+              <a:t>Interlinear: Analyses</a:t>
+            </a:r>
+          </a:p>
+        </p:txBody>
+      </p:sp>
+      <p:sp>
+        <p:nvSpPr>
+          <p:cNvPr id="5" name="Content Placeholder 2">
+            <a:extLst>
+              <a:ext uri="{FF2B5EF4-FFF2-40B4-BE49-F238E27FC236}">
+                <a16:creationId xmlns:a16="http://schemas.microsoft.com/office/drawing/2014/main" id="{54980C95-9B20-461C-8447-ECB43E44F22E}"/>
+              </a:ext>
+            </a:extLst>
+          </p:cNvPr>
+          <p:cNvSpPr>
+            <a:spLocks noGrp="1"/>
+          </p:cNvSpPr>
+          <p:nvPr>
+            <p:ph idx="1"/>
+          </p:nvPr>
+        </p:nvSpPr>
+        <p:spPr>
+          <a:xfrm>
+            <a:off x="838200" y="939800"/>
+            <a:ext cx="10515600" cy="5681133"/>
+          </a:xfrm>
+        </p:spPr>
+        <p:txBody>
+          <a:bodyPr>
+            <a:normAutofit/>
+          </a:bodyPr>
+          <a:lstStyle/>
+          <a:p>
+            <a:r>
+              <a:rPr lang="en-US" dirty="0"/>
+              <a:t>Suppose the lexicon already has a definition for ‘lion’ and ‘garçon’? The interlinear display will now show this in the Analyze tab</a:t>
+            </a:r>
+          </a:p>
+          <a:p>
+            <a:endParaRPr lang="en-US" dirty="0"/>
+          </a:p>
+          <a:p>
+            <a:endParaRPr lang="en-US" dirty="0"/>
+          </a:p>
+          <a:p>
+            <a:endParaRPr lang="en-US" dirty="0"/>
+          </a:p>
+          <a:p>
+            <a:endParaRPr lang="en-US" dirty="0"/>
+          </a:p>
+          <a:p>
+            <a:r>
+              <a:rPr lang="en-US" dirty="0"/>
+              <a:t>Word Analyses will now show this</a:t>
+            </a:r>
+            <a:br>
+              <a:rPr lang="en-US" dirty="0"/>
+            </a:br>
+            <a:r>
+              <a:rPr lang="en-US" dirty="0"/>
+              <a:t>for ‘garçon’</a:t>
+            </a:r>
+          </a:p>
+          <a:p>
+            <a:r>
+              <a:rPr lang="en-US" dirty="0"/>
+              <a:t>The user hasn’t done anything to the text, but FLEx found two words in the lexicon that matched a wordform, so it automatically created an analysis candidate that is shown in blue in the interlinear Analyze tab.</a:t>
+            </a:r>
+          </a:p>
+          <a:p>
+            <a:endParaRPr lang="en-US" dirty="0"/>
+          </a:p>
+          <a:p>
+            <a:endParaRPr lang="en-US" dirty="0"/>
+          </a:p>
+          <a:p>
+            <a:endParaRPr lang="en-US" dirty="0"/>
+          </a:p>
+        </p:txBody>
+      </p:sp>
       <p:pic>
         <p:nvPicPr>
-          <p:cNvPr id="3" name="Picture 2">
-            <a:extLst>
-              <a:ext uri="{FF2B5EF4-FFF2-40B4-BE49-F238E27FC236}">
-                <a16:creationId xmlns:a16="http://schemas.microsoft.com/office/drawing/2014/main" id="{2FA9172E-E40B-4CD9-BEE3-AC1A921A3D77}"/>
-              </a:ext>
-            </a:extLst>
-          </p:cNvPr>
-          <p:cNvPicPr>
-            <a:picLocks noChangeAspect="1"/>
-          </p:cNvPicPr>
+          <p:cNvPr id="6" name="Picture 5">
+            <a:extLst>
+              <a:ext uri="{FF2B5EF4-FFF2-40B4-BE49-F238E27FC236}">
+                <a16:creationId xmlns:a16="http://schemas.microsoft.com/office/drawing/2014/main" id="{8D1917AA-A722-4F06-8DE6-7443C532EDF9}"/>
+              </a:ext>
+            </a:extLst>
+          </p:cNvPr>
+          <p:cNvPicPr/>
           <p:nvPr/>
         </p:nvPicPr>
         <p:blipFill>
@@ -5605,103 +5657,24 @@
         </p:blipFill>
         <p:spPr>
           <a:xfrm>
-            <a:off x="5616312" y="318653"/>
-            <a:ext cx="6220693" cy="6220693"/>
+            <a:off x="838200" y="1743075"/>
+            <a:ext cx="5125061" cy="1868377"/>
           </a:xfrm>
           <a:prstGeom prst="rect">
             <a:avLst/>
           </a:prstGeom>
         </p:spPr>
       </p:pic>
-      <p:sp>
-        <p:nvSpPr>
-          <p:cNvPr id="4" name="Title 1">
-            <a:extLst>
-              <a:ext uri="{FF2B5EF4-FFF2-40B4-BE49-F238E27FC236}">
-                <a16:creationId xmlns:a16="http://schemas.microsoft.com/office/drawing/2014/main" id="{D020DABE-C917-4086-9913-77F3DFBC8176}"/>
-              </a:ext>
-            </a:extLst>
-          </p:cNvPr>
-          <p:cNvSpPr>
-            <a:spLocks noGrp="1"/>
-          </p:cNvSpPr>
-          <p:nvPr>
-            <p:ph type="title"/>
-          </p:nvPr>
-        </p:nvSpPr>
-        <p:spPr>
-          <a:xfrm>
-            <a:off x="838200" y="136525"/>
-            <a:ext cx="10515600" cy="803275"/>
-          </a:xfrm>
-        </p:spPr>
-        <p:txBody>
-          <a:bodyPr/>
-          <a:lstStyle/>
-          <a:p>
-            <a:r>
-              <a:rPr lang="en-US" dirty="0"/>
-              <a:t>Interlinear: Analyses continued</a:t>
-            </a:r>
-          </a:p>
-        </p:txBody>
-      </p:sp>
-      <p:sp>
-        <p:nvSpPr>
-          <p:cNvPr id="5" name="Content Placeholder 2">
-            <a:extLst>
-              <a:ext uri="{FF2B5EF4-FFF2-40B4-BE49-F238E27FC236}">
-                <a16:creationId xmlns:a16="http://schemas.microsoft.com/office/drawing/2014/main" id="{54980C95-9B20-461C-8447-ECB43E44F22E}"/>
-              </a:ext>
-            </a:extLst>
-          </p:cNvPr>
-          <p:cNvSpPr>
-            <a:spLocks noGrp="1"/>
-          </p:cNvSpPr>
-          <p:nvPr>
-            <p:ph idx="1"/>
-          </p:nvPr>
-        </p:nvSpPr>
-        <p:spPr>
-          <a:xfrm>
-            <a:off x="838200" y="939800"/>
-            <a:ext cx="10515600" cy="5681133"/>
-          </a:xfrm>
-        </p:spPr>
-        <p:txBody>
-          <a:bodyPr>
-            <a:normAutofit/>
-          </a:bodyPr>
-          <a:lstStyle/>
-          <a:p>
-            <a:endParaRPr lang="en-US" dirty="0"/>
-          </a:p>
-          <a:p>
-            <a:r>
-              <a:rPr lang="en-US" dirty="0"/>
-              <a:t>Preview…</a:t>
-            </a:r>
-          </a:p>
-          <a:p>
-            <a:endParaRPr lang="en-US" dirty="0"/>
-          </a:p>
-          <a:p>
-            <a:endParaRPr lang="en-US" dirty="0"/>
-          </a:p>
-        </p:txBody>
-      </p:sp>
       <p:pic>
         <p:nvPicPr>
-          <p:cNvPr id="9" name="Picture 8">
-            <a:extLst>
-              <a:ext uri="{FF2B5EF4-FFF2-40B4-BE49-F238E27FC236}">
-                <a16:creationId xmlns:a16="http://schemas.microsoft.com/office/drawing/2014/main" id="{1D814A5F-D8DA-4017-BE1E-F2E94E232380}"/>
-              </a:ext>
-            </a:extLst>
-          </p:cNvPr>
-          <p:cNvPicPr>
-            <a:picLocks noChangeAspect="1"/>
-          </p:cNvPicPr>
+          <p:cNvPr id="7" name="Picture 6">
+            <a:extLst>
+              <a:ext uri="{FF2B5EF4-FFF2-40B4-BE49-F238E27FC236}">
+                <a16:creationId xmlns:a16="http://schemas.microsoft.com/office/drawing/2014/main" id="{CE4D3150-144E-4A87-A057-17F67B421C73}"/>
+              </a:ext>
+            </a:extLst>
+          </p:cNvPr>
+          <p:cNvPicPr/>
           <p:nvPr/>
         </p:nvPicPr>
         <p:blipFill>
@@ -5712,38 +5685,8 @@
         </p:blipFill>
         <p:spPr>
           <a:xfrm>
-            <a:off x="1972590" y="1971039"/>
-            <a:ext cx="2946191" cy="1981983"/>
-          </a:xfrm>
-          <a:prstGeom prst="rect">
-            <a:avLst/>
-          </a:prstGeom>
-        </p:spPr>
-      </p:pic>
-      <p:pic>
-        <p:nvPicPr>
-          <p:cNvPr id="10" name="Picture 9">
-            <a:extLst>
-              <a:ext uri="{FF2B5EF4-FFF2-40B4-BE49-F238E27FC236}">
-                <a16:creationId xmlns:a16="http://schemas.microsoft.com/office/drawing/2014/main" id="{F9E4BA7F-FAE0-4A88-A326-771B87C69D31}"/>
-              </a:ext>
-            </a:extLst>
-          </p:cNvPr>
-          <p:cNvPicPr>
-            <a:picLocks noChangeAspect="1"/>
-          </p:cNvPicPr>
-          <p:nvPr/>
-        </p:nvPicPr>
-        <p:blipFill>
-          <a:blip r:embed="rId4"/>
-          <a:stretch>
-            <a:fillRect/>
-          </a:stretch>
-        </p:blipFill>
-        <p:spPr>
-          <a:xfrm>
-            <a:off x="1302261" y="4410692"/>
-            <a:ext cx="4286848" cy="1886213"/>
+            <a:off x="6602043" y="1743075"/>
+            <a:ext cx="4019066" cy="3057733"/>
           </a:xfrm>
           <a:prstGeom prst="rect">
             <a:avLst/>
@@ -5753,7 +5696,7 @@
     </p:spTree>
     <p:extLst>
       <p:ext uri="{BB962C8B-B14F-4D97-AF65-F5344CB8AC3E}">
-        <p14:creationId xmlns:p14="http://schemas.microsoft.com/office/powerpoint/2010/main" val="83518071"/>
+        <p14:creationId xmlns:p14="http://schemas.microsoft.com/office/powerpoint/2010/main" val="1759270809"/>
       </p:ext>
     </p:extLst>
   </p:cSld>
@@ -5780,228 +5723,12 @@
           <a:chExt cx="0" cy="0"/>
         </a:xfrm>
       </p:grpSpPr>
-      <p:sp>
-        <p:nvSpPr>
-          <p:cNvPr id="4" name="Title 1">
-            <a:extLst>
-              <a:ext uri="{FF2B5EF4-FFF2-40B4-BE49-F238E27FC236}">
-                <a16:creationId xmlns:a16="http://schemas.microsoft.com/office/drawing/2014/main" id="{D020DABE-C917-4086-9913-77F3DFBC8176}"/>
-              </a:ext>
-            </a:extLst>
-          </p:cNvPr>
-          <p:cNvSpPr>
-            <a:spLocks noGrp="1"/>
-          </p:cNvSpPr>
-          <p:nvPr>
-            <p:ph type="title"/>
-          </p:nvPr>
-        </p:nvSpPr>
-        <p:spPr>
-          <a:xfrm>
-            <a:off x="838200" y="136525"/>
-            <a:ext cx="10515600" cy="803275"/>
-          </a:xfrm>
-        </p:spPr>
-        <p:txBody>
-          <a:bodyPr/>
-          <a:lstStyle/>
-          <a:p>
-            <a:r>
-              <a:rPr lang="en-US" dirty="0"/>
-              <a:t>Interlinear: Analyses </a:t>
-            </a:r>
-            <a:r>
-              <a:rPr lang="en-US" dirty="0" err="1"/>
-              <a:t>WfiAnalysis</a:t>
-            </a:r>
-            <a:endParaRPr lang="en-US" dirty="0"/>
-          </a:p>
-        </p:txBody>
-      </p:sp>
-      <p:sp>
-        <p:nvSpPr>
-          <p:cNvPr id="5" name="Content Placeholder 2">
-            <a:extLst>
-              <a:ext uri="{FF2B5EF4-FFF2-40B4-BE49-F238E27FC236}">
-                <a16:creationId xmlns:a16="http://schemas.microsoft.com/office/drawing/2014/main" id="{54980C95-9B20-461C-8447-ECB43E44F22E}"/>
-              </a:ext>
-            </a:extLst>
-          </p:cNvPr>
-          <p:cNvSpPr>
-            <a:spLocks noGrp="1"/>
-          </p:cNvSpPr>
-          <p:nvPr>
-            <p:ph idx="1"/>
-          </p:nvPr>
-        </p:nvSpPr>
-        <p:spPr>
-          <a:xfrm>
-            <a:off x="838200" y="939800"/>
-            <a:ext cx="10515600" cy="5681133"/>
-          </a:xfrm>
-        </p:spPr>
-        <p:txBody>
-          <a:bodyPr>
-            <a:normAutofit/>
-          </a:bodyPr>
-          <a:lstStyle/>
-          <a:p>
-            <a:r>
-              <a:rPr lang="en-US" dirty="0"/>
-              <a:t>The ‘garçon’ </a:t>
-            </a:r>
-            <a:r>
-              <a:rPr lang="en-US" dirty="0" err="1"/>
-              <a:t>WfiWordform</a:t>
-            </a:r>
-            <a:r>
-              <a:rPr lang="en-US" dirty="0"/>
-              <a:t> now owns a </a:t>
-            </a:r>
-            <a:r>
-              <a:rPr lang="en-US" dirty="0" err="1"/>
-              <a:t>WfiAnalysis</a:t>
-            </a:r>
-            <a:r>
-              <a:rPr lang="en-US" dirty="0"/>
-              <a:t> object.</a:t>
-            </a:r>
-          </a:p>
-          <a:p>
-            <a:r>
-              <a:rPr lang="en-US" dirty="0"/>
-              <a:t>A </a:t>
-            </a:r>
-            <a:r>
-              <a:rPr lang="en-US" dirty="0" err="1"/>
-              <a:t>WfiAnalysis</a:t>
-            </a:r>
-            <a:r>
-              <a:rPr lang="en-US" dirty="0"/>
-              <a:t> objects has</a:t>
-            </a:r>
-          </a:p>
-          <a:p>
-            <a:pPr lvl="1"/>
-            <a:r>
-              <a:rPr lang="en-US" dirty="0"/>
-              <a:t>Category – atomic reference to a </a:t>
-            </a:r>
-            <a:r>
-              <a:rPr lang="en-US" dirty="0" err="1"/>
-              <a:t>PartOfSpeech</a:t>
-            </a:r>
-            <a:r>
-              <a:rPr lang="en-US" dirty="0"/>
-              <a:t> in the Category list in the Grammar area. This shows up in the Word Category line of the Analyze tab of an interlinear text.</a:t>
-            </a:r>
-          </a:p>
-          <a:p>
-            <a:pPr lvl="1"/>
-            <a:r>
-              <a:rPr lang="en-US" dirty="0"/>
-              <a:t>Meanings – owning collection holding </a:t>
-            </a:r>
-            <a:r>
-              <a:rPr lang="en-US" dirty="0" err="1"/>
-              <a:t>WfiGloss</a:t>
-            </a:r>
-            <a:r>
-              <a:rPr lang="en-US" dirty="0"/>
-              <a:t> objects. One of these </a:t>
-            </a:r>
-            <a:r>
-              <a:rPr lang="en-US" dirty="0" err="1"/>
-              <a:t>WfiGloss</a:t>
-            </a:r>
-            <a:r>
-              <a:rPr lang="en-US" dirty="0"/>
-              <a:t> objects will show up in the Word Gloss line of the Analyze tab of an interlinear text.</a:t>
-            </a:r>
-          </a:p>
-          <a:p>
-            <a:pPr lvl="1"/>
-            <a:r>
-              <a:rPr lang="en-US" dirty="0" err="1"/>
-              <a:t>MorphBundles</a:t>
-            </a:r>
-            <a:r>
-              <a:rPr lang="en-US" dirty="0"/>
-              <a:t> – owning sequence of </a:t>
-            </a:r>
-            <a:r>
-              <a:rPr lang="en-US" dirty="0" err="1"/>
-              <a:t>WfiMorphBundle</a:t>
-            </a:r>
-            <a:r>
-              <a:rPr lang="en-US" dirty="0"/>
-              <a:t>. There is one </a:t>
-            </a:r>
-            <a:r>
-              <a:rPr lang="en-US" dirty="0" err="1"/>
-              <a:t>WfiMorphBundle</a:t>
-            </a:r>
-            <a:r>
-              <a:rPr lang="en-US" dirty="0"/>
-              <a:t> for each morpheme in the wordform analysis.</a:t>
-            </a:r>
-          </a:p>
-          <a:p>
-            <a:pPr lvl="1"/>
-            <a:r>
-              <a:rPr lang="en-US" dirty="0"/>
-              <a:t>Evaluations – reference sequence to </a:t>
-            </a:r>
-            <a:r>
-              <a:rPr lang="en-US" dirty="0" err="1"/>
-              <a:t>CmAgentEvaluation</a:t>
-            </a:r>
-            <a:r>
-              <a:rPr lang="en-US" dirty="0"/>
-              <a:t> approving or disapproving the analysis for one or more </a:t>
-            </a:r>
-            <a:r>
-              <a:rPr lang="en-US" dirty="0" err="1"/>
-              <a:t>CmAgents</a:t>
-            </a:r>
-            <a:r>
-              <a:rPr lang="en-US" dirty="0"/>
-              <a:t>.</a:t>
-            </a:r>
-          </a:p>
-          <a:p>
-            <a:pPr lvl="1"/>
-            <a:endParaRPr lang="en-US" dirty="0"/>
-          </a:p>
-          <a:p>
-            <a:endParaRPr lang="en-US" dirty="0"/>
-          </a:p>
-          <a:p>
-            <a:endParaRPr lang="en-US" dirty="0"/>
-          </a:p>
-          <a:p>
-            <a:endParaRPr lang="en-US" dirty="0"/>
-          </a:p>
-          <a:p>
-            <a:endParaRPr lang="en-US" dirty="0"/>
-          </a:p>
-          <a:p>
-            <a:endParaRPr lang="en-US" dirty="0"/>
-          </a:p>
-          <a:p>
-            <a:endParaRPr lang="en-US" dirty="0"/>
-          </a:p>
-          <a:p>
-            <a:endParaRPr lang="en-US" dirty="0"/>
-          </a:p>
-        </p:txBody>
-      </p:sp>
       <p:pic>
         <p:nvPicPr>
-          <p:cNvPr id="7" name="Picture 6">
-            <a:extLst>
-              <a:ext uri="{FF2B5EF4-FFF2-40B4-BE49-F238E27FC236}">
-                <a16:creationId xmlns:a16="http://schemas.microsoft.com/office/drawing/2014/main" id="{B6B43883-F163-4FD5-8833-9D1AEC9F5758}"/>
+          <p:cNvPr id="3" name="Picture 2">
+            <a:extLst>
+              <a:ext uri="{FF2B5EF4-FFF2-40B4-BE49-F238E27FC236}">
+                <a16:creationId xmlns:a16="http://schemas.microsoft.com/office/drawing/2014/main" id="{2FA9172E-E40B-4CD9-BEE3-AC1A921A3D77}"/>
               </a:ext>
             </a:extLst>
           </p:cNvPr>
@@ -6018,20 +5745,97 @@
         </p:blipFill>
         <p:spPr>
           <a:xfrm>
-            <a:off x="9708723" y="2547825"/>
-            <a:ext cx="2362530" cy="552527"/>
+            <a:off x="5616312" y="318653"/>
+            <a:ext cx="6220693" cy="6220693"/>
           </a:xfrm>
           <a:prstGeom prst="rect">
             <a:avLst/>
           </a:prstGeom>
         </p:spPr>
       </p:pic>
+      <p:sp>
+        <p:nvSpPr>
+          <p:cNvPr id="4" name="Title 1">
+            <a:extLst>
+              <a:ext uri="{FF2B5EF4-FFF2-40B4-BE49-F238E27FC236}">
+                <a16:creationId xmlns:a16="http://schemas.microsoft.com/office/drawing/2014/main" id="{D020DABE-C917-4086-9913-77F3DFBC8176}"/>
+              </a:ext>
+            </a:extLst>
+          </p:cNvPr>
+          <p:cNvSpPr>
+            <a:spLocks noGrp="1"/>
+          </p:cNvSpPr>
+          <p:nvPr>
+            <p:ph type="title"/>
+          </p:nvPr>
+        </p:nvSpPr>
+        <p:spPr>
+          <a:xfrm>
+            <a:off x="838200" y="136525"/>
+            <a:ext cx="10515600" cy="803275"/>
+          </a:xfrm>
+        </p:spPr>
+        <p:txBody>
+          <a:bodyPr/>
+          <a:lstStyle/>
+          <a:p>
+            <a:r>
+              <a:rPr lang="en-US" dirty="0"/>
+              <a:t>Interlinear: Analyses continued</a:t>
+            </a:r>
+          </a:p>
+        </p:txBody>
+      </p:sp>
+      <p:sp>
+        <p:nvSpPr>
+          <p:cNvPr id="5" name="Content Placeholder 2">
+            <a:extLst>
+              <a:ext uri="{FF2B5EF4-FFF2-40B4-BE49-F238E27FC236}">
+                <a16:creationId xmlns:a16="http://schemas.microsoft.com/office/drawing/2014/main" id="{54980C95-9B20-461C-8447-ECB43E44F22E}"/>
+              </a:ext>
+            </a:extLst>
+          </p:cNvPr>
+          <p:cNvSpPr>
+            <a:spLocks noGrp="1"/>
+          </p:cNvSpPr>
+          <p:nvPr>
+            <p:ph idx="1"/>
+          </p:nvPr>
+        </p:nvSpPr>
+        <p:spPr>
+          <a:xfrm>
+            <a:off x="838200" y="939800"/>
+            <a:ext cx="10515600" cy="5681133"/>
+          </a:xfrm>
+        </p:spPr>
+        <p:txBody>
+          <a:bodyPr>
+            <a:normAutofit/>
+          </a:bodyPr>
+          <a:lstStyle/>
+          <a:p>
+            <a:endParaRPr lang="en-US" dirty="0"/>
+          </a:p>
+          <a:p>
+            <a:r>
+              <a:rPr lang="en-US" dirty="0"/>
+              <a:t>Preview…</a:t>
+            </a:r>
+          </a:p>
+          <a:p>
+            <a:endParaRPr lang="en-US" dirty="0"/>
+          </a:p>
+          <a:p>
+            <a:endParaRPr lang="en-US" dirty="0"/>
+          </a:p>
+        </p:txBody>
+      </p:sp>
       <p:pic>
         <p:nvPicPr>
           <p:cNvPr id="9" name="Picture 8">
             <a:extLst>
               <a:ext uri="{FF2B5EF4-FFF2-40B4-BE49-F238E27FC236}">
-                <a16:creationId xmlns:a16="http://schemas.microsoft.com/office/drawing/2014/main" id="{FEE2C02A-2626-42F0-96A0-6E81F3B1F617}"/>
+                <a16:creationId xmlns:a16="http://schemas.microsoft.com/office/drawing/2014/main" id="{1D814A5F-D8DA-4017-BE1E-F2E94E232380}"/>
               </a:ext>
             </a:extLst>
           </p:cNvPr>
@@ -6048,8 +5852,38 @@
         </p:blipFill>
         <p:spPr>
           <a:xfrm>
-            <a:off x="6096000" y="5503804"/>
-            <a:ext cx="4363059" cy="828791"/>
+            <a:off x="1972590" y="1971039"/>
+            <a:ext cx="2946191" cy="1981983"/>
+          </a:xfrm>
+          <a:prstGeom prst="rect">
+            <a:avLst/>
+          </a:prstGeom>
+        </p:spPr>
+      </p:pic>
+      <p:pic>
+        <p:nvPicPr>
+          <p:cNvPr id="10" name="Picture 9">
+            <a:extLst>
+              <a:ext uri="{FF2B5EF4-FFF2-40B4-BE49-F238E27FC236}">
+                <a16:creationId xmlns:a16="http://schemas.microsoft.com/office/drawing/2014/main" id="{F9E4BA7F-FAE0-4A88-A326-771B87C69D31}"/>
+              </a:ext>
+            </a:extLst>
+          </p:cNvPr>
+          <p:cNvPicPr>
+            <a:picLocks noChangeAspect="1"/>
+          </p:cNvPicPr>
+          <p:nvPr/>
+        </p:nvPicPr>
+        <p:blipFill>
+          <a:blip r:embed="rId4"/>
+          <a:stretch>
+            <a:fillRect/>
+          </a:stretch>
+        </p:blipFill>
+        <p:spPr>
+          <a:xfrm>
+            <a:off x="1302261" y="4410692"/>
+            <a:ext cx="4286848" cy="1886213"/>
           </a:xfrm>
           <a:prstGeom prst="rect">
             <a:avLst/>
@@ -6059,7 +5893,7 @@
     </p:spTree>
     <p:extLst>
       <p:ext uri="{BB962C8B-B14F-4D97-AF65-F5344CB8AC3E}">
-        <p14:creationId xmlns:p14="http://schemas.microsoft.com/office/powerpoint/2010/main" val="1619869322"/>
+        <p14:creationId xmlns:p14="http://schemas.microsoft.com/office/powerpoint/2010/main" val="83518071"/>
       </p:ext>
     </p:extLst>
   </p:cSld>
@@ -6118,7 +5952,7 @@
             </a:r>
             <a:r>
               <a:rPr lang="en-US" dirty="0" err="1"/>
-              <a:t>CmAgent</a:t>
+              <a:t>WfiAnalysis</a:t>
             </a:r>
             <a:endParaRPr lang="en-US" dirty="0"/>
           </a:p>
@@ -6148,59 +5982,115 @@
         </p:spPr>
         <p:txBody>
           <a:bodyPr>
-            <a:normAutofit lnSpcReduction="10000"/>
+            <a:normAutofit/>
           </a:bodyPr>
           <a:lstStyle/>
           <a:p>
             <a:r>
-              <a:rPr lang="en-US" dirty="0" err="1"/>
-              <a:t>LangProject</a:t>
-            </a:r>
-            <a:r>
-              <a:rPr lang="en-US" dirty="0"/>
-              <a:t> owns the following </a:t>
-            </a:r>
-            <a:r>
-              <a:rPr lang="en-US" dirty="0" err="1"/>
-              <a:t>CmAgent</a:t>
-            </a:r>
-            <a:r>
-              <a:rPr lang="en-US" dirty="0"/>
-              <a:t> objects in the </a:t>
-            </a:r>
-            <a:r>
-              <a:rPr lang="en-US" dirty="0" err="1"/>
-              <a:t>AnalyzingAgents</a:t>
-            </a:r>
-            <a:r>
-              <a:rPr lang="en-US" dirty="0"/>
-              <a:t> owning collection.</a:t>
-            </a:r>
-          </a:p>
-          <a:p>
-            <a:endParaRPr lang="en-US" dirty="0"/>
-          </a:p>
-          <a:p>
-            <a:endParaRPr lang="en-US" dirty="0"/>
-          </a:p>
-          <a:p>
-            <a:endParaRPr lang="en-US" dirty="0"/>
-          </a:p>
-          <a:p>
-            <a:endParaRPr lang="en-US" dirty="0"/>
-          </a:p>
-          <a:p>
-            <a:r>
-              <a:rPr lang="en-US" dirty="0"/>
-              <a:t>Each </a:t>
-            </a:r>
-            <a:r>
-              <a:rPr lang="en-US" dirty="0" err="1"/>
-              <a:t>CmAgent</a:t>
-            </a:r>
-            <a:r>
-              <a:rPr lang="en-US" dirty="0"/>
-              <a:t> has an Approves, and a Disapproves property owning a </a:t>
+              <a:rPr lang="en-US" dirty="0"/>
+              <a:t>The ‘garçon’ </a:t>
+            </a:r>
+            <a:r>
+              <a:rPr lang="en-US" dirty="0" err="1"/>
+              <a:t>WfiWordform</a:t>
+            </a:r>
+            <a:r>
+              <a:rPr lang="en-US" dirty="0"/>
+              <a:t> now owns a </a:t>
+            </a:r>
+            <a:r>
+              <a:rPr lang="en-US" dirty="0" err="1"/>
+              <a:t>WfiAnalysis</a:t>
+            </a:r>
+            <a:r>
+              <a:rPr lang="en-US" dirty="0"/>
+              <a:t> object.</a:t>
+            </a:r>
+          </a:p>
+          <a:p>
+            <a:r>
+              <a:rPr lang="en-US" dirty="0"/>
+              <a:t>A </a:t>
+            </a:r>
+            <a:r>
+              <a:rPr lang="en-US" dirty="0" err="1"/>
+              <a:t>WfiAnalysis</a:t>
+            </a:r>
+            <a:r>
+              <a:rPr lang="en-US" dirty="0"/>
+              <a:t> objects has</a:t>
+            </a:r>
+          </a:p>
+          <a:p>
+            <a:pPr lvl="1"/>
+            <a:r>
+              <a:rPr lang="en-US" dirty="0"/>
+              <a:t>Category – atomic reference to a </a:t>
+            </a:r>
+            <a:r>
+              <a:rPr lang="en-US" dirty="0" err="1"/>
+              <a:t>PartOfSpeech</a:t>
+            </a:r>
+            <a:r>
+              <a:rPr lang="en-US" dirty="0"/>
+              <a:t> in the Category list in the Grammar area. This shows up in the Word Category line of the Analyze tab of an interlinear text.</a:t>
+            </a:r>
+          </a:p>
+          <a:p>
+            <a:pPr lvl="1"/>
+            <a:r>
+              <a:rPr lang="en-US" dirty="0"/>
+              <a:t>Meanings – owning collection holding </a:t>
+            </a:r>
+            <a:r>
+              <a:rPr lang="en-US" dirty="0" err="1"/>
+              <a:t>WfiGloss</a:t>
+            </a:r>
+            <a:r>
+              <a:rPr lang="en-US" dirty="0"/>
+              <a:t> objects. One of these </a:t>
+            </a:r>
+            <a:r>
+              <a:rPr lang="en-US" dirty="0" err="1"/>
+              <a:t>WfiGloss</a:t>
+            </a:r>
+            <a:r>
+              <a:rPr lang="en-US" dirty="0"/>
+              <a:t> objects will show up in the Word Gloss line of the Analyze tab of an interlinear text.</a:t>
+            </a:r>
+          </a:p>
+          <a:p>
+            <a:pPr lvl="1"/>
+            <a:r>
+              <a:rPr lang="en-US" dirty="0" err="1"/>
+              <a:t>MorphBundles</a:t>
+            </a:r>
+            <a:r>
+              <a:rPr lang="en-US" dirty="0"/>
+              <a:t> – owning sequence of </a:t>
+            </a:r>
+            <a:r>
+              <a:rPr lang="en-US" dirty="0" err="1"/>
+              <a:t>WfiMorphBundle</a:t>
+            </a:r>
+            <a:r>
+              <a:rPr lang="en-US" dirty="0"/>
+              <a:t>. There is one </a:t>
+            </a:r>
+            <a:r>
+              <a:rPr lang="en-US" dirty="0" err="1"/>
+              <a:t>WfiMorphBundle</a:t>
+            </a:r>
+            <a:r>
+              <a:rPr lang="en-US" dirty="0"/>
+              <a:t> for each morpheme in the wordform analysis.</a:t>
+            </a:r>
+          </a:p>
+          <a:p>
+            <a:pPr lvl="1"/>
+            <a:r>
+              <a:rPr lang="en-US" dirty="0"/>
+              <a:t>Evaluations – reference sequence to </a:t>
             </a:r>
             <a:r>
               <a:rPr lang="en-US" dirty="0" err="1"/>
@@ -6208,7 +6098,7 @@
             </a:r>
             <a:r>
               <a:rPr lang="en-US" dirty="0"/>
-              <a:t>. Analyses can be approved or disapproved by any of these </a:t>
+              <a:t> approving or disapproving the analysis for one or more </a:t>
             </a:r>
             <a:r>
               <a:rPr lang="en-US" dirty="0" err="1"/>
@@ -6216,31 +6106,21 @@
             </a:r>
             <a:r>
               <a:rPr lang="en-US" dirty="0"/>
-              <a:t> by referencing the desired </a:t>
-            </a:r>
-            <a:r>
-              <a:rPr lang="en-US" dirty="0" err="1"/>
-              <a:t>CmAgentEvaluation</a:t>
-            </a:r>
-            <a:r>
-              <a:rPr lang="en-US" dirty="0"/>
-              <a:t> through the Evaluations reference collection property on </a:t>
-            </a:r>
-            <a:r>
-              <a:rPr lang="en-US" dirty="0" err="1"/>
-              <a:t>WfiAnalysis</a:t>
-            </a:r>
-            <a:r>
-              <a:rPr lang="en-US" dirty="0"/>
-              <a:t>. The current suggestions are generated and approved by the Computer parser. At this point it’s up to the user whether they want to approved the</a:t>
-            </a:r>
-            <a:br>
-              <a:rPr lang="en-US" dirty="0"/>
-            </a:br>
-            <a:r>
-              <a:rPr lang="en-US" dirty="0"/>
-              <a:t>analyses or not.</a:t>
-            </a:r>
+              <a:t>.</a:t>
+            </a:r>
+          </a:p>
+          <a:p>
+            <a:pPr lvl="1"/>
+            <a:endParaRPr lang="en-US" dirty="0"/>
+          </a:p>
+          <a:p>
+            <a:endParaRPr lang="en-US" dirty="0"/>
+          </a:p>
+          <a:p>
+            <a:endParaRPr lang="en-US" dirty="0"/>
+          </a:p>
+          <a:p>
+            <a:endParaRPr lang="en-US" dirty="0"/>
           </a:p>
           <a:p>
             <a:endParaRPr lang="en-US" dirty="0"/>
@@ -6258,10 +6138,10 @@
       </p:sp>
       <p:pic>
         <p:nvPicPr>
-          <p:cNvPr id="6" name="Picture 5">
-            <a:extLst>
-              <a:ext uri="{FF2B5EF4-FFF2-40B4-BE49-F238E27FC236}">
-                <a16:creationId xmlns:a16="http://schemas.microsoft.com/office/drawing/2014/main" id="{F9B446DC-A857-4211-81CC-7B9EF3A42CC4}"/>
+          <p:cNvPr id="7" name="Picture 6">
+            <a:extLst>
+              <a:ext uri="{FF2B5EF4-FFF2-40B4-BE49-F238E27FC236}">
+                <a16:creationId xmlns:a16="http://schemas.microsoft.com/office/drawing/2014/main" id="{B6B43883-F163-4FD5-8833-9D1AEC9F5758}"/>
               </a:ext>
             </a:extLst>
           </p:cNvPr>
@@ -6278,8 +6158,8 @@
         </p:blipFill>
         <p:spPr>
           <a:xfrm>
-            <a:off x="1107330" y="1743074"/>
-            <a:ext cx="9055832" cy="1685926"/>
+            <a:off x="9708723" y="2547825"/>
+            <a:ext cx="2362530" cy="552527"/>
           </a:xfrm>
           <a:prstGeom prst="rect">
             <a:avLst/>
@@ -6288,10 +6168,10 @@
       </p:pic>
       <p:pic>
         <p:nvPicPr>
-          <p:cNvPr id="2" name="Picture 1">
-            <a:extLst>
-              <a:ext uri="{FF2B5EF4-FFF2-40B4-BE49-F238E27FC236}">
-                <a16:creationId xmlns:a16="http://schemas.microsoft.com/office/drawing/2014/main" id="{38AC1593-6643-47B3-9F15-2C9DE75CAD47}"/>
+          <p:cNvPr id="9" name="Picture 8">
+            <a:extLst>
+              <a:ext uri="{FF2B5EF4-FFF2-40B4-BE49-F238E27FC236}">
+                <a16:creationId xmlns:a16="http://schemas.microsoft.com/office/drawing/2014/main" id="{FEE2C02A-2626-42F0-96A0-6E81F3B1F617}"/>
               </a:ext>
             </a:extLst>
           </p:cNvPr>
@@ -6308,7 +6188,7 @@
         </p:blipFill>
         <p:spPr>
           <a:xfrm>
-            <a:off x="7053909" y="5792142"/>
+            <a:off x="6096000" y="5503804"/>
             <a:ext cx="4363059" cy="828791"/>
           </a:xfrm>
           <a:prstGeom prst="rect">
@@ -6319,7 +6199,7 @@
     </p:spTree>
     <p:extLst>
       <p:ext uri="{BB962C8B-B14F-4D97-AF65-F5344CB8AC3E}">
-        <p14:creationId xmlns:p14="http://schemas.microsoft.com/office/powerpoint/2010/main" val="4026037314"/>
+        <p14:creationId xmlns:p14="http://schemas.microsoft.com/office/powerpoint/2010/main" val="1619869322"/>
       </p:ext>
     </p:extLst>
   </p:cSld>
@@ -6378,7 +6258,7 @@
             </a:r>
             <a:r>
               <a:rPr lang="en-US" dirty="0" err="1"/>
-              <a:t>WfiMorphBundle</a:t>
+              <a:t>CmAgent</a:t>
             </a:r>
             <a:endParaRPr lang="en-US" dirty="0"/>
           </a:p>
@@ -6408,140 +6288,99 @@
         </p:spPr>
         <p:txBody>
           <a:bodyPr>
-            <a:normAutofit/>
+            <a:normAutofit lnSpcReduction="10000"/>
           </a:bodyPr>
           <a:lstStyle/>
           <a:p>
             <a:r>
               <a:rPr lang="en-US" dirty="0" err="1"/>
-              <a:t>WfiMorphBundle</a:t>
-            </a:r>
-            <a:r>
-              <a:rPr lang="en-US" dirty="0"/>
-              <a:t> has</a:t>
-            </a:r>
-          </a:p>
-          <a:p>
-            <a:pPr lvl="1"/>
-            <a:r>
-              <a:rPr lang="en-US" dirty="0"/>
-              <a:t>Form – MultiString form for the morpheme. This form will be displayed in the Morphemes line in the Analyze tab of an interlinear text if the Morph property is empty. Once the Morph property is set, the Morphemes line displays the Form from the referenced </a:t>
-            </a:r>
-            <a:r>
-              <a:rPr lang="en-US" dirty="0" err="1"/>
-              <a:t>MoForm</a:t>
-            </a:r>
-            <a:r>
-              <a:rPr lang="en-US" dirty="0"/>
-              <a:t>,</a:t>
-            </a:r>
-          </a:p>
-          <a:p>
-            <a:pPr lvl="1"/>
-            <a:r>
-              <a:rPr lang="en-US" dirty="0"/>
-              <a:t>Morph – atomic reference to a </a:t>
-            </a:r>
-            <a:r>
-              <a:rPr lang="en-US" dirty="0" err="1"/>
-              <a:t>MoForm</a:t>
-            </a:r>
-            <a:r>
-              <a:rPr lang="en-US" dirty="0"/>
-              <a:t>, either in the </a:t>
-            </a:r>
-            <a:r>
-              <a:rPr lang="en-US" dirty="0" err="1"/>
-              <a:t>LexemeForm</a:t>
-            </a:r>
-            <a:r>
-              <a:rPr lang="en-US" dirty="0"/>
-              <a:t> or </a:t>
-            </a:r>
-            <a:r>
-              <a:rPr lang="en-US" dirty="0" err="1"/>
-              <a:t>AlternateForms</a:t>
-            </a:r>
-            <a:r>
-              <a:rPr lang="en-US" dirty="0"/>
-              <a:t> property of a </a:t>
-            </a:r>
-            <a:r>
-              <a:rPr lang="en-US" dirty="0" err="1"/>
-              <a:t>LexEntry</a:t>
-            </a:r>
-            <a:r>
-              <a:rPr lang="en-US" dirty="0"/>
-              <a:t>. This Form is displayed in the Lex Entries line in the Analyze tab of an interlinear text.</a:t>
-            </a:r>
-          </a:p>
-          <a:p>
-            <a:pPr lvl="1"/>
-            <a:r>
-              <a:rPr lang="en-US" dirty="0" err="1"/>
-              <a:t>Msa</a:t>
-            </a:r>
-            <a:r>
-              <a:rPr lang="en-US" dirty="0"/>
-              <a:t> – atomic reference to a </a:t>
-            </a:r>
-            <a:r>
-              <a:rPr lang="en-US" dirty="0" err="1"/>
-              <a:t>MoMorphSynAnalysis</a:t>
-            </a:r>
-            <a:r>
-              <a:rPr lang="en-US" dirty="0"/>
-              <a:t> in the Morph entry. This </a:t>
-            </a:r>
-            <a:r>
-              <a:rPr lang="en-US" dirty="0" err="1"/>
-              <a:t>PartOfSpeech</a:t>
-            </a:r>
-            <a:r>
-              <a:rPr lang="en-US" dirty="0"/>
-              <a:t> in this analysis is displayed in the Lex Gram Info line in the Analyze tab of an interlinear text.</a:t>
-            </a:r>
-          </a:p>
-          <a:p>
-            <a:pPr lvl="1"/>
-            <a:r>
-              <a:rPr lang="en-US" dirty="0"/>
-              <a:t>Sense – atomic reference to a </a:t>
-            </a:r>
-            <a:r>
-              <a:rPr lang="en-US" dirty="0" err="1"/>
-              <a:t>LexSense</a:t>
-            </a:r>
-            <a:r>
-              <a:rPr lang="en-US" dirty="0"/>
-              <a:t> in the Morph entry that shares the </a:t>
-            </a:r>
-            <a:r>
-              <a:rPr lang="en-US" dirty="0" err="1"/>
-              <a:t>Msa</a:t>
-            </a:r>
-            <a:r>
-              <a:rPr lang="en-US" dirty="0"/>
-              <a:t> referenced by this </a:t>
-            </a:r>
-            <a:r>
-              <a:rPr lang="en-US" dirty="0" err="1"/>
-              <a:t>WfiMorphBundle</a:t>
-            </a:r>
-            <a:r>
-              <a:rPr lang="en-US" dirty="0"/>
-              <a:t>. The Gloss from this sense is displayed in the Lex Gloss line in the Analyze tab of an interlinear text.</a:t>
-            </a:r>
-          </a:p>
-          <a:p>
-            <a:pPr lvl="1"/>
-            <a:endParaRPr lang="en-US" dirty="0"/>
-          </a:p>
-          <a:p>
-            <a:endParaRPr lang="en-US" dirty="0"/>
-          </a:p>
-          <a:p>
-            <a:endParaRPr lang="en-US" dirty="0"/>
+              <a:t>LangProject</a:t>
+            </a:r>
+            <a:r>
+              <a:rPr lang="en-US" dirty="0"/>
+              <a:t> owns the following </a:t>
+            </a:r>
+            <a:r>
+              <a:rPr lang="en-US" dirty="0" err="1"/>
+              <a:t>CmAgent</a:t>
+            </a:r>
+            <a:r>
+              <a:rPr lang="en-US" dirty="0"/>
+              <a:t> objects in the </a:t>
+            </a:r>
+            <a:r>
+              <a:rPr lang="en-US" dirty="0" err="1"/>
+              <a:t>AnalyzingAgents</a:t>
+            </a:r>
+            <a:r>
+              <a:rPr lang="en-US" dirty="0"/>
+              <a:t> owning collection.</a:t>
+            </a:r>
+          </a:p>
+          <a:p>
+            <a:endParaRPr lang="en-US" dirty="0"/>
+          </a:p>
+          <a:p>
+            <a:endParaRPr lang="en-US" dirty="0"/>
+          </a:p>
+          <a:p>
+            <a:endParaRPr lang="en-US" dirty="0"/>
+          </a:p>
+          <a:p>
+            <a:endParaRPr lang="en-US" dirty="0"/>
+          </a:p>
+          <a:p>
+            <a:r>
+              <a:rPr lang="en-US" dirty="0"/>
+              <a:t>Each </a:t>
+            </a:r>
+            <a:r>
+              <a:rPr lang="en-US" dirty="0" err="1"/>
+              <a:t>CmAgent</a:t>
+            </a:r>
+            <a:r>
+              <a:rPr lang="en-US" dirty="0"/>
+              <a:t> has an Approves, and a Disapproves property owning a </a:t>
+            </a:r>
+            <a:r>
+              <a:rPr lang="en-US" dirty="0" err="1"/>
+              <a:t>CmAgentEvaluation</a:t>
+            </a:r>
+            <a:r>
+              <a:rPr lang="en-US" dirty="0"/>
+              <a:t>. Analyses can be approved or disapproved by any of these </a:t>
+            </a:r>
+            <a:r>
+              <a:rPr lang="en-US" dirty="0" err="1"/>
+              <a:t>CmAgents</a:t>
+            </a:r>
+            <a:r>
+              <a:rPr lang="en-US" dirty="0"/>
+              <a:t> by referencing the desired </a:t>
+            </a:r>
+            <a:r>
+              <a:rPr lang="en-US" dirty="0" err="1"/>
+              <a:t>CmAgentEvaluation</a:t>
+            </a:r>
+            <a:r>
+              <a:rPr lang="en-US" dirty="0"/>
+              <a:t> through the Evaluations reference collection property on </a:t>
+            </a:r>
+            <a:r>
+              <a:rPr lang="en-US" dirty="0" err="1"/>
+              <a:t>WfiAnalysis</a:t>
+            </a:r>
+            <a:r>
+              <a:rPr lang="en-US" dirty="0"/>
+              <a:t>. The current suggestions are generated and approved by the Computer parser. At this point it’s up to the user whether they want to approved the</a:t>
+            </a:r>
+            <a:br>
+              <a:rPr lang="en-US" dirty="0"/>
+            </a:br>
+            <a:r>
+              <a:rPr lang="en-US" dirty="0"/>
+              <a:t>analyses or not.</a:t>
+            </a:r>
           </a:p>
           <a:p>
             <a:endParaRPr lang="en-US" dirty="0"/>
@@ -6559,10 +6398,10 @@
       </p:sp>
       <p:pic>
         <p:nvPicPr>
-          <p:cNvPr id="2" name="Picture 1">
-            <a:extLst>
-              <a:ext uri="{FF2B5EF4-FFF2-40B4-BE49-F238E27FC236}">
-                <a16:creationId xmlns:a16="http://schemas.microsoft.com/office/drawing/2014/main" id="{91EA7390-3C0C-4DC9-9267-197BEFBE417A}"/>
+          <p:cNvPr id="6" name="Picture 5">
+            <a:extLst>
+              <a:ext uri="{FF2B5EF4-FFF2-40B4-BE49-F238E27FC236}">
+                <a16:creationId xmlns:a16="http://schemas.microsoft.com/office/drawing/2014/main" id="{F9B446DC-A857-4211-81CC-7B9EF3A42CC4}"/>
               </a:ext>
             </a:extLst>
           </p:cNvPr>
@@ -6579,8 +6418,38 @@
         </p:blipFill>
         <p:spPr>
           <a:xfrm>
-            <a:off x="9491655" y="5918200"/>
-            <a:ext cx="2676899" cy="914528"/>
+            <a:off x="1107330" y="1743074"/>
+            <a:ext cx="9055832" cy="1685926"/>
+          </a:xfrm>
+          <a:prstGeom prst="rect">
+            <a:avLst/>
+          </a:prstGeom>
+        </p:spPr>
+      </p:pic>
+      <p:pic>
+        <p:nvPicPr>
+          <p:cNvPr id="2" name="Picture 1">
+            <a:extLst>
+              <a:ext uri="{FF2B5EF4-FFF2-40B4-BE49-F238E27FC236}">
+                <a16:creationId xmlns:a16="http://schemas.microsoft.com/office/drawing/2014/main" id="{38AC1593-6643-47B3-9F15-2C9DE75CAD47}"/>
+              </a:ext>
+            </a:extLst>
+          </p:cNvPr>
+          <p:cNvPicPr>
+            <a:picLocks noChangeAspect="1"/>
+          </p:cNvPicPr>
+          <p:nvPr/>
+        </p:nvPicPr>
+        <p:blipFill>
+          <a:blip r:embed="rId3"/>
+          <a:stretch>
+            <a:fillRect/>
+          </a:stretch>
+        </p:blipFill>
+        <p:spPr>
+          <a:xfrm>
+            <a:off x="7053909" y="5792142"/>
+            <a:ext cx="4363059" cy="828791"/>
           </a:xfrm>
           <a:prstGeom prst="rect">
             <a:avLst/>
@@ -6590,7 +6459,7 @@
     </p:spTree>
     <p:extLst>
       <p:ext uri="{BB962C8B-B14F-4D97-AF65-F5344CB8AC3E}">
-        <p14:creationId xmlns:p14="http://schemas.microsoft.com/office/powerpoint/2010/main" val="2936320911"/>
+        <p14:creationId xmlns:p14="http://schemas.microsoft.com/office/powerpoint/2010/main" val="4026037314"/>
       </p:ext>
     </p:extLst>
   </p:cSld>
@@ -6645,8 +6514,13 @@
           <a:p>
             <a:r>
               <a:rPr lang="en-US" dirty="0"/>
-              <a:t>Interlinear: Approving analyses</a:t>
-            </a:r>
+              <a:t>Interlinear: Analyses </a:t>
+            </a:r>
+            <a:r>
+              <a:rPr lang="en-US" dirty="0" err="1"/>
+              <a:t>WfiMorphBundle</a:t>
+            </a:r>
+            <a:endParaRPr lang="en-US" dirty="0"/>
           </a:p>
         </p:txBody>
       </p:sp>
@@ -6679,19 +6553,125 @@
           <a:lstStyle/>
           <a:p>
             <a:r>
-              <a:rPr lang="en-US" dirty="0"/>
-              <a:t>If the user clicks the green Approve button in ‘garçon’ in the word focus box, the Analyze tab shows (left)</a:t>
-            </a:r>
-          </a:p>
-          <a:p>
-            <a:r>
-              <a:rPr lang="en-US" dirty="0"/>
-              <a:t>and the Word Analyses tool shows (right)</a:t>
+              <a:rPr lang="en-US" dirty="0" err="1"/>
+              <a:t>WfiMorphBundle</a:t>
+            </a:r>
+            <a:r>
+              <a:rPr lang="en-US" dirty="0"/>
+              <a:t> has</a:t>
             </a:r>
           </a:p>
           <a:p>
             <a:pPr lvl="1"/>
-            <a:endParaRPr lang="en-US" dirty="0"/>
+            <a:r>
+              <a:rPr lang="en-US" dirty="0"/>
+              <a:t>Form – MultiString form for the morpheme. This form will be displayed in the Morphemes line in the Analyze tab of an interlinear text if the Morph property is empty. Once the Morph property is set, the Morphemes line displays the Form from the referenced </a:t>
+            </a:r>
+            <a:r>
+              <a:rPr lang="en-US" dirty="0" err="1"/>
+              <a:t>MoForm</a:t>
+            </a:r>
+            <a:r>
+              <a:rPr lang="en-US" dirty="0"/>
+              <a:t>,</a:t>
+            </a:r>
+          </a:p>
+          <a:p>
+            <a:pPr lvl="1"/>
+            <a:r>
+              <a:rPr lang="en-US" dirty="0"/>
+              <a:t>Morph – atomic reference to a </a:t>
+            </a:r>
+            <a:r>
+              <a:rPr lang="en-US" dirty="0" err="1"/>
+              <a:t>MoForm</a:t>
+            </a:r>
+            <a:r>
+              <a:rPr lang="en-US" dirty="0"/>
+              <a:t>, either in the </a:t>
+            </a:r>
+            <a:r>
+              <a:rPr lang="en-US" dirty="0" err="1"/>
+              <a:t>LexemeForm</a:t>
+            </a:r>
+            <a:r>
+              <a:rPr lang="en-US" dirty="0"/>
+              <a:t> or </a:t>
+            </a:r>
+            <a:r>
+              <a:rPr lang="en-US" dirty="0" err="1"/>
+              <a:t>AlternateForms</a:t>
+            </a:r>
+            <a:r>
+              <a:rPr lang="en-US" dirty="0"/>
+              <a:t> property of a </a:t>
+            </a:r>
+            <a:r>
+              <a:rPr lang="en-US" dirty="0" err="1"/>
+              <a:t>LexEntry</a:t>
+            </a:r>
+            <a:r>
+              <a:rPr lang="en-US" dirty="0"/>
+              <a:t>. This Form is displayed in the Lex Entries line in the Analyze tab of an interlinear text.</a:t>
+            </a:r>
+          </a:p>
+          <a:p>
+            <a:pPr lvl="1"/>
+            <a:r>
+              <a:rPr lang="en-US" dirty="0" err="1"/>
+              <a:t>Msa</a:t>
+            </a:r>
+            <a:r>
+              <a:rPr lang="en-US" dirty="0"/>
+              <a:t> – atomic reference to a </a:t>
+            </a:r>
+            <a:r>
+              <a:rPr lang="en-US" dirty="0" err="1"/>
+              <a:t>MoMorphSynAnalysis</a:t>
+            </a:r>
+            <a:r>
+              <a:rPr lang="en-US" dirty="0"/>
+              <a:t> in the Morph entry. This </a:t>
+            </a:r>
+            <a:r>
+              <a:rPr lang="en-US" dirty="0" err="1"/>
+              <a:t>PartOfSpeech</a:t>
+            </a:r>
+            <a:r>
+              <a:rPr lang="en-US" dirty="0"/>
+              <a:t> in this analysis is displayed in the Lex Gram Info line in the Analyze tab of an interlinear text.</a:t>
+            </a:r>
+          </a:p>
+          <a:p>
+            <a:pPr lvl="1"/>
+            <a:r>
+              <a:rPr lang="en-US" dirty="0"/>
+              <a:t>Sense – atomic reference to a </a:t>
+            </a:r>
+            <a:r>
+              <a:rPr lang="en-US" dirty="0" err="1"/>
+              <a:t>LexSense</a:t>
+            </a:r>
+            <a:r>
+              <a:rPr lang="en-US" dirty="0"/>
+              <a:t> in the Morph entry that shares the </a:t>
+            </a:r>
+            <a:r>
+              <a:rPr lang="en-US" dirty="0" err="1"/>
+              <a:t>Msa</a:t>
+            </a:r>
+            <a:r>
+              <a:rPr lang="en-US" dirty="0"/>
+              <a:t> referenced by this </a:t>
+            </a:r>
+            <a:r>
+              <a:rPr lang="en-US" dirty="0" err="1"/>
+              <a:t>WfiMorphBundle</a:t>
+            </a:r>
+            <a:r>
+              <a:rPr lang="en-US" dirty="0"/>
+              <a:t>. The Gloss from this sense is displayed in the Lex Gloss line in the Analyze tab of an interlinear text.</a:t>
+            </a:r>
           </a:p>
           <a:p>
             <a:pPr lvl="1"/>
@@ -6719,14 +6699,16 @@
       </p:sp>
       <p:pic>
         <p:nvPicPr>
-          <p:cNvPr id="6" name="Picture 5">
-            <a:extLst>
-              <a:ext uri="{FF2B5EF4-FFF2-40B4-BE49-F238E27FC236}">
-                <a16:creationId xmlns:a16="http://schemas.microsoft.com/office/drawing/2014/main" id="{2157E336-C648-4BB2-AF9B-069C276F69F6}"/>
-              </a:ext>
-            </a:extLst>
-          </p:cNvPr>
-          <p:cNvPicPr/>
+          <p:cNvPr id="2" name="Picture 1">
+            <a:extLst>
+              <a:ext uri="{FF2B5EF4-FFF2-40B4-BE49-F238E27FC236}">
+                <a16:creationId xmlns:a16="http://schemas.microsoft.com/office/drawing/2014/main" id="{91EA7390-3C0C-4DC9-9267-197BEFBE417A}"/>
+              </a:ext>
+            </a:extLst>
+          </p:cNvPr>
+          <p:cNvPicPr>
+            <a:picLocks noChangeAspect="1"/>
+          </p:cNvPicPr>
           <p:nvPr/>
         </p:nvPicPr>
         <p:blipFill>
@@ -6737,36 +6719,8 @@
         </p:blipFill>
         <p:spPr>
           <a:xfrm>
-            <a:off x="838200" y="2766643"/>
-            <a:ext cx="3192558" cy="2353997"/>
-          </a:xfrm>
-          <a:prstGeom prst="rect">
-            <a:avLst/>
-          </a:prstGeom>
-        </p:spPr>
-      </p:pic>
-      <p:pic>
-        <p:nvPicPr>
-          <p:cNvPr id="7" name="Picture 6">
-            <a:extLst>
-              <a:ext uri="{FF2B5EF4-FFF2-40B4-BE49-F238E27FC236}">
-                <a16:creationId xmlns:a16="http://schemas.microsoft.com/office/drawing/2014/main" id="{9429ECA2-2DBF-4F4F-842F-C83547C37BB7}"/>
-              </a:ext>
-            </a:extLst>
-          </p:cNvPr>
-          <p:cNvPicPr/>
-          <p:nvPr/>
-        </p:nvPicPr>
-        <p:blipFill>
-          <a:blip r:embed="rId3"/>
-          <a:stretch>
-            <a:fillRect/>
-          </a:stretch>
-        </p:blipFill>
-        <p:spPr>
-          <a:xfrm>
-            <a:off x="4819432" y="2616101"/>
-            <a:ext cx="6497412" cy="3067247"/>
+            <a:off x="9491655" y="5918200"/>
+            <a:ext cx="2676899" cy="914528"/>
           </a:xfrm>
           <a:prstGeom prst="rect">
             <a:avLst/>
@@ -6776,7 +6730,7 @@
     </p:spTree>
     <p:extLst>
       <p:ext uri="{BB962C8B-B14F-4D97-AF65-F5344CB8AC3E}">
-        <p14:creationId xmlns:p14="http://schemas.microsoft.com/office/powerpoint/2010/main" val="3790949010"/>
+        <p14:creationId xmlns:p14="http://schemas.microsoft.com/office/powerpoint/2010/main" val="2936320911"/>
       </p:ext>
     </p:extLst>
   </p:cSld>
@@ -6854,264 +6808,26 @@
         </p:nvSpPr>
         <p:spPr>
           <a:xfrm>
-            <a:off x="486508" y="951132"/>
-            <a:ext cx="10867292" cy="5681133"/>
+            <a:off x="838200" y="939800"/>
+            <a:ext cx="10515600" cy="5681133"/>
           </a:xfrm>
         </p:spPr>
         <p:txBody>
           <a:bodyPr>
-            <a:normAutofit fontScale="70000" lnSpcReduction="20000"/>
+            <a:normAutofit/>
           </a:bodyPr>
           <a:lstStyle/>
           <a:p>
             <a:r>
               <a:rPr lang="en-US" dirty="0"/>
-              <a:t>Two changes occurred in the FLEx data.</a:t>
-            </a:r>
-          </a:p>
-          <a:p>
-            <a:pPr lvl="0"/>
-            <a:r>
-              <a:rPr lang="en-US" dirty="0"/>
-              <a:t>In the Segment Analyses list of references for wordforms, the second one that used to reference the ‘garçon’ </a:t>
-            </a:r>
-            <a:r>
-              <a:rPr lang="en-US" dirty="0" err="1"/>
-              <a:t>WfiWordform</a:t>
-            </a:r>
-            <a:r>
-              <a:rPr lang="en-US" dirty="0"/>
-              <a:t> now references the ‘boy’ </a:t>
-            </a:r>
-            <a:r>
-              <a:rPr lang="en-US" dirty="0" err="1"/>
-              <a:t>WfiGloss</a:t>
-            </a:r>
-            <a:r>
-              <a:rPr lang="en-US" dirty="0"/>
-              <a:t> object owned in the </a:t>
-            </a:r>
-            <a:r>
-              <a:rPr lang="en-US" dirty="0" err="1"/>
-              <a:t>WfiAnalysis</a:t>
-            </a:r>
-            <a:r>
-              <a:rPr lang="en-US" dirty="0"/>
-              <a:t> owned by the ‘garçon’ </a:t>
-            </a:r>
-            <a:r>
-              <a:rPr lang="en-US" dirty="0" err="1"/>
-              <a:t>WfiWordform</a:t>
-            </a:r>
-            <a:r>
-              <a:rPr lang="en-US" dirty="0"/>
-              <a:t>.</a:t>
-            </a:r>
-            <a:br>
-              <a:rPr lang="en-US" dirty="0"/>
-            </a:br>
-            <a:br>
-              <a:rPr lang="en-US" dirty="0"/>
-            </a:br>
-            <a:r>
-              <a:rPr lang="en-US" dirty="0"/>
-              <a:t>&lt;rt class="Segment" guid="78220579-5e21-47df-82b1-1fd72a02748d" </a:t>
-            </a:r>
-            <a:r>
-              <a:rPr lang="en-US" dirty="0" err="1"/>
-              <a:t>ownerguid</a:t>
-            </a:r>
-            <a:r>
-              <a:rPr lang="en-US" dirty="0"/>
-              <a:t>="a51ed87e-d6fe-44d6-a317-1b726d218fe3"&gt;</a:t>
-            </a:r>
-            <a:br>
-              <a:rPr lang="en-US" dirty="0"/>
-            </a:br>
-            <a:r>
-              <a:rPr lang="en-US" dirty="0"/>
-              <a:t>&lt;Analyses&gt;</a:t>
-            </a:r>
-            <a:br>
-              <a:rPr lang="en-US" dirty="0"/>
-            </a:br>
-            <a:r>
-              <a:rPr lang="en-US" dirty="0"/>
-              <a:t>&lt;</a:t>
-            </a:r>
-            <a:r>
-              <a:rPr lang="en-US" dirty="0" err="1"/>
-              <a:t>objsur</a:t>
-            </a:r>
-            <a:r>
-              <a:rPr lang="en-US" dirty="0"/>
-              <a:t> guid="b0460a42-7e19-460e-9ec8-4779c4a5f3ff" t="r" /&gt;   Le</a:t>
-            </a:r>
-            <a:br>
-              <a:rPr lang="en-US" dirty="0"/>
-            </a:br>
-            <a:r>
-              <a:rPr lang="en-US" dirty="0"/>
-              <a:t>&lt;</a:t>
-            </a:r>
-            <a:r>
-              <a:rPr lang="en-US" dirty="0" err="1"/>
-              <a:t>objsur</a:t>
-            </a:r>
-            <a:r>
-              <a:rPr lang="en-US" dirty="0"/>
-              <a:t> guid="7dec7244-62f4-441f-bfc9-c9564093c2f0" t="r" /&gt; </a:t>
-            </a:r>
-            <a:r>
-              <a:rPr lang="en-US" dirty="0">
-                <a:highlight>
-                  <a:srgbClr val="FFFF00"/>
-                </a:highlight>
-              </a:rPr>
-              <a:t>&lt;-  garçon </a:t>
-            </a:r>
-            <a:r>
-              <a:rPr lang="en-US" dirty="0" err="1">
-                <a:highlight>
-                  <a:srgbClr val="FFFF00"/>
-                </a:highlight>
-              </a:rPr>
-              <a:t>WfiGloss</a:t>
-            </a:r>
-            <a:r>
-              <a:rPr lang="en-US" dirty="0">
-                <a:highlight>
-                  <a:srgbClr val="FFFF00"/>
-                </a:highlight>
-              </a:rPr>
-              <a:t> </a:t>
-            </a:r>
-            <a:r>
-              <a:rPr lang="en-US" dirty="0"/>
-              <a:t>'boy’</a:t>
-            </a:r>
-          </a:p>
-          <a:p>
-            <a:pPr lvl="0"/>
-            <a:r>
-              <a:rPr lang="en-US" dirty="0"/>
-              <a:t>In addition to the </a:t>
-            </a:r>
-            <a:r>
-              <a:rPr lang="en-US" dirty="0" err="1"/>
-              <a:t>WfiAnalysis</a:t>
-            </a:r>
-            <a:r>
-              <a:rPr lang="en-US" dirty="0"/>
-              <a:t> Evaluations referencing the Computer Approves </a:t>
-            </a:r>
-            <a:r>
-              <a:rPr lang="en-US" dirty="0" err="1"/>
-              <a:t>CmAgentEvaluation</a:t>
-            </a:r>
-            <a:r>
-              <a:rPr lang="en-US" dirty="0"/>
-              <a:t>, it now also references the “default user” Approves </a:t>
-            </a:r>
-            <a:r>
-              <a:rPr lang="en-US" dirty="0" err="1"/>
-              <a:t>CmAgentEvaluation</a:t>
-            </a:r>
-            <a:r>
-              <a:rPr lang="en-US" dirty="0"/>
-              <a:t>.</a:t>
-            </a:r>
-            <a:br>
-              <a:rPr lang="en-US" dirty="0"/>
-            </a:br>
-            <a:br>
-              <a:rPr lang="en-US" dirty="0"/>
-            </a:br>
-            <a:r>
-              <a:rPr lang="en-US" dirty="0"/>
-              <a:t>&lt;rt class="</a:t>
-            </a:r>
-            <a:r>
-              <a:rPr lang="en-US" dirty="0" err="1"/>
-              <a:t>WfiAnalysis</a:t>
-            </a:r>
-            <a:r>
-              <a:rPr lang="en-US" dirty="0"/>
-              <a:t>" guid="be5aec0f-ff8d-4718-a97d-018a1fcd23d6" </a:t>
-            </a:r>
-            <a:r>
-              <a:rPr lang="en-US" dirty="0" err="1"/>
-              <a:t>ownerguid</a:t>
-            </a:r>
-            <a:r>
-              <a:rPr lang="en-US" dirty="0"/>
-              <a:t>="40b5890e-abc9-4741-9ef7-8dea5fb88c37"&gt;</a:t>
-            </a:r>
-            <a:br>
-              <a:rPr lang="en-US" dirty="0"/>
-            </a:br>
-            <a:r>
-              <a:rPr lang="en-US" dirty="0"/>
-              <a:t>&lt;Evaluations&gt;</a:t>
-            </a:r>
-            <a:br>
-              <a:rPr lang="en-US" dirty="0"/>
-            </a:br>
-            <a:r>
-              <a:rPr lang="en-US" dirty="0"/>
-              <a:t>&lt;</a:t>
-            </a:r>
-            <a:r>
-              <a:rPr lang="en-US" dirty="0" err="1"/>
-              <a:t>objsur</a:t>
-            </a:r>
-            <a:r>
-              <a:rPr lang="en-US" dirty="0"/>
-              <a:t> guid="41581e3a-7ed3-41ac-94c7-6e91dbcc108b" t="r" /&gt;  &lt;-  Computer approves</a:t>
-            </a:r>
-            <a:br>
-              <a:rPr lang="en-US" dirty="0"/>
-            </a:br>
-            <a:r>
-              <a:rPr lang="en-US" dirty="0"/>
-              <a:t>&lt;</a:t>
-            </a:r>
-            <a:r>
-              <a:rPr lang="en-US" dirty="0" err="1"/>
-              <a:t>objsur</a:t>
-            </a:r>
-            <a:r>
-              <a:rPr lang="en-US" dirty="0"/>
-              <a:t> guid="8caa11bb-cac4-4836-a081-1666245106b9" t="r" /&gt;  </a:t>
-            </a:r>
-            <a:r>
-              <a:rPr lang="en-US" dirty="0">
-                <a:highlight>
-                  <a:srgbClr val="FFFF00"/>
-                </a:highlight>
-              </a:rPr>
-              <a:t>&lt;-  Default user approves</a:t>
-            </a:r>
-            <a:br>
-              <a:rPr lang="en-US" dirty="0"/>
-            </a:br>
-            <a:r>
-              <a:rPr lang="en-US" dirty="0"/>
-              <a:t>&lt;/Evaluations&gt;</a:t>
-            </a:r>
-            <a:br>
-              <a:rPr lang="en-US" dirty="0"/>
-            </a:br>
-            <a:br>
-              <a:rPr lang="en-US" dirty="0"/>
-            </a:br>
-            <a:br>
-              <a:rPr lang="en-US" dirty="0"/>
-            </a:br>
-            <a:br>
-              <a:rPr lang="en-US" dirty="0"/>
-            </a:br>
-            <a:endParaRPr lang="en-US" dirty="0"/>
+              <a:t>If the user clicks the green Approve button in ‘garçon’ in the word focus box, the Analyze tab shows (left)</a:t>
+            </a:r>
+          </a:p>
+          <a:p>
+            <a:r>
+              <a:rPr lang="en-US" dirty="0"/>
+              <a:t>and the Word Analyses tool shows (right)</a:t>
+            </a:r>
           </a:p>
           <a:p>
             <a:pPr lvl="1"/>
@@ -7143,16 +6859,14 @@
       </p:sp>
       <p:pic>
         <p:nvPicPr>
-          <p:cNvPr id="2" name="Picture 1">
-            <a:extLst>
-              <a:ext uri="{FF2B5EF4-FFF2-40B4-BE49-F238E27FC236}">
-                <a16:creationId xmlns:a16="http://schemas.microsoft.com/office/drawing/2014/main" id="{979D970B-7C41-4BCF-AE86-480A500D5C63}"/>
-              </a:ext>
-            </a:extLst>
-          </p:cNvPr>
-          <p:cNvPicPr>
-            <a:picLocks noChangeAspect="1"/>
-          </p:cNvPicPr>
+          <p:cNvPr id="6" name="Picture 5">
+            <a:extLst>
+              <a:ext uri="{FF2B5EF4-FFF2-40B4-BE49-F238E27FC236}">
+                <a16:creationId xmlns:a16="http://schemas.microsoft.com/office/drawing/2014/main" id="{2157E336-C648-4BB2-AF9B-069C276F69F6}"/>
+              </a:ext>
+            </a:extLst>
+          </p:cNvPr>
+          <p:cNvPicPr/>
           <p:nvPr/>
         </p:nvPicPr>
         <p:blipFill>
@@ -7163,8 +6877,36 @@
         </p:blipFill>
         <p:spPr>
           <a:xfrm>
-            <a:off x="6456297" y="5211445"/>
-            <a:ext cx="4080405" cy="1523629"/>
+            <a:off x="838200" y="2766643"/>
+            <a:ext cx="3192558" cy="2353997"/>
+          </a:xfrm>
+          <a:prstGeom prst="rect">
+            <a:avLst/>
+          </a:prstGeom>
+        </p:spPr>
+      </p:pic>
+      <p:pic>
+        <p:nvPicPr>
+          <p:cNvPr id="7" name="Picture 6">
+            <a:extLst>
+              <a:ext uri="{FF2B5EF4-FFF2-40B4-BE49-F238E27FC236}">
+                <a16:creationId xmlns:a16="http://schemas.microsoft.com/office/drawing/2014/main" id="{9429ECA2-2DBF-4F4F-842F-C83547C37BB7}"/>
+              </a:ext>
+            </a:extLst>
+          </p:cNvPr>
+          <p:cNvPicPr/>
+          <p:nvPr/>
+        </p:nvPicPr>
+        <p:blipFill>
+          <a:blip r:embed="rId3"/>
+          <a:stretch>
+            <a:fillRect/>
+          </a:stretch>
+        </p:blipFill>
+        <p:spPr>
+          <a:xfrm>
+            <a:off x="4819432" y="2616101"/>
+            <a:ext cx="6497412" cy="3067247"/>
           </a:xfrm>
           <a:prstGeom prst="rect">
             <a:avLst/>
@@ -7174,7 +6916,7 @@
     </p:spTree>
     <p:extLst>
       <p:ext uri="{BB962C8B-B14F-4D97-AF65-F5344CB8AC3E}">
-        <p14:creationId xmlns:p14="http://schemas.microsoft.com/office/powerpoint/2010/main" val="3459147174"/>
+        <p14:creationId xmlns:p14="http://schemas.microsoft.com/office/powerpoint/2010/main" val="3790949010"/>
       </p:ext>
     </p:extLst>
   </p:cSld>
@@ -7229,7 +6971,7 @@
           <a:p>
             <a:r>
               <a:rPr lang="en-US" dirty="0"/>
-              <a:t>Interlinear: Summary</a:t>
+              <a:t>Interlinear: Approving analyses</a:t>
             </a:r>
           </a:p>
         </p:txBody>
@@ -7252,144 +6994,327 @@
         </p:nvSpPr>
         <p:spPr>
           <a:xfrm>
-            <a:off x="838200" y="939800"/>
-            <a:ext cx="10515600" cy="5681133"/>
+            <a:off x="486508" y="951132"/>
+            <a:ext cx="10867292" cy="5681133"/>
           </a:xfrm>
         </p:spPr>
         <p:txBody>
           <a:bodyPr>
-            <a:normAutofit/>
+            <a:normAutofit fontScale="70000" lnSpcReduction="20000"/>
           </a:bodyPr>
           <a:lstStyle/>
           <a:p>
             <a:r>
               <a:rPr lang="en-US" dirty="0"/>
-              <a:t>In summary, the Analyses property of Segment can reference 4 types of objects.</a:t>
-            </a:r>
+              <a:t>Two changes occurred in the FLEx data.</a:t>
+            </a:r>
+          </a:p>
+          <a:p>
+            <a:pPr lvl="0"/>
+            <a:r>
+              <a:rPr lang="en-US" dirty="0"/>
+              <a:t>In the Segment Analyses list of references for wordforms, the second one that used to reference the ‘garçon’ </a:t>
+            </a:r>
+            <a:r>
+              <a:rPr lang="en-US" dirty="0" err="1"/>
+              <a:t>WfiWordform</a:t>
+            </a:r>
+            <a:r>
+              <a:rPr lang="en-US" dirty="0"/>
+              <a:t> now references the ‘boy’ </a:t>
+            </a:r>
+            <a:r>
+              <a:rPr lang="en-US" dirty="0" err="1"/>
+              <a:t>WfiGloss</a:t>
+            </a:r>
+            <a:r>
+              <a:rPr lang="en-US" dirty="0"/>
+              <a:t> object owned in the </a:t>
+            </a:r>
+            <a:r>
+              <a:rPr lang="en-US" dirty="0" err="1"/>
+              <a:t>WfiAnalysis</a:t>
+            </a:r>
+            <a:r>
+              <a:rPr lang="en-US" dirty="0"/>
+              <a:t> owned by the ‘garçon’ </a:t>
+            </a:r>
+            <a:r>
+              <a:rPr lang="en-US" dirty="0" err="1"/>
+              <a:t>WfiWordform</a:t>
+            </a:r>
+            <a:r>
+              <a:rPr lang="en-US" dirty="0"/>
+              <a:t>.</a:t>
+            </a:r>
+            <a:br>
+              <a:rPr lang="en-US" dirty="0"/>
+            </a:br>
+            <a:br>
+              <a:rPr lang="en-US" dirty="0"/>
+            </a:br>
+            <a:r>
+              <a:rPr lang="en-US" dirty="0"/>
+              <a:t>&lt;rt class="Segment" guid="78220579-5e21-47df-82b1-1fd72a02748d" </a:t>
+            </a:r>
+            <a:r>
+              <a:rPr lang="en-US" dirty="0" err="1"/>
+              <a:t>ownerguid</a:t>
+            </a:r>
+            <a:r>
+              <a:rPr lang="en-US" dirty="0"/>
+              <a:t>="a51ed87e-d6fe-44d6-a317-1b726d218fe3"&gt;</a:t>
+            </a:r>
+            <a:br>
+              <a:rPr lang="en-US" dirty="0"/>
+            </a:br>
+            <a:r>
+              <a:rPr lang="en-US" dirty="0"/>
+              <a:t>&lt;Analyses&gt;</a:t>
+            </a:r>
+            <a:br>
+              <a:rPr lang="en-US" dirty="0"/>
+            </a:br>
+            <a:r>
+              <a:rPr lang="en-US" dirty="0"/>
+              <a:t>&lt;</a:t>
+            </a:r>
+            <a:r>
+              <a:rPr lang="en-US" dirty="0" err="1"/>
+              <a:t>objsur</a:t>
+            </a:r>
+            <a:r>
+              <a:rPr lang="en-US" dirty="0"/>
+              <a:t> guid="b0460a42-7e19-460e-9ec8-4779c4a5f3ff" t="r" /&gt;   Le</a:t>
+            </a:r>
+            <a:br>
+              <a:rPr lang="en-US" dirty="0"/>
+            </a:br>
+            <a:r>
+              <a:rPr lang="en-US" dirty="0"/>
+              <a:t>&lt;</a:t>
+            </a:r>
+            <a:r>
+              <a:rPr lang="en-US" dirty="0" err="1"/>
+              <a:t>objsur</a:t>
+            </a:r>
+            <a:r>
+              <a:rPr lang="en-US" dirty="0"/>
+              <a:t> guid="7dec7244-62f4-441f-bfc9-c9564093c2f0" t="r" /&gt; </a:t>
+            </a:r>
+            <a:r>
+              <a:rPr lang="en-US" dirty="0">
+                <a:highlight>
+                  <a:srgbClr val="FFFF00"/>
+                </a:highlight>
+              </a:rPr>
+              <a:t>&lt;-  garçon </a:t>
+            </a:r>
+            <a:r>
+              <a:rPr lang="en-US" dirty="0" err="1">
+                <a:highlight>
+                  <a:srgbClr val="FFFF00"/>
+                </a:highlight>
+              </a:rPr>
+              <a:t>WfiGloss</a:t>
+            </a:r>
+            <a:r>
+              <a:rPr lang="en-US" dirty="0">
+                <a:highlight>
+                  <a:srgbClr val="FFFF00"/>
+                </a:highlight>
+              </a:rPr>
+              <a:t> </a:t>
+            </a:r>
+            <a:r>
+              <a:rPr lang="en-US" dirty="0"/>
+              <a:t>'boy’</a:t>
+            </a:r>
+          </a:p>
+          <a:p>
+            <a:pPr lvl="0"/>
+            <a:r>
+              <a:rPr lang="en-US" dirty="0"/>
+              <a:t>In addition to the </a:t>
+            </a:r>
+            <a:r>
+              <a:rPr lang="en-US" dirty="0" err="1"/>
+              <a:t>WfiAnalysis</a:t>
+            </a:r>
+            <a:r>
+              <a:rPr lang="en-US" dirty="0"/>
+              <a:t> Evaluations referencing the Computer Approves </a:t>
+            </a:r>
+            <a:r>
+              <a:rPr lang="en-US" dirty="0" err="1"/>
+              <a:t>CmAgentEvaluation</a:t>
+            </a:r>
+            <a:r>
+              <a:rPr lang="en-US" dirty="0"/>
+              <a:t>, it now also references the “default user” Approves </a:t>
+            </a:r>
+            <a:r>
+              <a:rPr lang="en-US" dirty="0" err="1"/>
+              <a:t>CmAgentEvaluation</a:t>
+            </a:r>
+            <a:r>
+              <a:rPr lang="en-US" dirty="0"/>
+              <a:t>.</a:t>
+            </a:r>
+            <a:br>
+              <a:rPr lang="en-US" dirty="0"/>
+            </a:br>
+            <a:br>
+              <a:rPr lang="en-US" dirty="0"/>
+            </a:br>
+            <a:r>
+              <a:rPr lang="en-US" dirty="0"/>
+              <a:t>&lt;rt class="</a:t>
+            </a:r>
+            <a:r>
+              <a:rPr lang="en-US" dirty="0" err="1"/>
+              <a:t>WfiAnalysis</a:t>
+            </a:r>
+            <a:r>
+              <a:rPr lang="en-US" dirty="0"/>
+              <a:t>" guid="be5aec0f-ff8d-4718-a97d-018a1fcd23d6" </a:t>
+            </a:r>
+            <a:r>
+              <a:rPr lang="en-US" dirty="0" err="1"/>
+              <a:t>ownerguid</a:t>
+            </a:r>
+            <a:r>
+              <a:rPr lang="en-US" dirty="0"/>
+              <a:t>="40b5890e-abc9-4741-9ef7-8dea5fb88c37"&gt;</a:t>
+            </a:r>
+            <a:br>
+              <a:rPr lang="en-US" dirty="0"/>
+            </a:br>
+            <a:r>
+              <a:rPr lang="en-US" dirty="0"/>
+              <a:t>&lt;Evaluations&gt;</a:t>
+            </a:r>
+            <a:br>
+              <a:rPr lang="en-US" dirty="0"/>
+            </a:br>
+            <a:r>
+              <a:rPr lang="en-US" dirty="0"/>
+              <a:t>&lt;</a:t>
+            </a:r>
+            <a:r>
+              <a:rPr lang="en-US" dirty="0" err="1"/>
+              <a:t>objsur</a:t>
+            </a:r>
+            <a:r>
+              <a:rPr lang="en-US" dirty="0"/>
+              <a:t> guid="41581e3a-7ed3-41ac-94c7-6e91dbcc108b" t="r" /&gt;  &lt;-  Computer approves</a:t>
+            </a:r>
+            <a:br>
+              <a:rPr lang="en-US" dirty="0"/>
+            </a:br>
+            <a:r>
+              <a:rPr lang="en-US" dirty="0"/>
+              <a:t>&lt;</a:t>
+            </a:r>
+            <a:r>
+              <a:rPr lang="en-US" dirty="0" err="1"/>
+              <a:t>objsur</a:t>
+            </a:r>
+            <a:r>
+              <a:rPr lang="en-US" dirty="0"/>
+              <a:t> guid="8caa11bb-cac4-4836-a081-1666245106b9" t="r" /&gt;  </a:t>
+            </a:r>
+            <a:r>
+              <a:rPr lang="en-US" dirty="0">
+                <a:highlight>
+                  <a:srgbClr val="FFFF00"/>
+                </a:highlight>
+              </a:rPr>
+              <a:t>&lt;-  Default user approves</a:t>
+            </a:r>
+            <a:br>
+              <a:rPr lang="en-US" dirty="0"/>
+            </a:br>
+            <a:r>
+              <a:rPr lang="en-US" dirty="0"/>
+              <a:t>&lt;/Evaluations&gt;</a:t>
+            </a:r>
+            <a:br>
+              <a:rPr lang="en-US" dirty="0"/>
+            </a:br>
+            <a:br>
+              <a:rPr lang="en-US" dirty="0"/>
+            </a:br>
+            <a:br>
+              <a:rPr lang="en-US" dirty="0"/>
+            </a:br>
+            <a:br>
+              <a:rPr lang="en-US" dirty="0"/>
+            </a:br>
+            <a:endParaRPr lang="en-US" dirty="0"/>
           </a:p>
           <a:p>
             <a:pPr lvl="1"/>
-            <a:r>
-              <a:rPr lang="en-US" dirty="0"/>
-              <a:t>A </a:t>
-            </a:r>
-            <a:r>
-              <a:rPr lang="en-US" dirty="0" err="1"/>
-              <a:t>WfiWordform</a:t>
-            </a:r>
-            <a:r>
-              <a:rPr lang="en-US" dirty="0"/>
-              <a:t> with a Form that matches the wordform in the baseline. This indicates the wordform is unanalyzed.</a:t>
-            </a:r>
+            <a:endParaRPr lang="en-US" dirty="0"/>
           </a:p>
           <a:p>
             <a:pPr lvl="1"/>
-            <a:r>
-              <a:rPr lang="en-US" dirty="0"/>
-              <a:t>A </a:t>
-            </a:r>
-            <a:r>
-              <a:rPr lang="en-US" dirty="0" err="1"/>
-              <a:t>WfiAnalysis</a:t>
-            </a:r>
-            <a:r>
-              <a:rPr lang="en-US" dirty="0"/>
-              <a:t> owned by a </a:t>
-            </a:r>
-            <a:r>
-              <a:rPr lang="en-US" dirty="0" err="1"/>
-              <a:t>WfiWordform</a:t>
-            </a:r>
-            <a:r>
-              <a:rPr lang="en-US" dirty="0"/>
-              <a:t> with a Form that matches the wordform in the baseline. This indicates the wordform is partially analyzed. The analysis is known, but the word gloss has not been chosen.</a:t>
-            </a:r>
-          </a:p>
-          <a:p>
-            <a:pPr lvl="1"/>
-            <a:r>
-              <a:rPr lang="en-US" dirty="0"/>
-              <a:t>A </a:t>
-            </a:r>
-            <a:r>
-              <a:rPr lang="en-US" dirty="0" err="1"/>
-              <a:t>WfiGloss</a:t>
-            </a:r>
-            <a:r>
-              <a:rPr lang="en-US" dirty="0"/>
-              <a:t> owned in a </a:t>
-            </a:r>
-            <a:r>
-              <a:rPr lang="en-US" dirty="0" err="1"/>
-              <a:t>WfiAnalysis</a:t>
-            </a:r>
-            <a:r>
-              <a:rPr lang="en-US" dirty="0"/>
-              <a:t> owned by a </a:t>
-            </a:r>
-            <a:r>
-              <a:rPr lang="en-US" dirty="0" err="1"/>
-              <a:t>WfiWordform</a:t>
-            </a:r>
-            <a:r>
-              <a:rPr lang="en-US" dirty="0"/>
-              <a:t> with a Form that matches the wordform in the baseline. This indicates the wordform is fully analyzed to an exact </a:t>
-            </a:r>
-            <a:r>
-              <a:rPr lang="en-US" dirty="0" err="1"/>
-              <a:t>WfiGloss</a:t>
-            </a:r>
-            <a:r>
-              <a:rPr lang="en-US" dirty="0"/>
-              <a:t>.</a:t>
-            </a:r>
-          </a:p>
-          <a:p>
-            <a:pPr lvl="1"/>
-            <a:r>
-              <a:rPr lang="en-US" dirty="0"/>
-              <a:t>A </a:t>
-            </a:r>
-            <a:r>
-              <a:rPr lang="en-US" dirty="0" err="1"/>
-              <a:t>PunctuationForm</a:t>
-            </a:r>
-            <a:r>
-              <a:rPr lang="en-US" dirty="0"/>
-              <a:t> contains punctuation in the baseline and any strings that are not in the vernacular writing system of the text.</a:t>
-            </a:r>
-          </a:p>
-          <a:p>
-            <a:endParaRPr lang="en-US" dirty="0"/>
-          </a:p>
-          <a:p>
-            <a:pPr lvl="1"/>
-            <a:endParaRPr lang="en-US" dirty="0"/>
-          </a:p>
-          <a:p>
-            <a:endParaRPr lang="en-US" dirty="0"/>
-          </a:p>
-          <a:p>
-            <a:endParaRPr lang="en-US" dirty="0"/>
-          </a:p>
-          <a:p>
-            <a:endParaRPr lang="en-US" dirty="0"/>
-          </a:p>
-          <a:p>
-            <a:endParaRPr lang="en-US" dirty="0"/>
-          </a:p>
-          <a:p>
-            <a:endParaRPr lang="en-US" dirty="0"/>
-          </a:p>
-          <a:p>
-            <a:endParaRPr lang="en-US" dirty="0"/>
-          </a:p>
-        </p:txBody>
-      </p:sp>
+            <a:endParaRPr lang="en-US" dirty="0"/>
+          </a:p>
+          <a:p>
+            <a:endParaRPr lang="en-US" dirty="0"/>
+          </a:p>
+          <a:p>
+            <a:endParaRPr lang="en-US" dirty="0"/>
+          </a:p>
+          <a:p>
+            <a:endParaRPr lang="en-US" dirty="0"/>
+          </a:p>
+          <a:p>
+            <a:endParaRPr lang="en-US" dirty="0"/>
+          </a:p>
+          <a:p>
+            <a:endParaRPr lang="en-US" dirty="0"/>
+          </a:p>
+          <a:p>
+            <a:endParaRPr lang="en-US" dirty="0"/>
+          </a:p>
+        </p:txBody>
+      </p:sp>
+      <p:pic>
+        <p:nvPicPr>
+          <p:cNvPr id="2" name="Picture 1">
+            <a:extLst>
+              <a:ext uri="{FF2B5EF4-FFF2-40B4-BE49-F238E27FC236}">
+                <a16:creationId xmlns:a16="http://schemas.microsoft.com/office/drawing/2014/main" id="{979D970B-7C41-4BCF-AE86-480A500D5C63}"/>
+              </a:ext>
+            </a:extLst>
+          </p:cNvPr>
+          <p:cNvPicPr>
+            <a:picLocks noChangeAspect="1"/>
+          </p:cNvPicPr>
+          <p:nvPr/>
+        </p:nvPicPr>
+        <p:blipFill>
+          <a:blip r:embed="rId2"/>
+          <a:stretch>
+            <a:fillRect/>
+          </a:stretch>
+        </p:blipFill>
+        <p:spPr>
+          <a:xfrm>
+            <a:off x="6456297" y="5211445"/>
+            <a:ext cx="4080405" cy="1523629"/>
+          </a:xfrm>
+          <a:prstGeom prst="rect">
+            <a:avLst/>
+          </a:prstGeom>
+        </p:spPr>
+      </p:pic>
     </p:spTree>
     <p:extLst>
       <p:ext uri="{BB962C8B-B14F-4D97-AF65-F5344CB8AC3E}">
-        <p14:creationId xmlns:p14="http://schemas.microsoft.com/office/powerpoint/2010/main" val="2245971007"/>
+        <p14:creationId xmlns:p14="http://schemas.microsoft.com/office/powerpoint/2010/main" val="3459147174"/>
       </p:ext>
     </p:extLst>
   </p:cSld>
@@ -7444,7 +7369,7 @@
           <a:p>
             <a:r>
               <a:rPr lang="en-US" dirty="0"/>
-              <a:t>Interlinear: Summary continued</a:t>
+              <a:t>Interlinear: Summary</a:t>
             </a:r>
           </a:p>
         </p:txBody>
@@ -7479,28 +7404,29 @@
           <a:p>
             <a:r>
               <a:rPr lang="en-US" dirty="0"/>
-              <a:t>Here’s an example of a word with two morphemes:</a:t>
-            </a:r>
-          </a:p>
-          <a:p>
-            <a:endParaRPr lang="en-US" dirty="0"/>
-          </a:p>
-          <a:p>
-            <a:endParaRPr lang="en-US" dirty="0"/>
-          </a:p>
-          <a:p>
-            <a:endParaRPr lang="en-US" dirty="0"/>
-          </a:p>
-          <a:p>
-            <a:endParaRPr lang="en-US" dirty="0"/>
-          </a:p>
-          <a:p>
-            <a:endParaRPr lang="en-US" dirty="0"/>
-          </a:p>
-          <a:p>
-            <a:r>
-              <a:rPr lang="en-US" dirty="0"/>
-              <a:t>The FLEx diagram would be very similar to the previous diagram for ‘garçon’, but the </a:t>
+              <a:t>In summary, the Analyses property of Segment can reference 4 types of objects.</a:t>
+            </a:r>
+          </a:p>
+          <a:p>
+            <a:pPr lvl="1"/>
+            <a:r>
+              <a:rPr lang="en-US" dirty="0"/>
+              <a:t>A </a:t>
+            </a:r>
+            <a:r>
+              <a:rPr lang="en-US" dirty="0" err="1"/>
+              <a:t>WfiWordform</a:t>
+            </a:r>
+            <a:r>
+              <a:rPr lang="en-US" dirty="0"/>
+              <a:t> with a Form that matches the wordform in the baseline. This indicates the wordform is unanalyzed.</a:t>
+            </a:r>
+          </a:p>
+          <a:p>
+            <a:pPr lvl="1"/>
+            <a:r>
+              <a:rPr lang="en-US" dirty="0"/>
+              <a:t>A </a:t>
             </a:r>
             <a:r>
               <a:rPr lang="en-US" dirty="0" err="1"/>
@@ -7508,100 +7434,102 @@
             </a:r>
             <a:r>
               <a:rPr lang="en-US" dirty="0"/>
-              <a:t> </a:t>
-            </a:r>
-            <a:r>
-              <a:rPr lang="en-US" dirty="0" err="1"/>
-              <a:t>MorphBundles</a:t>
-            </a:r>
-            <a:r>
-              <a:rPr lang="en-US" dirty="0"/>
-              <a:t> property now has two </a:t>
-            </a:r>
-            <a:r>
-              <a:rPr lang="en-US" dirty="0" err="1"/>
-              <a:t>WfiMorphBundle</a:t>
-            </a:r>
-            <a:r>
-              <a:rPr lang="en-US" dirty="0"/>
-              <a:t> objects; one for ‘lion’ and one for ‘-s’. The first </a:t>
-            </a:r>
-            <a:r>
-              <a:rPr lang="en-US" dirty="0" err="1"/>
-              <a:t>MorphBundle</a:t>
-            </a:r>
-            <a:r>
-              <a:rPr lang="en-US" dirty="0"/>
-              <a:t> would reference the 3 parts of the ‘lion’ entry, and the second </a:t>
-            </a:r>
-            <a:r>
-              <a:rPr lang="en-US" dirty="0" err="1"/>
-              <a:t>MorphBundle</a:t>
-            </a:r>
-            <a:r>
-              <a:rPr lang="en-US" dirty="0"/>
-              <a:t> would reference the 3 parts of the ‘-s’ entry.</a:t>
-            </a:r>
-          </a:p>
-          <a:p>
-            <a:endParaRPr lang="en-US" dirty="0"/>
+              <a:t> owned by a </a:t>
+            </a:r>
+            <a:r>
+              <a:rPr lang="en-US" dirty="0" err="1"/>
+              <a:t>WfiWordform</a:t>
+            </a:r>
+            <a:r>
+              <a:rPr lang="en-US" dirty="0"/>
+              <a:t> with a Form that matches the wordform in the baseline. This indicates the wordform is partially analyzed. The analysis is known, but the word gloss has not been chosen.</a:t>
+            </a:r>
           </a:p>
           <a:p>
             <a:pPr lvl="1"/>
-            <a:endParaRPr lang="en-US" dirty="0"/>
-          </a:p>
-          <a:p>
-            <a:endParaRPr lang="en-US" dirty="0"/>
-          </a:p>
-          <a:p>
-            <a:endParaRPr lang="en-US" dirty="0"/>
-          </a:p>
-          <a:p>
-            <a:endParaRPr lang="en-US" dirty="0"/>
-          </a:p>
-          <a:p>
-            <a:endParaRPr lang="en-US" dirty="0"/>
-          </a:p>
-          <a:p>
-            <a:endParaRPr lang="en-US" dirty="0"/>
-          </a:p>
-          <a:p>
-            <a:endParaRPr lang="en-US" dirty="0"/>
-          </a:p>
-        </p:txBody>
-      </p:sp>
-      <p:pic>
-        <p:nvPicPr>
-          <p:cNvPr id="6" name="Picture 5">
-            <a:extLst>
-              <a:ext uri="{FF2B5EF4-FFF2-40B4-BE49-F238E27FC236}">
-                <a16:creationId xmlns:a16="http://schemas.microsoft.com/office/drawing/2014/main" id="{162360EA-5D6E-4B75-B535-E5467505FB02}"/>
-              </a:ext>
-            </a:extLst>
-          </p:cNvPr>
-          <p:cNvPicPr/>
-          <p:nvPr/>
-        </p:nvPicPr>
-        <p:blipFill>
-          <a:blip r:embed="rId2"/>
-          <a:stretch>
-            <a:fillRect/>
-          </a:stretch>
-        </p:blipFill>
-        <p:spPr>
-          <a:xfrm>
-            <a:off x="1551695" y="1443989"/>
-            <a:ext cx="3540809" cy="2646665"/>
-          </a:xfrm>
-          <a:prstGeom prst="rect">
-            <a:avLst/>
-          </a:prstGeom>
-        </p:spPr>
-      </p:pic>
+            <a:r>
+              <a:rPr lang="en-US" dirty="0"/>
+              <a:t>A </a:t>
+            </a:r>
+            <a:r>
+              <a:rPr lang="en-US" dirty="0" err="1"/>
+              <a:t>WfiGloss</a:t>
+            </a:r>
+            <a:r>
+              <a:rPr lang="en-US" dirty="0"/>
+              <a:t> owned in a </a:t>
+            </a:r>
+            <a:r>
+              <a:rPr lang="en-US" dirty="0" err="1"/>
+              <a:t>WfiAnalysis</a:t>
+            </a:r>
+            <a:r>
+              <a:rPr lang="en-US" dirty="0"/>
+              <a:t> owned by a </a:t>
+            </a:r>
+            <a:r>
+              <a:rPr lang="en-US" dirty="0" err="1"/>
+              <a:t>WfiWordform</a:t>
+            </a:r>
+            <a:r>
+              <a:rPr lang="en-US" dirty="0"/>
+              <a:t> with a Form that matches the wordform in the baseline. This indicates the wordform is fully analyzed to an exact </a:t>
+            </a:r>
+            <a:r>
+              <a:rPr lang="en-US" dirty="0" err="1"/>
+              <a:t>WfiGloss</a:t>
+            </a:r>
+            <a:r>
+              <a:rPr lang="en-US" dirty="0"/>
+              <a:t>.</a:t>
+            </a:r>
+          </a:p>
+          <a:p>
+            <a:pPr lvl="1"/>
+            <a:r>
+              <a:rPr lang="en-US" dirty="0"/>
+              <a:t>A </a:t>
+            </a:r>
+            <a:r>
+              <a:rPr lang="en-US" dirty="0" err="1"/>
+              <a:t>PunctuationForm</a:t>
+            </a:r>
+            <a:r>
+              <a:rPr lang="en-US" dirty="0"/>
+              <a:t> contains punctuation in the baseline and any strings that are not in the vernacular writing system of the text. They cannot be analyzed.</a:t>
+            </a:r>
+          </a:p>
+          <a:p>
+            <a:endParaRPr lang="en-US" dirty="0"/>
+          </a:p>
+          <a:p>
+            <a:pPr lvl="1"/>
+            <a:endParaRPr lang="en-US" dirty="0"/>
+          </a:p>
+          <a:p>
+            <a:endParaRPr lang="en-US" dirty="0"/>
+          </a:p>
+          <a:p>
+            <a:endParaRPr lang="en-US" dirty="0"/>
+          </a:p>
+          <a:p>
+            <a:endParaRPr lang="en-US" dirty="0"/>
+          </a:p>
+          <a:p>
+            <a:endParaRPr lang="en-US" dirty="0"/>
+          </a:p>
+          <a:p>
+            <a:endParaRPr lang="en-US" dirty="0"/>
+          </a:p>
+          <a:p>
+            <a:endParaRPr lang="en-US" dirty="0"/>
+          </a:p>
+        </p:txBody>
+      </p:sp>
     </p:spTree>
     <p:extLst>
       <p:ext uri="{BB962C8B-B14F-4D97-AF65-F5344CB8AC3E}">
-        <p14:creationId xmlns:p14="http://schemas.microsoft.com/office/powerpoint/2010/main" val="815965422"/>
+        <p14:creationId xmlns:p14="http://schemas.microsoft.com/office/powerpoint/2010/main" val="2245971007"/>
       </p:ext>
     </p:extLst>
   </p:cSld>
@@ -7656,7 +7584,7 @@
           <a:p>
             <a:r>
               <a:rPr lang="en-US" dirty="0"/>
-              <a:t>Interlinear: Text Tagging</a:t>
+              <a:t>Interlinear: Summary continued</a:t>
             </a:r>
           </a:p>
         </p:txBody>
@@ -7685,41 +7613,96 @@
         </p:spPr>
         <p:txBody>
           <a:bodyPr>
-            <a:normAutofit fontScale="92500" lnSpcReduction="10000"/>
+            <a:normAutofit/>
           </a:bodyPr>
           <a:lstStyle/>
           <a:p>
             <a:r>
               <a:rPr lang="en-US" dirty="0"/>
-              <a:t>Interlinear text offers a Tagging tab that allows a user to tag sections of the baseline for Grammatical Relations – Functional, Semantics – RRG, Syntax – Descriptive, or Syntax – RRG. You can also create your own tagging structure. The tags are defined in the Text Markup Tags list in the Lists area. The top-level tags define rows in the tagging system, and subitems provide the tag markings within that line.</a:t>
-            </a:r>
-          </a:p>
-          <a:p>
-            <a:r>
-              <a:rPr lang="en-US" dirty="0"/>
-              <a:t>In the Interlinear Text Tagging tab you can highlight a string of wordforms and right-click to choose a tag to assign to these wordforms. You can choose from more than one level. The result might look like this</a:t>
-            </a:r>
-            <a:br>
-              <a:rPr lang="en-US" dirty="0"/>
-            </a:br>
-            <a:br>
-              <a:rPr lang="en-US" dirty="0"/>
-            </a:br>
-            <a:br>
-              <a:rPr lang="en-US" dirty="0"/>
-            </a:br>
-            <a:br>
-              <a:rPr lang="en-US" dirty="0"/>
-            </a:br>
-            <a:br>
-              <a:rPr lang="en-US" dirty="0"/>
-            </a:br>
-            <a:br>
-              <a:rPr lang="en-US" dirty="0"/>
-            </a:br>
-            <a:br>
-              <a:rPr lang="en-US" dirty="0"/>
-            </a:br>
+              <a:t>Here’s an example of a word with two morphemes:</a:t>
+            </a:r>
+          </a:p>
+          <a:p>
+            <a:endParaRPr lang="en-US" dirty="0"/>
+          </a:p>
+          <a:p>
+            <a:endParaRPr lang="en-US" dirty="0"/>
+          </a:p>
+          <a:p>
+            <a:endParaRPr lang="en-US" dirty="0"/>
+          </a:p>
+          <a:p>
+            <a:endParaRPr lang="en-US" dirty="0"/>
+          </a:p>
+          <a:p>
+            <a:endParaRPr lang="en-US" dirty="0"/>
+          </a:p>
+          <a:p>
+            <a:r>
+              <a:rPr lang="en-US" dirty="0"/>
+              <a:t>The FLEx diagram would be very similar to the previous diagram for ‘garçon’, but the </a:t>
+            </a:r>
+            <a:r>
+              <a:rPr lang="en-US" dirty="0" err="1"/>
+              <a:t>WfiAnalysis</a:t>
+            </a:r>
+            <a:r>
+              <a:rPr lang="en-US" dirty="0"/>
+              <a:t> </a:t>
+            </a:r>
+            <a:r>
+              <a:rPr lang="en-US" dirty="0" err="1"/>
+              <a:t>MorphBundles</a:t>
+            </a:r>
+            <a:r>
+              <a:rPr lang="en-US" dirty="0"/>
+              <a:t> property now has two </a:t>
+            </a:r>
+            <a:r>
+              <a:rPr lang="en-US" dirty="0" err="1"/>
+              <a:t>WfiMorphBundle</a:t>
+            </a:r>
+            <a:r>
+              <a:rPr lang="en-US" dirty="0"/>
+              <a:t> objects; one for ‘lion’ and one for ‘-s’. The first </a:t>
+            </a:r>
+            <a:r>
+              <a:rPr lang="en-US" dirty="0" err="1"/>
+              <a:t>MorphBundle</a:t>
+            </a:r>
+            <a:r>
+              <a:rPr lang="en-US" dirty="0"/>
+              <a:t> would reference the 3 parts of the ‘lion’ entry, and the second </a:t>
+            </a:r>
+            <a:r>
+              <a:rPr lang="en-US" dirty="0" err="1"/>
+              <a:t>MorphBundle</a:t>
+            </a:r>
+            <a:r>
+              <a:rPr lang="en-US" dirty="0"/>
+              <a:t> would reference the 3 parts of the ‘-s’ entry.</a:t>
+            </a:r>
+          </a:p>
+          <a:p>
+            <a:endParaRPr lang="en-US" dirty="0"/>
+          </a:p>
+          <a:p>
+            <a:pPr lvl="1"/>
+            <a:endParaRPr lang="en-US" dirty="0"/>
+          </a:p>
+          <a:p>
+            <a:endParaRPr lang="en-US" dirty="0"/>
+          </a:p>
+          <a:p>
+            <a:endParaRPr lang="en-US" dirty="0"/>
+          </a:p>
+          <a:p>
+            <a:endParaRPr lang="en-US" dirty="0"/>
+          </a:p>
+          <a:p>
+            <a:endParaRPr lang="en-US" dirty="0"/>
+          </a:p>
+          <a:p>
             <a:endParaRPr lang="en-US" dirty="0"/>
           </a:p>
           <a:p>
@@ -7732,7 +7715,7 @@
           <p:cNvPr id="6" name="Picture 5">
             <a:extLst>
               <a:ext uri="{FF2B5EF4-FFF2-40B4-BE49-F238E27FC236}">
-                <a16:creationId xmlns:a16="http://schemas.microsoft.com/office/drawing/2014/main" id="{1575F666-1B96-47CC-A732-9DD830F5B725}"/>
+                <a16:creationId xmlns:a16="http://schemas.microsoft.com/office/drawing/2014/main" id="{162360EA-5D6E-4B75-B535-E5467505FB02}"/>
               </a:ext>
             </a:extLst>
           </p:cNvPr>
@@ -7747,8 +7730,8 @@
         </p:blipFill>
         <p:spPr>
           <a:xfrm>
-            <a:off x="2696894" y="3967511"/>
-            <a:ext cx="4686042" cy="2653421"/>
+            <a:off x="1551695" y="1443989"/>
+            <a:ext cx="3540809" cy="2646665"/>
           </a:xfrm>
           <a:prstGeom prst="rect">
             <a:avLst/>
@@ -7758,7 +7741,7 @@
     </p:spTree>
     <p:extLst>
       <p:ext uri="{BB962C8B-B14F-4D97-AF65-F5344CB8AC3E}">
-        <p14:creationId xmlns:p14="http://schemas.microsoft.com/office/powerpoint/2010/main" val="578731281"/>
+        <p14:creationId xmlns:p14="http://schemas.microsoft.com/office/powerpoint/2010/main" val="815965422"/>
       </p:ext>
     </p:extLst>
   </p:cSld>
@@ -7813,7 +7796,7 @@
           <a:p>
             <a:r>
               <a:rPr lang="en-US" dirty="0"/>
-              <a:t>Interlinear: Text Tagging continued</a:t>
+              <a:t>Interlinear: Text Tagging</a:t>
             </a:r>
           </a:p>
         </p:txBody>
@@ -7842,141 +7825,80 @@
         </p:spPr>
         <p:txBody>
           <a:bodyPr>
-            <a:normAutofit/>
+            <a:normAutofit fontScale="92500" lnSpcReduction="10000"/>
           </a:bodyPr>
           <a:lstStyle/>
           <a:p>
             <a:r>
               <a:rPr lang="en-US" dirty="0"/>
-              <a:t>The Text Markup Tags list is owned in the </a:t>
-            </a:r>
-            <a:r>
-              <a:rPr lang="en-US" dirty="0" err="1"/>
-              <a:t>TextMarkupTags</a:t>
-            </a:r>
-            <a:r>
-              <a:rPr lang="en-US" dirty="0"/>
-              <a:t> property of </a:t>
-            </a:r>
-            <a:r>
-              <a:rPr lang="en-US" dirty="0" err="1"/>
-              <a:t>LangProject</a:t>
-            </a:r>
-            <a:r>
-              <a:rPr lang="en-US" dirty="0"/>
-              <a:t>. When you add a tag, FLEx adds a </a:t>
-            </a:r>
-            <a:r>
-              <a:rPr lang="en-US" dirty="0" err="1"/>
-              <a:t>TextTag</a:t>
-            </a:r>
-            <a:r>
-              <a:rPr lang="en-US" dirty="0"/>
-              <a:t> object in the Tags owning collection of </a:t>
-            </a:r>
-            <a:r>
-              <a:rPr lang="en-US" dirty="0" err="1"/>
-              <a:t>StText</a:t>
-            </a:r>
-            <a:r>
-              <a:rPr lang="en-US" dirty="0"/>
-              <a:t>.</a:t>
-            </a:r>
-          </a:p>
-          <a:p>
-            <a:r>
-              <a:rPr lang="en-US" dirty="0" err="1"/>
-              <a:t>TextTag</a:t>
-            </a:r>
-            <a:r>
-              <a:rPr lang="en-US" dirty="0"/>
-              <a:t> has</a:t>
-            </a:r>
-          </a:p>
-          <a:p>
-            <a:pPr lvl="1"/>
-            <a:r>
-              <a:rPr lang="en-US" dirty="0" err="1"/>
-              <a:t>BeginAnalysisIndex</a:t>
-            </a:r>
-            <a:r>
-              <a:rPr lang="en-US" dirty="0"/>
-              <a:t> – Integer indicating the beginning index of </a:t>
-            </a:r>
-            <a:r>
-              <a:rPr lang="en-US" dirty="0" err="1"/>
-              <a:t>IAnalysis</a:t>
-            </a:r>
-            <a:r>
-              <a:rPr lang="en-US" dirty="0"/>
-              <a:t> references in the Segment Analyses property.</a:t>
-            </a:r>
-          </a:p>
-          <a:p>
-            <a:pPr lvl="1"/>
-            <a:r>
-              <a:rPr lang="en-US" dirty="0" err="1"/>
-              <a:t>EndAnalysisIndex</a:t>
-            </a:r>
-            <a:r>
-              <a:rPr lang="en-US" dirty="0"/>
-              <a:t> – Integer indicating the ending index of </a:t>
-            </a:r>
-            <a:r>
-              <a:rPr lang="en-US" dirty="0" err="1"/>
-              <a:t>IAnalysis</a:t>
-            </a:r>
-            <a:r>
-              <a:rPr lang="en-US" dirty="0"/>
-              <a:t> references in the Segment Analyses property</a:t>
-            </a:r>
-          </a:p>
-          <a:p>
-            <a:pPr lvl="1"/>
-            <a:r>
-              <a:rPr lang="en-US" dirty="0" err="1"/>
-              <a:t>BeginSegment</a:t>
-            </a:r>
-            <a:r>
-              <a:rPr lang="en-US" dirty="0"/>
-              <a:t> – atomic reference to the Segment where the tag begins</a:t>
-            </a:r>
-          </a:p>
-          <a:p>
-            <a:pPr lvl="1"/>
-            <a:r>
-              <a:rPr lang="en-US" dirty="0" err="1"/>
-              <a:t>EndSegment</a:t>
-            </a:r>
-            <a:r>
-              <a:rPr lang="en-US" dirty="0"/>
-              <a:t> – atomic reference to the Segment where the tag ends</a:t>
-            </a:r>
-          </a:p>
-          <a:p>
-            <a:pPr lvl="1"/>
-            <a:r>
-              <a:rPr lang="en-US" dirty="0"/>
-              <a:t>Tag – atomic reference to </a:t>
-            </a:r>
-            <a:r>
-              <a:rPr lang="en-US" dirty="0" err="1"/>
-              <a:t>CmPossibility</a:t>
-            </a:r>
-            <a:r>
-              <a:rPr lang="en-US" dirty="0"/>
-              <a:t> in the Text Markup Tags list.</a:t>
-            </a:r>
-          </a:p>
-          <a:p>
-            <a:endParaRPr lang="en-US" dirty="0"/>
-          </a:p>
-        </p:txBody>
-      </p:sp>
+              <a:t>Interlinear text offers a Tagging tab that allows a user to tag sections of the baseline for Grammatical Relations – Functional, Semantics – RRG, Syntax – Descriptive, or Syntax – RRG. You can also create your own tagging structure. The tags are defined in the Text Markup Tags list in the Lists area. The top-level tags define rows in the tagging system, and subitems provide the tag markings within that line.</a:t>
+            </a:r>
+          </a:p>
+          <a:p>
+            <a:r>
+              <a:rPr lang="en-US" dirty="0"/>
+              <a:t>In the Interlinear Text Tagging tab you can highlight a string of wordforms and right-click to choose a tag to assign to these wordforms. You can choose from more than one level. The result might look like this</a:t>
+            </a:r>
+            <a:br>
+              <a:rPr lang="en-US" dirty="0"/>
+            </a:br>
+            <a:br>
+              <a:rPr lang="en-US" dirty="0"/>
+            </a:br>
+            <a:br>
+              <a:rPr lang="en-US" dirty="0"/>
+            </a:br>
+            <a:br>
+              <a:rPr lang="en-US" dirty="0"/>
+            </a:br>
+            <a:br>
+              <a:rPr lang="en-US" dirty="0"/>
+            </a:br>
+            <a:br>
+              <a:rPr lang="en-US" dirty="0"/>
+            </a:br>
+            <a:br>
+              <a:rPr lang="en-US" dirty="0"/>
+            </a:br>
+            <a:endParaRPr lang="en-US" dirty="0"/>
+          </a:p>
+          <a:p>
+            <a:endParaRPr lang="en-US" dirty="0"/>
+          </a:p>
+        </p:txBody>
+      </p:sp>
+      <p:pic>
+        <p:nvPicPr>
+          <p:cNvPr id="6" name="Picture 5">
+            <a:extLst>
+              <a:ext uri="{FF2B5EF4-FFF2-40B4-BE49-F238E27FC236}">
+                <a16:creationId xmlns:a16="http://schemas.microsoft.com/office/drawing/2014/main" id="{1575F666-1B96-47CC-A732-9DD830F5B725}"/>
+              </a:ext>
+            </a:extLst>
+          </p:cNvPr>
+          <p:cNvPicPr/>
+          <p:nvPr/>
+        </p:nvPicPr>
+        <p:blipFill>
+          <a:blip r:embed="rId2"/>
+          <a:stretch>
+            <a:fillRect/>
+          </a:stretch>
+        </p:blipFill>
+        <p:spPr>
+          <a:xfrm>
+            <a:off x="2696894" y="3967511"/>
+            <a:ext cx="4686042" cy="2653421"/>
+          </a:xfrm>
+          <a:prstGeom prst="rect">
+            <a:avLst/>
+          </a:prstGeom>
+        </p:spPr>
+      </p:pic>
     </p:spTree>
     <p:extLst>
       <p:ext uri="{BB962C8B-B14F-4D97-AF65-F5344CB8AC3E}">
-        <p14:creationId xmlns:p14="http://schemas.microsoft.com/office/powerpoint/2010/main" val="3651101786"/>
+        <p14:creationId xmlns:p14="http://schemas.microsoft.com/office/powerpoint/2010/main" val="578731281"/>
       </p:ext>
     </p:extLst>
   </p:cSld>
@@ -8205,101 +8127,135 @@
           <a:p>
             <a:r>
               <a:rPr lang="en-US" dirty="0"/>
-              <a:t>This is how it looks in FLEx</a:t>
-            </a:r>
-          </a:p>
-          <a:p>
-            <a:pPr marL="0" indent="0">
-              <a:buNone/>
-            </a:pPr>
-            <a:br>
-              <a:rPr lang="en-US" dirty="0"/>
-            </a:br>
-            <a:br>
-              <a:rPr lang="en-US" dirty="0"/>
-            </a:br>
-            <a:br>
-              <a:rPr lang="en-US" dirty="0"/>
-            </a:br>
-            <a:br>
-              <a:rPr lang="en-US" dirty="0"/>
-            </a:br>
-            <a:br>
-              <a:rPr lang="en-US" dirty="0"/>
-            </a:br>
-            <a:br>
-              <a:rPr lang="en-US" dirty="0"/>
-            </a:br>
-            <a:br>
-              <a:rPr lang="en-US" dirty="0"/>
-            </a:br>
-            <a:endParaRPr lang="en-US" dirty="0"/>
-          </a:p>
-          <a:p>
-            <a:endParaRPr lang="en-US" dirty="0"/>
-          </a:p>
-        </p:txBody>
-      </p:sp>
-      <p:pic>
-        <p:nvPicPr>
-          <p:cNvPr id="7" name="Picture 6">
-            <a:extLst>
-              <a:ext uri="{FF2B5EF4-FFF2-40B4-BE49-F238E27FC236}">
-                <a16:creationId xmlns:a16="http://schemas.microsoft.com/office/drawing/2014/main" id="{9888847B-8909-42C7-9CDF-A028CA2F7E01}"/>
-              </a:ext>
-            </a:extLst>
-          </p:cNvPr>
-          <p:cNvPicPr/>
-          <p:nvPr/>
-        </p:nvPicPr>
-        <p:blipFill>
-          <a:blip r:embed="rId2"/>
-          <a:stretch>
-            <a:fillRect/>
-          </a:stretch>
-        </p:blipFill>
-        <p:spPr>
-          <a:xfrm>
-            <a:off x="3548720" y="1431217"/>
-            <a:ext cx="8309251" cy="4871109"/>
-          </a:xfrm>
-          <a:prstGeom prst="rect">
-            <a:avLst/>
-          </a:prstGeom>
-        </p:spPr>
-      </p:pic>
-      <p:pic>
-        <p:nvPicPr>
-          <p:cNvPr id="6" name="Picture 5">
-            <a:extLst>
-              <a:ext uri="{FF2B5EF4-FFF2-40B4-BE49-F238E27FC236}">
-                <a16:creationId xmlns:a16="http://schemas.microsoft.com/office/drawing/2014/main" id="{DACD0900-F6E1-4E08-9A7C-90B64833DC96}"/>
-              </a:ext>
-            </a:extLst>
-          </p:cNvPr>
-          <p:cNvPicPr/>
-          <p:nvPr/>
-        </p:nvPicPr>
-        <p:blipFill>
-          <a:blip r:embed="rId3"/>
-          <a:stretch>
-            <a:fillRect/>
-          </a:stretch>
-        </p:blipFill>
-        <p:spPr>
-          <a:xfrm>
-            <a:off x="178776" y="2446947"/>
-            <a:ext cx="3183402" cy="1802567"/>
-          </a:xfrm>
-          <a:prstGeom prst="rect">
-            <a:avLst/>
-          </a:prstGeom>
-        </p:spPr>
-      </p:pic>
+              <a:t>The Text Markup Tags list is owned in the </a:t>
+            </a:r>
+            <a:r>
+              <a:rPr lang="en-US" dirty="0" err="1"/>
+              <a:t>TextMarkupTags</a:t>
+            </a:r>
+            <a:r>
+              <a:rPr lang="en-US" dirty="0"/>
+              <a:t> property of </a:t>
+            </a:r>
+            <a:r>
+              <a:rPr lang="en-US" dirty="0" err="1"/>
+              <a:t>LangProject</a:t>
+            </a:r>
+            <a:r>
+              <a:rPr lang="en-US" dirty="0"/>
+              <a:t>. When you add a tag, FLEx adds a </a:t>
+            </a:r>
+            <a:r>
+              <a:rPr lang="en-US" dirty="0" err="1"/>
+              <a:t>TextTag</a:t>
+            </a:r>
+            <a:r>
+              <a:rPr lang="en-US" dirty="0"/>
+              <a:t> object in the Tags owning collection of </a:t>
+            </a:r>
+            <a:r>
+              <a:rPr lang="en-US" dirty="0" err="1"/>
+              <a:t>StText</a:t>
+            </a:r>
+            <a:r>
+              <a:rPr lang="en-US" dirty="0"/>
+              <a:t>.</a:t>
+            </a:r>
+          </a:p>
+          <a:p>
+            <a:r>
+              <a:rPr lang="en-US" dirty="0" err="1"/>
+              <a:t>TextTag</a:t>
+            </a:r>
+            <a:r>
+              <a:rPr lang="en-US" dirty="0"/>
+              <a:t> has</a:t>
+            </a:r>
+          </a:p>
+          <a:p>
+            <a:pPr lvl="1"/>
+            <a:r>
+              <a:rPr lang="en-US" dirty="0" err="1"/>
+              <a:t>BeginAnalysisIndex</a:t>
+            </a:r>
+            <a:r>
+              <a:rPr lang="en-US" dirty="0"/>
+              <a:t> – Integer indicating the beginning index of </a:t>
+            </a:r>
+            <a:r>
+              <a:rPr lang="en-US" dirty="0" err="1"/>
+              <a:t>IAnalysis</a:t>
+            </a:r>
+            <a:r>
+              <a:rPr lang="en-US" dirty="0"/>
+              <a:t> references in the Segment Analyses property.</a:t>
+            </a:r>
+          </a:p>
+          <a:p>
+            <a:pPr lvl="1"/>
+            <a:r>
+              <a:rPr lang="en-US" dirty="0" err="1"/>
+              <a:t>EndAnalysisIndex</a:t>
+            </a:r>
+            <a:r>
+              <a:rPr lang="en-US" dirty="0"/>
+              <a:t> – Integer indicating the ending index of </a:t>
+            </a:r>
+            <a:r>
+              <a:rPr lang="en-US" dirty="0" err="1"/>
+              <a:t>IAnalysis</a:t>
+            </a:r>
+            <a:r>
+              <a:rPr lang="en-US" dirty="0"/>
+              <a:t> references in the Segment Analyses property</a:t>
+            </a:r>
+          </a:p>
+          <a:p>
+            <a:pPr lvl="1"/>
+            <a:r>
+              <a:rPr lang="en-US" dirty="0" err="1"/>
+              <a:t>BeginSegment</a:t>
+            </a:r>
+            <a:r>
+              <a:rPr lang="en-US" dirty="0"/>
+              <a:t> – atomic reference to the Segment where the tag begins</a:t>
+            </a:r>
+          </a:p>
+          <a:p>
+            <a:pPr lvl="1"/>
+            <a:r>
+              <a:rPr lang="en-US" dirty="0" err="1"/>
+              <a:t>EndSegment</a:t>
+            </a:r>
+            <a:r>
+              <a:rPr lang="en-US" dirty="0"/>
+              <a:t> – atomic reference to the Segment where the tag ends</a:t>
+            </a:r>
+          </a:p>
+          <a:p>
+            <a:pPr lvl="1"/>
+            <a:r>
+              <a:rPr lang="en-US" dirty="0"/>
+              <a:t>Tag – atomic reference to </a:t>
+            </a:r>
+            <a:r>
+              <a:rPr lang="en-US" dirty="0" err="1"/>
+              <a:t>CmPossibility</a:t>
+            </a:r>
+            <a:r>
+              <a:rPr lang="en-US" dirty="0"/>
+              <a:t> in the Text Markup Tags list.</a:t>
+            </a:r>
+          </a:p>
+          <a:p>
+            <a:endParaRPr lang="en-US" dirty="0"/>
+          </a:p>
+        </p:txBody>
+      </p:sp>
     </p:spTree>
     <p:extLst>
       <p:ext uri="{BB962C8B-B14F-4D97-AF65-F5344CB8AC3E}">
-        <p14:creationId xmlns:p14="http://schemas.microsoft.com/office/powerpoint/2010/main" val="3069451385"/>
+        <p14:creationId xmlns:p14="http://schemas.microsoft.com/office/powerpoint/2010/main" val="3651101786"/>
       </p:ext>
     </p:extLst>
   </p:cSld>
@@ -8354,7 +8310,7 @@
           <a:p>
             <a:r>
               <a:rPr lang="en-US" dirty="0"/>
-              <a:t>Interlinear: Discourse charting</a:t>
+              <a:t>Interlinear: Text Tagging continued</a:t>
             </a:r>
           </a:p>
         </p:txBody>
@@ -8389,7 +8345,7 @@
           <a:p>
             <a:r>
               <a:rPr lang="en-US" dirty="0"/>
-              <a:t>Interlinear text offers a Text Chart tab that allows a user to add analyses into a discourse chart. The chart structure and markers are in possibility lists that the user can modify to meet their need. Here’s a simple example.</a:t>
+              <a:t>This is how it looks in FLEx</a:t>
             </a:r>
           </a:p>
           <a:p>
@@ -8426,10 +8382,10 @@
       </p:sp>
       <p:pic>
         <p:nvPicPr>
-          <p:cNvPr id="8" name="Picture 7">
-            <a:extLst>
-              <a:ext uri="{FF2B5EF4-FFF2-40B4-BE49-F238E27FC236}">
-                <a16:creationId xmlns:a16="http://schemas.microsoft.com/office/drawing/2014/main" id="{E917201D-B62A-4EF3-80FE-5E47617CFC99}"/>
+          <p:cNvPr id="7" name="Picture 6">
+            <a:extLst>
+              <a:ext uri="{FF2B5EF4-FFF2-40B4-BE49-F238E27FC236}">
+                <a16:creationId xmlns:a16="http://schemas.microsoft.com/office/drawing/2014/main" id="{9888847B-8909-42C7-9CDF-A028CA2F7E01}"/>
               </a:ext>
             </a:extLst>
           </p:cNvPr>
@@ -8444,8 +8400,36 @@
         </p:blipFill>
         <p:spPr>
           <a:xfrm>
-            <a:off x="1182644" y="2813270"/>
-            <a:ext cx="9826712" cy="2856011"/>
+            <a:off x="3548720" y="1431217"/>
+            <a:ext cx="8309251" cy="4871109"/>
+          </a:xfrm>
+          <a:prstGeom prst="rect">
+            <a:avLst/>
+          </a:prstGeom>
+        </p:spPr>
+      </p:pic>
+      <p:pic>
+        <p:nvPicPr>
+          <p:cNvPr id="6" name="Picture 5">
+            <a:extLst>
+              <a:ext uri="{FF2B5EF4-FFF2-40B4-BE49-F238E27FC236}">
+                <a16:creationId xmlns:a16="http://schemas.microsoft.com/office/drawing/2014/main" id="{DACD0900-F6E1-4E08-9A7C-90B64833DC96}"/>
+              </a:ext>
+            </a:extLst>
+          </p:cNvPr>
+          <p:cNvPicPr/>
+          <p:nvPr/>
+        </p:nvPicPr>
+        <p:blipFill>
+          <a:blip r:embed="rId3"/>
+          <a:stretch>
+            <a:fillRect/>
+          </a:stretch>
+        </p:blipFill>
+        <p:spPr>
+          <a:xfrm>
+            <a:off x="178776" y="2446947"/>
+            <a:ext cx="3183402" cy="1802567"/>
           </a:xfrm>
           <a:prstGeom prst="rect">
             <a:avLst/>
@@ -8455,7 +8439,7 @@
     </p:spTree>
     <p:extLst>
       <p:ext uri="{BB962C8B-B14F-4D97-AF65-F5344CB8AC3E}">
-        <p14:creationId xmlns:p14="http://schemas.microsoft.com/office/powerpoint/2010/main" val="3319236087"/>
+        <p14:creationId xmlns:p14="http://schemas.microsoft.com/office/powerpoint/2010/main" val="3069451385"/>
       </p:ext>
     </p:extLst>
   </p:cSld>
@@ -8510,7 +8494,7 @@
           <a:p>
             <a:r>
               <a:rPr lang="en-US" dirty="0"/>
-              <a:t>Interlinear: Discourse charting continued</a:t>
+              <a:t>Interlinear: Discourse charting</a:t>
             </a:r>
           </a:p>
         </p:txBody>
@@ -8545,17 +8529,47 @@
           <a:p>
             <a:r>
               <a:rPr lang="en-US" dirty="0"/>
-              <a:t>Preview…</a:t>
-            </a:r>
+              <a:t>Interlinear text offers a Text Chart tab that allows a user to add analyses into a discourse chart. The chart structure and markers are in possibility lists that the user can modify to meet their need. Here’s a simple example.</a:t>
+            </a:r>
+          </a:p>
+          <a:p>
+            <a:pPr marL="0" indent="0">
+              <a:buNone/>
+            </a:pPr>
+            <a:br>
+              <a:rPr lang="en-US" dirty="0"/>
+            </a:br>
+            <a:br>
+              <a:rPr lang="en-US" dirty="0"/>
+            </a:br>
+            <a:br>
+              <a:rPr lang="en-US" dirty="0"/>
+            </a:br>
+            <a:br>
+              <a:rPr lang="en-US" dirty="0"/>
+            </a:br>
+            <a:br>
+              <a:rPr lang="en-US" dirty="0"/>
+            </a:br>
+            <a:br>
+              <a:rPr lang="en-US" dirty="0"/>
+            </a:br>
+            <a:br>
+              <a:rPr lang="en-US" dirty="0"/>
+            </a:br>
+            <a:endParaRPr lang="en-US" dirty="0"/>
+          </a:p>
+          <a:p>
+            <a:endParaRPr lang="en-US" dirty="0"/>
           </a:p>
         </p:txBody>
       </p:sp>
       <p:pic>
         <p:nvPicPr>
-          <p:cNvPr id="6" name="Picture 5">
-            <a:extLst>
-              <a:ext uri="{FF2B5EF4-FFF2-40B4-BE49-F238E27FC236}">
-                <a16:creationId xmlns:a16="http://schemas.microsoft.com/office/drawing/2014/main" id="{B131850C-3F92-4FAD-8690-258D7907500C}"/>
+          <p:cNvPr id="8" name="Picture 7">
+            <a:extLst>
+              <a:ext uri="{FF2B5EF4-FFF2-40B4-BE49-F238E27FC236}">
+                <a16:creationId xmlns:a16="http://schemas.microsoft.com/office/drawing/2014/main" id="{E917201D-B62A-4EF3-80FE-5E47617CFC99}"/>
               </a:ext>
             </a:extLst>
           </p:cNvPr>
@@ -8570,36 +8584,8 @@
         </p:blipFill>
         <p:spPr>
           <a:xfrm>
-            <a:off x="4203456" y="939800"/>
-            <a:ext cx="7150344" cy="5672269"/>
-          </a:xfrm>
-          <a:prstGeom prst="rect">
-            <a:avLst/>
-          </a:prstGeom>
-        </p:spPr>
-      </p:pic>
-      <p:pic>
-        <p:nvPicPr>
-          <p:cNvPr id="7" name="Picture 6">
-            <a:extLst>
-              <a:ext uri="{FF2B5EF4-FFF2-40B4-BE49-F238E27FC236}">
-                <a16:creationId xmlns:a16="http://schemas.microsoft.com/office/drawing/2014/main" id="{5F08D0ED-4C8E-4CD6-BEBC-C5B756E03B36}"/>
-              </a:ext>
-            </a:extLst>
-          </p:cNvPr>
-          <p:cNvPicPr/>
-          <p:nvPr/>
-        </p:nvPicPr>
-        <p:blipFill>
-          <a:blip r:embed="rId3"/>
-          <a:stretch>
-            <a:fillRect/>
-          </a:stretch>
-        </p:blipFill>
-        <p:spPr>
-          <a:xfrm>
-            <a:off x="329858" y="5042984"/>
-            <a:ext cx="5398770" cy="1569085"/>
+            <a:off x="1182644" y="2813270"/>
+            <a:ext cx="9826712" cy="2856011"/>
           </a:xfrm>
           <a:prstGeom prst="rect">
             <a:avLst/>
@@ -8609,7 +8595,7 @@
     </p:spTree>
     <p:extLst>
       <p:ext uri="{BB962C8B-B14F-4D97-AF65-F5344CB8AC3E}">
-        <p14:creationId xmlns:p14="http://schemas.microsoft.com/office/powerpoint/2010/main" val="641988728"/>
+        <p14:creationId xmlns:p14="http://schemas.microsoft.com/office/powerpoint/2010/main" val="3319236087"/>
       </p:ext>
     </p:extLst>
   </p:cSld>
@@ -8693,148 +8679,77 @@
         </p:spPr>
         <p:txBody>
           <a:bodyPr>
-            <a:normAutofit fontScale="92500" lnSpcReduction="10000"/>
+            <a:normAutofit/>
           </a:bodyPr>
           <a:lstStyle/>
           <a:p>
             <a:r>
               <a:rPr lang="en-US" dirty="0"/>
-              <a:t>Text charts are stored in </a:t>
-            </a:r>
-            <a:r>
-              <a:rPr lang="en-US" dirty="0" err="1"/>
-              <a:t>DsDiscourseData</a:t>
-            </a:r>
-            <a:r>
-              <a:rPr lang="en-US" dirty="0"/>
-              <a:t>, which is owned in the </a:t>
-            </a:r>
-            <a:r>
-              <a:rPr lang="en-US" dirty="0" err="1"/>
-              <a:t>DiscourseData</a:t>
-            </a:r>
-            <a:r>
-              <a:rPr lang="en-US" dirty="0"/>
-              <a:t> atomic owning property of </a:t>
-            </a:r>
-            <a:r>
-              <a:rPr lang="en-US" dirty="0" err="1"/>
-              <a:t>LangProject</a:t>
-            </a:r>
-            <a:r>
-              <a:rPr lang="en-US" dirty="0"/>
-              <a:t>. </a:t>
-            </a:r>
-            <a:r>
-              <a:rPr lang="en-US" dirty="0" err="1"/>
-              <a:t>DsDiscourseData</a:t>
-            </a:r>
-            <a:r>
-              <a:rPr lang="en-US" dirty="0"/>
-              <a:t> owns two </a:t>
-            </a:r>
-            <a:r>
-              <a:rPr lang="en-US" dirty="0" err="1"/>
-              <a:t>CmPossibilityList</a:t>
-            </a:r>
-            <a:r>
-              <a:rPr lang="en-US" dirty="0"/>
-              <a:t> objects.</a:t>
-            </a:r>
-          </a:p>
-          <a:p>
-            <a:pPr lvl="1"/>
-            <a:r>
-              <a:rPr lang="en-US" dirty="0"/>
-              <a:t>The “Text Constituent Chart Templates” list is owned in the </a:t>
-            </a:r>
-            <a:r>
-              <a:rPr lang="en-US" dirty="0" err="1"/>
-              <a:t>ConstChartTempl</a:t>
-            </a:r>
-            <a:r>
-              <a:rPr lang="en-US" dirty="0"/>
-              <a:t> atomic owning property and defines the chart structure. This list is hierarchical. The top level is the name of a type of chart. The only one by default is “Default Template”. The second level defines the primary level of columns and headers (Pre-nuclear, Nucleus, and Post-nuclear) separated by black lines. The third level defines secondary columns and headers. (e.g., Nucleus has Subject, Verb, and Object/Complement items) separated by gray lines.</a:t>
-            </a:r>
-          </a:p>
-          <a:p>
-            <a:pPr lvl="1"/>
-            <a:r>
-              <a:rPr lang="en-US" dirty="0"/>
-              <a:t>The “Text Markup Tags” list is owned in the </a:t>
-            </a:r>
-            <a:r>
-              <a:rPr lang="en-US" dirty="0" err="1"/>
-              <a:t>ChartMarkers</a:t>
-            </a:r>
-            <a:r>
-              <a:rPr lang="en-US" dirty="0"/>
-              <a:t> atomic owning property and defines submenus for the right-click menu within cells to mark special features. This list is also hierarchical. The top level defines a right-click subitem. The defaults are </a:t>
-            </a:r>
-            <a:r>
-              <a:rPr lang="en-US" dirty="0" err="1"/>
-              <a:t>TenseAspectMood</a:t>
-            </a:r>
-            <a:r>
-              <a:rPr lang="en-US" dirty="0"/>
-              <a:t>, Pronouns, and Demonstratives. Lower levels provide actual markers.</a:t>
-            </a:r>
-          </a:p>
-          <a:p>
-            <a:r>
-              <a:rPr lang="en-US" dirty="0" err="1"/>
-              <a:t>DsDiscourseData</a:t>
-            </a:r>
-            <a:r>
-              <a:rPr lang="en-US" dirty="0"/>
-              <a:t> also has a Charts owning collection that owns </a:t>
-            </a:r>
-            <a:r>
-              <a:rPr lang="en-US" dirty="0" err="1"/>
-              <a:t>DsChart</a:t>
-            </a:r>
-            <a:r>
-              <a:rPr lang="en-US" dirty="0"/>
-              <a:t> objects. </a:t>
-            </a:r>
-            <a:r>
-              <a:rPr lang="en-US" dirty="0" err="1"/>
-              <a:t>DsChart</a:t>
-            </a:r>
-            <a:r>
-              <a:rPr lang="en-US" dirty="0"/>
-              <a:t> is a subclass of </a:t>
-            </a:r>
-            <a:r>
-              <a:rPr lang="en-US" dirty="0" err="1"/>
-              <a:t>CmMajorObject</a:t>
-            </a:r>
-            <a:r>
-              <a:rPr lang="en-US" dirty="0"/>
-              <a:t>, and both of these are abstract. The only actual subclass that is available is </a:t>
-            </a:r>
-            <a:r>
-              <a:rPr lang="en-US" dirty="0" err="1"/>
-              <a:t>DsConstChart</a:t>
-            </a:r>
-            <a:r>
-              <a:rPr lang="en-US" dirty="0"/>
-              <a:t>.</a:t>
-            </a:r>
-          </a:p>
-          <a:p>
-            <a:pPr lvl="1"/>
-            <a:endParaRPr lang="en-US" dirty="0"/>
-          </a:p>
-          <a:p>
-            <a:endParaRPr lang="en-US" dirty="0"/>
-          </a:p>
-        </p:txBody>
-      </p:sp>
+              <a:t>Preview…</a:t>
+            </a:r>
+          </a:p>
+        </p:txBody>
+      </p:sp>
+      <p:pic>
+        <p:nvPicPr>
+          <p:cNvPr id="6" name="Picture 5">
+            <a:extLst>
+              <a:ext uri="{FF2B5EF4-FFF2-40B4-BE49-F238E27FC236}">
+                <a16:creationId xmlns:a16="http://schemas.microsoft.com/office/drawing/2014/main" id="{B131850C-3F92-4FAD-8690-258D7907500C}"/>
+              </a:ext>
+            </a:extLst>
+          </p:cNvPr>
+          <p:cNvPicPr/>
+          <p:nvPr/>
+        </p:nvPicPr>
+        <p:blipFill>
+          <a:blip r:embed="rId2"/>
+          <a:stretch>
+            <a:fillRect/>
+          </a:stretch>
+        </p:blipFill>
+        <p:spPr>
+          <a:xfrm>
+            <a:off x="4203456" y="939800"/>
+            <a:ext cx="7150344" cy="5672269"/>
+          </a:xfrm>
+          <a:prstGeom prst="rect">
+            <a:avLst/>
+          </a:prstGeom>
+        </p:spPr>
+      </p:pic>
+      <p:pic>
+        <p:nvPicPr>
+          <p:cNvPr id="7" name="Picture 6">
+            <a:extLst>
+              <a:ext uri="{FF2B5EF4-FFF2-40B4-BE49-F238E27FC236}">
+                <a16:creationId xmlns:a16="http://schemas.microsoft.com/office/drawing/2014/main" id="{5F08D0ED-4C8E-4CD6-BEBC-C5B756E03B36}"/>
+              </a:ext>
+            </a:extLst>
+          </p:cNvPr>
+          <p:cNvPicPr/>
+          <p:nvPr/>
+        </p:nvPicPr>
+        <p:blipFill>
+          <a:blip r:embed="rId3"/>
+          <a:stretch>
+            <a:fillRect/>
+          </a:stretch>
+        </p:blipFill>
+        <p:spPr>
+          <a:xfrm>
+            <a:off x="329858" y="5042984"/>
+            <a:ext cx="5398770" cy="1569085"/>
+          </a:xfrm>
+          <a:prstGeom prst="rect">
+            <a:avLst/>
+          </a:prstGeom>
+        </p:spPr>
+      </p:pic>
     </p:spTree>
     <p:extLst>
       <p:ext uri="{BB962C8B-B14F-4D97-AF65-F5344CB8AC3E}">
-        <p14:creationId xmlns:p14="http://schemas.microsoft.com/office/powerpoint/2010/main" val="2255882466"/>
+        <p14:creationId xmlns:p14="http://schemas.microsoft.com/office/powerpoint/2010/main" val="641988728"/>
       </p:ext>
     </p:extLst>
   </p:cSld>
@@ -8923,163 +8838,132 @@
           <a:lstStyle/>
           <a:p>
             <a:r>
+              <a:rPr lang="en-US" dirty="0"/>
+              <a:t>Text charts are stored in </a:t>
+            </a:r>
+            <a:r>
+              <a:rPr lang="en-US" dirty="0" err="1"/>
+              <a:t>DsDiscourseData</a:t>
+            </a:r>
+            <a:r>
+              <a:rPr lang="en-US" dirty="0"/>
+              <a:t>, which is owned in the </a:t>
+            </a:r>
+            <a:r>
+              <a:rPr lang="en-US" dirty="0" err="1"/>
+              <a:t>DiscourseData</a:t>
+            </a:r>
+            <a:r>
+              <a:rPr lang="en-US" dirty="0"/>
+              <a:t> atomic owning property of </a:t>
+            </a:r>
+            <a:r>
+              <a:rPr lang="en-US" dirty="0" err="1"/>
+              <a:t>LangProject</a:t>
+            </a:r>
+            <a:r>
+              <a:rPr lang="en-US" dirty="0"/>
+              <a:t>. </a:t>
+            </a:r>
+            <a:r>
+              <a:rPr lang="en-US" dirty="0" err="1"/>
+              <a:t>DsDiscourseData</a:t>
+            </a:r>
+            <a:r>
+              <a:rPr lang="en-US" dirty="0"/>
+              <a:t> owns two </a:t>
+            </a:r>
+            <a:r>
+              <a:rPr lang="en-US" dirty="0" err="1"/>
+              <a:t>CmPossibilityList</a:t>
+            </a:r>
+            <a:r>
+              <a:rPr lang="en-US" dirty="0"/>
+              <a:t> objects.</a:t>
+            </a:r>
+          </a:p>
+          <a:p>
+            <a:pPr lvl="1"/>
+            <a:r>
+              <a:rPr lang="en-US" dirty="0"/>
+              <a:t>The “Text Constituent Chart Templates” list is owned in the </a:t>
+            </a:r>
+            <a:r>
+              <a:rPr lang="en-US" dirty="0" err="1"/>
+              <a:t>ConstChartTempl</a:t>
+            </a:r>
+            <a:r>
+              <a:rPr lang="en-US" dirty="0"/>
+              <a:t> atomic owning property and defines the chart structure. This list is hierarchical. The top level is the name of a type of chart. The only one by default is “Default Template”. The second level defines the primary level of columns and headers (Pre-nuclear, Nucleus, and Post-nuclear) separated by black lines. The third level defines secondary columns and headers. (e.g., Nucleus has Subject, Verb, and Object/Complement items) separated by gray lines.</a:t>
+            </a:r>
+          </a:p>
+          <a:p>
+            <a:pPr lvl="1"/>
+            <a:r>
+              <a:rPr lang="en-US" dirty="0"/>
+              <a:t>The “Text Markup Tags” list is owned in the </a:t>
+            </a:r>
+            <a:r>
+              <a:rPr lang="en-US" dirty="0" err="1"/>
+              <a:t>ChartMarkers</a:t>
+            </a:r>
+            <a:r>
+              <a:rPr lang="en-US" dirty="0"/>
+              <a:t> atomic owning property and defines submenus for the right-click menu within cells to mark special features. This list is also hierarchical. The top level defines a right-click subitem. The defaults are </a:t>
+            </a:r>
+            <a:r>
+              <a:rPr lang="en-US" dirty="0" err="1"/>
+              <a:t>TenseAspectMood</a:t>
+            </a:r>
+            <a:r>
+              <a:rPr lang="en-US" dirty="0"/>
+              <a:t>, Pronouns, and Demonstratives. Lower levels provide actual markers.</a:t>
+            </a:r>
+          </a:p>
+          <a:p>
+            <a:r>
+              <a:rPr lang="en-US" dirty="0" err="1"/>
+              <a:t>DsDiscourseData</a:t>
+            </a:r>
+            <a:r>
+              <a:rPr lang="en-US" dirty="0"/>
+              <a:t> also has a Charts owning collection that owns </a:t>
+            </a:r>
+            <a:r>
+              <a:rPr lang="en-US" dirty="0" err="1"/>
+              <a:t>DsChart</a:t>
+            </a:r>
+            <a:r>
+              <a:rPr lang="en-US" dirty="0"/>
+              <a:t> objects. </a:t>
+            </a:r>
+            <a:r>
+              <a:rPr lang="en-US" dirty="0" err="1"/>
+              <a:t>DsChart</a:t>
+            </a:r>
+            <a:r>
+              <a:rPr lang="en-US" dirty="0"/>
+              <a:t> is a subclass of </a:t>
+            </a:r>
+            <a:r>
+              <a:rPr lang="en-US" dirty="0" err="1"/>
+              <a:t>CmMajorObject</a:t>
+            </a:r>
+            <a:r>
+              <a:rPr lang="en-US" dirty="0"/>
+              <a:t>, and both of these are abstract. The only actual subclass that is available is </a:t>
+            </a:r>
+            <a:r>
               <a:rPr lang="en-US" dirty="0" err="1"/>
               <a:t>DsConstChart</a:t>
             </a:r>
             <a:r>
               <a:rPr lang="en-US" dirty="0"/>
-              <a:t> has</a:t>
+              <a:t>.</a:t>
             </a:r>
           </a:p>
           <a:p>
             <a:pPr lvl="1"/>
-            <a:r>
-              <a:rPr lang="en-US" dirty="0"/>
-              <a:t>Template – atomic reference to </a:t>
-            </a:r>
-            <a:r>
-              <a:rPr lang="en-US" dirty="0" err="1"/>
-              <a:t>CmPossibility</a:t>
-            </a:r>
-            <a:r>
-              <a:rPr lang="en-US" dirty="0"/>
-              <a:t>. This is one of the top possibilities in the “Text Constituent Chart Templates” list. In this example, it is the “Default Template” item. This is the item that defines the columns for this chart.</a:t>
-            </a:r>
-          </a:p>
-          <a:p>
-            <a:pPr lvl="1"/>
-            <a:r>
-              <a:rPr lang="en-US" dirty="0" err="1"/>
-              <a:t>BasedOn</a:t>
-            </a:r>
-            <a:r>
-              <a:rPr lang="en-US" dirty="0"/>
-              <a:t> – atomic reference to </a:t>
-            </a:r>
-            <a:r>
-              <a:rPr lang="en-US" dirty="0" err="1"/>
-              <a:t>StText</a:t>
-            </a:r>
-            <a:r>
-              <a:rPr lang="en-US" dirty="0"/>
-              <a:t>. This is owned by the Text being charted.</a:t>
-            </a:r>
-          </a:p>
-          <a:p>
-            <a:pPr lvl="1"/>
-            <a:r>
-              <a:rPr lang="en-US" dirty="0"/>
-              <a:t>Rows – owning sequence of </a:t>
-            </a:r>
-            <a:r>
-              <a:rPr lang="en-US" dirty="0" err="1"/>
-              <a:t>ConstChartRow</a:t>
-            </a:r>
-            <a:r>
-              <a:rPr lang="en-US" dirty="0"/>
-              <a:t> objects. There is one </a:t>
-            </a:r>
-            <a:r>
-              <a:rPr lang="en-US" dirty="0" err="1"/>
-              <a:t>ConstChartRow</a:t>
-            </a:r>
-            <a:r>
-              <a:rPr lang="en-US" dirty="0"/>
-              <a:t> object for each row in the chart. A row corresponds to a </a:t>
-            </a:r>
-            <a:r>
-              <a:rPr lang="en-US" dirty="0" err="1"/>
-              <a:t>StTextPara</a:t>
-            </a:r>
-            <a:r>
-              <a:rPr lang="en-US" dirty="0"/>
-              <a:t> and is shown in black lines and numbers on the left designating the paragraph number.</a:t>
-            </a:r>
-          </a:p>
-          <a:p>
-            <a:r>
-              <a:rPr lang="en-US" dirty="0" err="1"/>
-              <a:t>ConstChartRow</a:t>
-            </a:r>
-            <a:r>
-              <a:rPr lang="en-US" dirty="0"/>
-              <a:t> has</a:t>
-            </a:r>
-          </a:p>
-          <a:p>
-            <a:pPr lvl="1"/>
-            <a:r>
-              <a:rPr lang="en-US" dirty="0"/>
-              <a:t>Label – String containing the paragraph number and possible letters when there are sub-rows within the row.</a:t>
-            </a:r>
-          </a:p>
-          <a:p>
-            <a:pPr lvl="1"/>
-            <a:r>
-              <a:rPr lang="en-US" dirty="0"/>
-              <a:t>Cells – owning sequence of </a:t>
-            </a:r>
-            <a:r>
-              <a:rPr lang="en-US" dirty="0" err="1"/>
-              <a:t>ConstituentChartCellPart</a:t>
-            </a:r>
-            <a:r>
-              <a:rPr lang="en-US" dirty="0"/>
-              <a:t> which is abstract. Possibilities include</a:t>
-            </a:r>
-          </a:p>
-          <a:p>
-            <a:pPr lvl="2"/>
-            <a:r>
-              <a:rPr lang="en-US" dirty="0" err="1"/>
-              <a:t>ConstChartClauseMarker</a:t>
-            </a:r>
-            <a:r>
-              <a:rPr lang="en-US" dirty="0"/>
-              <a:t> – controls dependent clauses.</a:t>
-            </a:r>
-          </a:p>
-          <a:p>
-            <a:pPr lvl="2"/>
-            <a:r>
-              <a:rPr lang="en-US" dirty="0" err="1"/>
-              <a:t>ConstChartMovedTextMarker</a:t>
-            </a:r>
-            <a:r>
-              <a:rPr lang="en-US" dirty="0"/>
-              <a:t> – allows word groups to be moved to a different location.</a:t>
-            </a:r>
-          </a:p>
-          <a:p>
-            <a:pPr lvl="2"/>
-            <a:r>
-              <a:rPr lang="en-US" dirty="0" err="1"/>
-              <a:t>ConstChartTag</a:t>
-            </a:r>
-            <a:r>
-              <a:rPr lang="en-US" dirty="0"/>
-              <a:t> – inserts a tag before or after a column</a:t>
-            </a:r>
-          </a:p>
-          <a:p>
-            <a:pPr lvl="2"/>
-            <a:r>
-              <a:rPr lang="en-US" dirty="0" err="1"/>
-              <a:t>ConstChartWordGroup</a:t>
-            </a:r>
-            <a:r>
-              <a:rPr lang="en-US" dirty="0"/>
-              <a:t> – groups 1 or more Wordforms into a cell.</a:t>
-            </a:r>
-          </a:p>
-          <a:p>
-            <a:pPr lvl="1"/>
-            <a:r>
-              <a:rPr lang="en-US" dirty="0"/>
-              <a:t>Notes – String for compiler notes.</a:t>
-            </a:r>
-          </a:p>
-          <a:p>
             <a:endParaRPr lang="en-US" dirty="0"/>
           </a:p>
           <a:p>
@@ -9090,7 +8974,7 @@
     </p:spTree>
     <p:extLst>
       <p:ext uri="{BB962C8B-B14F-4D97-AF65-F5344CB8AC3E}">
-        <p14:creationId xmlns:p14="http://schemas.microsoft.com/office/powerpoint/2010/main" val="4150536636"/>
+        <p14:creationId xmlns:p14="http://schemas.microsoft.com/office/powerpoint/2010/main" val="2255882466"/>
       </p:ext>
     </p:extLst>
   </p:cSld>
@@ -9168,19 +9052,112 @@
         </p:nvSpPr>
         <p:spPr>
           <a:xfrm>
-            <a:off x="472441" y="939800"/>
-            <a:ext cx="5958399" cy="5681133"/>
+            <a:off x="185060" y="939800"/>
+            <a:ext cx="10069283" cy="5681133"/>
           </a:xfrm>
         </p:spPr>
         <p:txBody>
           <a:bodyPr>
-            <a:normAutofit fontScale="92500"/>
+            <a:normAutofit fontScale="92500" lnSpcReduction="10000"/>
           </a:bodyPr>
           <a:lstStyle/>
           <a:p>
             <a:r>
-              <a:rPr lang="en-US" dirty="0"/>
-              <a:t>A “Fake chart parts” example text that makes no linguistic sense, but demonstrates the remaining </a:t>
+              <a:rPr lang="en-US" dirty="0" err="1"/>
+              <a:t>DsConstChart</a:t>
+            </a:r>
+            <a:r>
+              <a:rPr lang="en-US" dirty="0"/>
+              <a:t> has</a:t>
+            </a:r>
+          </a:p>
+          <a:p>
+            <a:pPr lvl="1"/>
+            <a:r>
+              <a:rPr lang="en-US" dirty="0"/>
+              <a:t>Template – atomic reference to </a:t>
+            </a:r>
+            <a:r>
+              <a:rPr lang="en-US" dirty="0" err="1"/>
+              <a:t>CmPossibility</a:t>
+            </a:r>
+            <a:r>
+              <a:rPr lang="en-US" dirty="0"/>
+              <a:t>. This is one of the top possibilities in the “Text Constituent Chart Templates” list. In this example, it is the “Default Template” item. This is the item that defines the columns for this chart.</a:t>
+            </a:r>
+          </a:p>
+          <a:p>
+            <a:pPr lvl="1"/>
+            <a:r>
+              <a:rPr lang="en-US" dirty="0" err="1"/>
+              <a:t>BasedOn</a:t>
+            </a:r>
+            <a:r>
+              <a:rPr lang="en-US" dirty="0"/>
+              <a:t> – atomic reference to </a:t>
+            </a:r>
+            <a:r>
+              <a:rPr lang="en-US" dirty="0" err="1"/>
+              <a:t>StText</a:t>
+            </a:r>
+            <a:r>
+              <a:rPr lang="en-US" dirty="0"/>
+              <a:t>. This is owned by the Text being charted.</a:t>
+            </a:r>
+          </a:p>
+          <a:p>
+            <a:pPr lvl="1"/>
+            <a:r>
+              <a:rPr lang="en-US" dirty="0"/>
+              <a:t>Rows – owning sequence of </a:t>
+            </a:r>
+            <a:r>
+              <a:rPr lang="en-US" dirty="0" err="1"/>
+              <a:t>ConstChartRow</a:t>
+            </a:r>
+            <a:r>
+              <a:rPr lang="en-US" dirty="0"/>
+              <a:t> objects. There is one </a:t>
+            </a:r>
+            <a:r>
+              <a:rPr lang="en-US" dirty="0" err="1"/>
+              <a:t>ConstChartRow</a:t>
+            </a:r>
+            <a:r>
+              <a:rPr lang="en-US" dirty="0"/>
+              <a:t> object for each row in the chart. A row corresponds to a </a:t>
+            </a:r>
+            <a:r>
+              <a:rPr lang="en-US" dirty="0" err="1"/>
+              <a:t>StTextPara</a:t>
+            </a:r>
+            <a:r>
+              <a:rPr lang="en-US" dirty="0"/>
+              <a:t> and is shown in black lines and numbers on the left designating the paragraph number.</a:t>
+            </a:r>
+          </a:p>
+          <a:p>
+            <a:r>
+              <a:rPr lang="en-US" dirty="0" err="1"/>
+              <a:t>ConstChartRow</a:t>
+            </a:r>
+            <a:r>
+              <a:rPr lang="en-US" dirty="0"/>
+              <a:t> has</a:t>
+            </a:r>
+          </a:p>
+          <a:p>
+            <a:pPr lvl="1"/>
+            <a:r>
+              <a:rPr lang="en-US" dirty="0"/>
+              <a:t>Label – String containing the paragraph number and possible letters when there are sub-rows within the row.</a:t>
+            </a:r>
+          </a:p>
+          <a:p>
+            <a:pPr lvl="1"/>
+            <a:r>
+              <a:rPr lang="en-US" dirty="0"/>
+              <a:t>Cells – owning sequence of </a:t>
             </a:r>
             <a:r>
               <a:rPr lang="en-US" dirty="0" err="1"/>
@@ -9188,49 +9165,59 @@
             </a:r>
             <a:r>
               <a:rPr lang="en-US" dirty="0"/>
-              <a:t> classes looks like this in the sample project.</a:t>
-            </a:r>
-          </a:p>
-          <a:p>
-            <a:r>
-              <a:rPr lang="en-US" dirty="0"/>
-              <a:t>This chart was created with baseline ‘garçon </a:t>
-            </a:r>
-            <a:r>
-              <a:rPr lang="en-US" dirty="0" err="1"/>
-              <a:t>voit</a:t>
-            </a:r>
-            <a:r>
-              <a:rPr lang="en-US" dirty="0"/>
-              <a:t> lion.’, and bringing ‘garçon’ into the Subject column, ‘</a:t>
-            </a:r>
-            <a:r>
-              <a:rPr lang="en-US" dirty="0" err="1"/>
-              <a:t>voit</a:t>
-            </a:r>
-            <a:r>
-              <a:rPr lang="en-US" dirty="0"/>
-              <a:t>’ into the Verb column, and ‘lion’ into the Subject column. Right-click ‘garçon’ and choose Mark as Postposed from &gt; Outer. Right-click ‘garçon’ again and choose Mark </a:t>
-            </a:r>
-            <a:r>
-              <a:rPr lang="en-US" dirty="0" err="1"/>
-              <a:t>TenseAspectMood</a:t>
-            </a:r>
-            <a:r>
-              <a:rPr lang="en-US" dirty="0"/>
-              <a:t> &gt; Timeless &gt; Timeless. Right-click ‘</a:t>
-            </a:r>
-            <a:r>
-              <a:rPr lang="en-US" dirty="0" err="1"/>
-              <a:t>voit</a:t>
-            </a:r>
-            <a:r>
-              <a:rPr lang="en-US" dirty="0"/>
-              <a:t>’ and choose Make a Dependent Clause out of &gt; Next Clause.</a:t>
-            </a:r>
-          </a:p>
-          <a:p>
-            <a:endParaRPr lang="en-US" dirty="0"/>
+              <a:t> which is abstract. Possibilities include</a:t>
+            </a:r>
+          </a:p>
+          <a:p>
+            <a:pPr lvl="2"/>
+            <a:r>
+              <a:rPr lang="en-US" dirty="0" err="1"/>
+              <a:t>ConstChartClauseMarker</a:t>
+            </a:r>
+            <a:r>
+              <a:rPr lang="en-US" dirty="0"/>
+              <a:t> – controls dependent clauses.</a:t>
+            </a:r>
+          </a:p>
+          <a:p>
+            <a:pPr lvl="2"/>
+            <a:r>
+              <a:rPr lang="en-US" dirty="0" err="1"/>
+              <a:t>ConstChartMovedTextMarker</a:t>
+            </a:r>
+            <a:r>
+              <a:rPr lang="en-US" dirty="0"/>
+              <a:t> – allows word groups to be moved to a different location.</a:t>
+            </a:r>
+          </a:p>
+          <a:p>
+            <a:pPr lvl="2"/>
+            <a:r>
+              <a:rPr lang="en-US" dirty="0" err="1"/>
+              <a:t>ConstChartTag</a:t>
+            </a:r>
+            <a:r>
+              <a:rPr lang="en-US" dirty="0"/>
+              <a:t> – inserts a tag before or after a column</a:t>
+            </a:r>
+          </a:p>
+          <a:p>
+            <a:pPr lvl="2"/>
+            <a:r>
+              <a:rPr lang="en-US" dirty="0" err="1"/>
+              <a:t>ConstChartWordGroup</a:t>
+            </a:r>
+            <a:r>
+              <a:rPr lang="en-US" dirty="0"/>
+              <a:t> – groups 1 or more Wordforms into a cell.</a:t>
+            </a:r>
+          </a:p>
+          <a:p>
+            <a:pPr lvl="1"/>
+            <a:r>
+              <a:rPr lang="en-US" dirty="0"/>
+              <a:t>Notes – String for compiler notes.</a:t>
+            </a:r>
           </a:p>
           <a:p>
             <a:endParaRPr lang="en-US" dirty="0"/>
@@ -9242,14 +9229,16 @@
       </p:sp>
       <p:pic>
         <p:nvPicPr>
-          <p:cNvPr id="6" name="Picture 5">
-            <a:extLst>
-              <a:ext uri="{FF2B5EF4-FFF2-40B4-BE49-F238E27FC236}">
-                <a16:creationId xmlns:a16="http://schemas.microsoft.com/office/drawing/2014/main" id="{E9E9439F-2ABB-4CFC-A9B4-44F6FCEF23FB}"/>
-              </a:ext>
-            </a:extLst>
-          </p:cNvPr>
-          <p:cNvPicPr/>
+          <p:cNvPr id="2" name="Picture 1">
+            <a:extLst>
+              <a:ext uri="{FF2B5EF4-FFF2-40B4-BE49-F238E27FC236}">
+                <a16:creationId xmlns:a16="http://schemas.microsoft.com/office/drawing/2014/main" id="{16B7F459-4767-49EB-B9BF-68E8965EC9EF}"/>
+              </a:ext>
+            </a:extLst>
+          </p:cNvPr>
+          <p:cNvPicPr>
+            <a:picLocks noChangeAspect="1"/>
+          </p:cNvPicPr>
           <p:nvPr/>
         </p:nvPicPr>
         <p:blipFill>
@@ -9260,8 +9249,38 @@
         </p:blipFill>
         <p:spPr>
           <a:xfrm>
-            <a:off x="6430840" y="1588331"/>
-            <a:ext cx="5761160" cy="3925528"/>
+            <a:off x="10127001" y="1209600"/>
+            <a:ext cx="1648055" cy="1066949"/>
+          </a:xfrm>
+          <a:prstGeom prst="rect">
+            <a:avLst/>
+          </a:prstGeom>
+        </p:spPr>
+      </p:pic>
+      <p:pic>
+        <p:nvPicPr>
+          <p:cNvPr id="3" name="Picture 2">
+            <a:extLst>
+              <a:ext uri="{FF2B5EF4-FFF2-40B4-BE49-F238E27FC236}">
+                <a16:creationId xmlns:a16="http://schemas.microsoft.com/office/drawing/2014/main" id="{B1C3EB66-29B4-4A78-A93D-F3F5BD2673D2}"/>
+              </a:ext>
+            </a:extLst>
+          </p:cNvPr>
+          <p:cNvPicPr>
+            <a:picLocks noChangeAspect="1"/>
+          </p:cNvPicPr>
+          <p:nvPr/>
+        </p:nvPicPr>
+        <p:blipFill>
+          <a:blip r:embed="rId3"/>
+          <a:stretch>
+            <a:fillRect/>
+          </a:stretch>
+        </p:blipFill>
+        <p:spPr>
+          <a:xfrm>
+            <a:off x="10123988" y="4202496"/>
+            <a:ext cx="1781424" cy="1000265"/>
           </a:xfrm>
           <a:prstGeom prst="rect">
             <a:avLst/>
@@ -9271,7 +9290,7 @@
     </p:spTree>
     <p:extLst>
       <p:ext uri="{BB962C8B-B14F-4D97-AF65-F5344CB8AC3E}">
-        <p14:creationId xmlns:p14="http://schemas.microsoft.com/office/powerpoint/2010/main" val="2236605356"/>
+        <p14:creationId xmlns:p14="http://schemas.microsoft.com/office/powerpoint/2010/main" val="4150536636"/>
       </p:ext>
     </p:extLst>
   </p:cSld>
@@ -9349,20 +9368,72 @@
         </p:nvSpPr>
         <p:spPr>
           <a:xfrm>
-            <a:off x="838200" y="939800"/>
-            <a:ext cx="10515600" cy="5681133"/>
+            <a:off x="472441" y="939800"/>
+            <a:ext cx="5958399" cy="5681133"/>
           </a:xfrm>
         </p:spPr>
         <p:txBody>
           <a:bodyPr>
-            <a:normAutofit/>
+            <a:normAutofit fontScale="92500"/>
           </a:bodyPr>
           <a:lstStyle/>
           <a:p>
             <a:r>
               <a:rPr lang="en-US" dirty="0"/>
-              <a:t>Preview…</a:t>
-            </a:r>
+              <a:t>A “Fake chart parts” example text that makes no linguistic sense, but demonstrates the remaining </a:t>
+            </a:r>
+            <a:r>
+              <a:rPr lang="en-US" dirty="0" err="1"/>
+              <a:t>ConstituentChartCellPart</a:t>
+            </a:r>
+            <a:r>
+              <a:rPr lang="en-US" dirty="0"/>
+              <a:t> classes looks like this in the sample project.</a:t>
+            </a:r>
+          </a:p>
+          <a:p>
+            <a:r>
+              <a:rPr lang="en-US" dirty="0"/>
+              <a:t>This chart was created with baseline ‘garçon </a:t>
+            </a:r>
+            <a:r>
+              <a:rPr lang="en-US" dirty="0" err="1"/>
+              <a:t>voit</a:t>
+            </a:r>
+            <a:r>
+              <a:rPr lang="en-US" dirty="0"/>
+              <a:t> lion.’, and bringing ‘garçon’ into the Subject column, ‘</a:t>
+            </a:r>
+            <a:r>
+              <a:rPr lang="en-US" dirty="0" err="1"/>
+              <a:t>voit</a:t>
+            </a:r>
+            <a:r>
+              <a:rPr lang="en-US" dirty="0"/>
+              <a:t>’ into the Verb column, and ‘lion’ into the Subject column. Right-click ‘garçon’ and choose Mark as Postposed from &gt; Outer. Right-click ‘garçon’ again and choose Mark </a:t>
+            </a:r>
+            <a:r>
+              <a:rPr lang="en-US" dirty="0" err="1"/>
+              <a:t>TenseAspectMood</a:t>
+            </a:r>
+            <a:r>
+              <a:rPr lang="en-US" dirty="0"/>
+              <a:t> &gt; Timeless &gt; Timeless. Right-click ‘</a:t>
+            </a:r>
+            <a:r>
+              <a:rPr lang="en-US" dirty="0" err="1"/>
+              <a:t>voit</a:t>
+            </a:r>
+            <a:r>
+              <a:rPr lang="en-US" dirty="0"/>
+              <a:t>’ and choose Make a Dependent Clause out of &gt; Next Clause.</a:t>
+            </a:r>
+          </a:p>
+          <a:p>
+            <a:endParaRPr lang="en-US" dirty="0"/>
+          </a:p>
+          <a:p>
+            <a:endParaRPr lang="en-US" dirty="0"/>
           </a:p>
           <a:p>
             <a:endParaRPr lang="en-US" dirty="0"/>
@@ -9371,10 +9442,10 @@
       </p:sp>
       <p:pic>
         <p:nvPicPr>
-          <p:cNvPr id="7" name="Picture 6">
-            <a:extLst>
-              <a:ext uri="{FF2B5EF4-FFF2-40B4-BE49-F238E27FC236}">
-                <a16:creationId xmlns:a16="http://schemas.microsoft.com/office/drawing/2014/main" id="{5141534C-7819-41FF-9982-987C305FCA20}"/>
+          <p:cNvPr id="6" name="Picture 5">
+            <a:extLst>
+              <a:ext uri="{FF2B5EF4-FFF2-40B4-BE49-F238E27FC236}">
+                <a16:creationId xmlns:a16="http://schemas.microsoft.com/office/drawing/2014/main" id="{E9E9439F-2ABB-4CFC-A9B4-44F6FCEF23FB}"/>
               </a:ext>
             </a:extLst>
           </p:cNvPr>
@@ -9389,38 +9460,8 @@
         </p:blipFill>
         <p:spPr>
           <a:xfrm>
-            <a:off x="0" y="2872678"/>
-            <a:ext cx="4187407" cy="2853207"/>
-          </a:xfrm>
-          <a:prstGeom prst="rect">
-            <a:avLst/>
-          </a:prstGeom>
-        </p:spPr>
-      </p:pic>
-      <p:pic>
-        <p:nvPicPr>
-          <p:cNvPr id="2" name="Picture 1">
-            <a:extLst>
-              <a:ext uri="{FF2B5EF4-FFF2-40B4-BE49-F238E27FC236}">
-                <a16:creationId xmlns:a16="http://schemas.microsoft.com/office/drawing/2014/main" id="{7E9992A2-7414-4799-B0F3-7685E089CCD5}"/>
-              </a:ext>
-            </a:extLst>
-          </p:cNvPr>
-          <p:cNvPicPr>
-            <a:picLocks noChangeAspect="1"/>
-          </p:cNvPicPr>
-          <p:nvPr/>
-        </p:nvPicPr>
-        <p:blipFill>
-          <a:blip r:embed="rId3"/>
-          <a:stretch>
-            <a:fillRect/>
-          </a:stretch>
-        </p:blipFill>
-        <p:spPr>
-          <a:xfrm>
-            <a:off x="4522908" y="788654"/>
-            <a:ext cx="6942261" cy="6011746"/>
+            <a:off x="6430840" y="1588331"/>
+            <a:ext cx="5761160" cy="3925528"/>
           </a:xfrm>
           <a:prstGeom prst="rect">
             <a:avLst/>
@@ -9430,7 +9471,7 @@
     </p:spTree>
     <p:extLst>
       <p:ext uri="{BB962C8B-B14F-4D97-AF65-F5344CB8AC3E}">
-        <p14:creationId xmlns:p14="http://schemas.microsoft.com/office/powerpoint/2010/main" val="3489296424"/>
+        <p14:creationId xmlns:p14="http://schemas.microsoft.com/office/powerpoint/2010/main" val="2236605356"/>
       </p:ext>
     </p:extLst>
   </p:cSld>
@@ -9514,140 +9555,82 @@
         </p:spPr>
         <p:txBody>
           <a:bodyPr>
-            <a:normAutofit fontScale="85000" lnSpcReduction="20000"/>
+            <a:normAutofit/>
           </a:bodyPr>
           <a:lstStyle/>
           <a:p>
             <a:r>
               <a:rPr lang="en-US" dirty="0"/>
-              <a:t>(pink) When you right-click a cell and choose “Mark as </a:t>
-            </a:r>
-            <a:r>
-              <a:rPr lang="en-US" dirty="0" err="1"/>
-              <a:t>Preposed</a:t>
-            </a:r>
-            <a:r>
-              <a:rPr lang="en-US" dirty="0"/>
-              <a:t> from” or “Mark as Postposed from”, and choose a target column, a </a:t>
-            </a:r>
-            <a:r>
-              <a:rPr lang="en-US" dirty="0" err="1"/>
-              <a:t>ConstChartMovedTextMarker</a:t>
-            </a:r>
-            <a:r>
-              <a:rPr lang="en-US" dirty="0"/>
-              <a:t> object (e.g., 917e) is placed in the target column. It has a Column property that references the target column </a:t>
-            </a:r>
-            <a:r>
-              <a:rPr lang="en-US" dirty="0" err="1"/>
-              <a:t>CmPossibility</a:t>
-            </a:r>
-            <a:r>
-              <a:rPr lang="en-US" dirty="0"/>
-              <a:t>, and a </a:t>
-            </a:r>
-            <a:r>
-              <a:rPr lang="en-US" dirty="0" err="1"/>
-              <a:t>WordGroup</a:t>
-            </a:r>
-            <a:r>
-              <a:rPr lang="en-US" dirty="0"/>
-              <a:t> property that references the source word group from which you gave the command. FLEx adds two wedges in red in the target cell, and it shows the source cell in red.</a:t>
-            </a:r>
-          </a:p>
-          <a:p>
-            <a:r>
-              <a:rPr lang="en-US" dirty="0"/>
-              <a:t>(yellow) When you right-click a cell and choose one of the last 3 menu items (Mark </a:t>
-            </a:r>
-            <a:r>
-              <a:rPr lang="en-US" dirty="0" err="1"/>
-              <a:t>TesnseAspectMood</a:t>
-            </a:r>
-            <a:r>
-              <a:rPr lang="en-US" dirty="0"/>
-              <a:t>, Mark Pronouns, or Mark Demonstratives) and pick a subitem, a </a:t>
-            </a:r>
-            <a:r>
-              <a:rPr lang="en-US" dirty="0" err="1"/>
-              <a:t>ConstChartTag</a:t>
-            </a:r>
-            <a:r>
-              <a:rPr lang="en-US" dirty="0"/>
-              <a:t> object (e.g. f037) is inserted in the current cell. It has a Column property that references the current column </a:t>
-            </a:r>
-            <a:r>
-              <a:rPr lang="en-US" dirty="0" err="1"/>
-              <a:t>CmPossibility</a:t>
-            </a:r>
-            <a:r>
-              <a:rPr lang="en-US" dirty="0"/>
-              <a:t>, and a Tag property that references the selected </a:t>
-            </a:r>
-            <a:r>
-              <a:rPr lang="en-US" dirty="0" err="1"/>
-              <a:t>CmPossibility</a:t>
-            </a:r>
-            <a:r>
-              <a:rPr lang="en-US" dirty="0"/>
-              <a:t> from the Text Chart Markers list. FLEx adds the </a:t>
-            </a:r>
-            <a:r>
-              <a:rPr lang="en-US" dirty="0" err="1"/>
-              <a:t>CmPossibility</a:t>
-            </a:r>
-            <a:r>
-              <a:rPr lang="en-US" dirty="0"/>
-              <a:t> name in parentheses in a different color (e.g., Timeless).</a:t>
-            </a:r>
-          </a:p>
-          <a:p>
-            <a:r>
-              <a:rPr lang="en-US" dirty="0"/>
-              <a:t>(blue) Clauses are in a sub-row by themselves. When you right-click a cell in one sub-row, you can choose one of the ‘Make a &lt;Type&gt; Clause out of’ menu items, you can choose the next or previous clause, a </a:t>
-            </a:r>
-            <a:r>
-              <a:rPr lang="en-US" dirty="0" err="1"/>
-              <a:t>ConstChartClauseMarker</a:t>
-            </a:r>
-            <a:r>
-              <a:rPr lang="en-US" dirty="0"/>
-              <a:t> object (e.g., 34ea) is inserted in the source cell. It has a Column property referencing a source column </a:t>
-            </a:r>
-            <a:r>
-              <a:rPr lang="en-US" dirty="0" err="1"/>
-              <a:t>CmPossibililty</a:t>
-            </a:r>
-            <a:r>
-              <a:rPr lang="en-US" dirty="0"/>
-              <a:t>, and a </a:t>
-            </a:r>
-            <a:r>
-              <a:rPr lang="en-US" dirty="0" err="1"/>
-              <a:t>DependentClauses</a:t>
-            </a:r>
-            <a:r>
-              <a:rPr lang="en-US" dirty="0"/>
-              <a:t> property that references the </a:t>
-            </a:r>
-            <a:r>
-              <a:rPr lang="en-US" dirty="0" err="1"/>
-              <a:t>ConstChartRow</a:t>
-            </a:r>
-            <a:r>
-              <a:rPr lang="en-US" dirty="0"/>
-              <a:t> that contains the clause. FLEx puts square brackets around the clause, and in the source cell it adds the target row label in square brackets.</a:t>
-            </a:r>
-          </a:p>
-          <a:p>
-            <a:endParaRPr lang="en-US" dirty="0"/>
-          </a:p>
-        </p:txBody>
-      </p:sp>
+              <a:t>Preview…</a:t>
+            </a:r>
+          </a:p>
+          <a:p>
+            <a:endParaRPr lang="en-US" dirty="0"/>
+          </a:p>
+        </p:txBody>
+      </p:sp>
+      <p:pic>
+        <p:nvPicPr>
+          <p:cNvPr id="7" name="Picture 6">
+            <a:extLst>
+              <a:ext uri="{FF2B5EF4-FFF2-40B4-BE49-F238E27FC236}">
+                <a16:creationId xmlns:a16="http://schemas.microsoft.com/office/drawing/2014/main" id="{5141534C-7819-41FF-9982-987C305FCA20}"/>
+              </a:ext>
+            </a:extLst>
+          </p:cNvPr>
+          <p:cNvPicPr/>
+          <p:nvPr/>
+        </p:nvPicPr>
+        <p:blipFill>
+          <a:blip r:embed="rId2"/>
+          <a:stretch>
+            <a:fillRect/>
+          </a:stretch>
+        </p:blipFill>
+        <p:spPr>
+          <a:xfrm>
+            <a:off x="0" y="2872678"/>
+            <a:ext cx="4187407" cy="2853207"/>
+          </a:xfrm>
+          <a:prstGeom prst="rect">
+            <a:avLst/>
+          </a:prstGeom>
+        </p:spPr>
+      </p:pic>
+      <p:pic>
+        <p:nvPicPr>
+          <p:cNvPr id="2" name="Picture 1">
+            <a:extLst>
+              <a:ext uri="{FF2B5EF4-FFF2-40B4-BE49-F238E27FC236}">
+                <a16:creationId xmlns:a16="http://schemas.microsoft.com/office/drawing/2014/main" id="{7E9992A2-7414-4799-B0F3-7685E089CCD5}"/>
+              </a:ext>
+            </a:extLst>
+          </p:cNvPr>
+          <p:cNvPicPr>
+            <a:picLocks noChangeAspect="1"/>
+          </p:cNvPicPr>
+          <p:nvPr/>
+        </p:nvPicPr>
+        <p:blipFill>
+          <a:blip r:embed="rId3"/>
+          <a:stretch>
+            <a:fillRect/>
+          </a:stretch>
+        </p:blipFill>
+        <p:spPr>
+          <a:xfrm>
+            <a:off x="4522908" y="788654"/>
+            <a:ext cx="6942261" cy="6011746"/>
+          </a:xfrm>
+          <a:prstGeom prst="rect">
+            <a:avLst/>
+          </a:prstGeom>
+        </p:spPr>
+      </p:pic>
     </p:spTree>
     <p:extLst>
       <p:ext uri="{BB962C8B-B14F-4D97-AF65-F5344CB8AC3E}">
-        <p14:creationId xmlns:p14="http://schemas.microsoft.com/office/powerpoint/2010/main" val="1941723533"/>
+        <p14:creationId xmlns:p14="http://schemas.microsoft.com/office/powerpoint/2010/main" val="3489296424"/>
       </p:ext>
     </p:extLst>
   </p:cSld>
@@ -9697,107 +9680,264 @@
           </a:xfrm>
         </p:spPr>
         <p:txBody>
+          <a:bodyPr/>
+          <a:lstStyle/>
+          <a:p>
+            <a:r>
+              <a:rPr lang="en-US" dirty="0"/>
+              <a:t>Interlinear: Discourse charting continued</a:t>
+            </a:r>
+          </a:p>
+        </p:txBody>
+      </p:sp>
+      <p:sp>
+        <p:nvSpPr>
+          <p:cNvPr id="5" name="Content Placeholder 2">
+            <a:extLst>
+              <a:ext uri="{FF2B5EF4-FFF2-40B4-BE49-F238E27FC236}">
+                <a16:creationId xmlns:a16="http://schemas.microsoft.com/office/drawing/2014/main" id="{54980C95-9B20-461C-8447-ECB43E44F22E}"/>
+              </a:ext>
+            </a:extLst>
+          </p:cNvPr>
+          <p:cNvSpPr>
+            <a:spLocks noGrp="1"/>
+          </p:cNvSpPr>
+          <p:nvPr>
+            <p:ph idx="1"/>
+          </p:nvPr>
+        </p:nvSpPr>
+        <p:spPr>
+          <a:xfrm>
+            <a:off x="315684" y="939800"/>
+            <a:ext cx="8327571" cy="5681133"/>
+          </a:xfrm>
+        </p:spPr>
+        <p:txBody>
           <a:bodyPr>
-            <a:normAutofit/>
+            <a:normAutofit fontScale="70000" lnSpcReduction="20000"/>
           </a:bodyPr>
           <a:lstStyle/>
           <a:p>
             <a:r>
               <a:rPr lang="en-US" dirty="0"/>
-              <a:t>Interlinear: Scripture</a:t>
-            </a:r>
-          </a:p>
-        </p:txBody>
-      </p:sp>
-      <p:sp>
-        <p:nvSpPr>
-          <p:cNvPr id="5" name="Content Placeholder 2">
-            <a:extLst>
-              <a:ext uri="{FF2B5EF4-FFF2-40B4-BE49-F238E27FC236}">
-                <a16:creationId xmlns:a16="http://schemas.microsoft.com/office/drawing/2014/main" id="{54980C95-9B20-461C-8447-ECB43E44F22E}"/>
-              </a:ext>
-            </a:extLst>
-          </p:cNvPr>
-          <p:cNvSpPr>
-            <a:spLocks noGrp="1"/>
-          </p:cNvSpPr>
-          <p:nvPr>
-            <p:ph idx="1"/>
-          </p:nvPr>
-        </p:nvSpPr>
-        <p:spPr>
-          <a:xfrm>
-            <a:off x="838200" y="939800"/>
-            <a:ext cx="10515600" cy="5681133"/>
-          </a:xfrm>
-        </p:spPr>
-        <p:txBody>
-          <a:bodyPr>
-            <a:normAutofit/>
-          </a:bodyPr>
-          <a:lstStyle/>
-          <a:p>
-            <a:r>
-              <a:rPr lang="en-US" dirty="0"/>
-              <a:t>FieldWorks used to have a Translation Editor program for working on Scripture. Development on TE was stopped when we chose to help develop and work with </a:t>
-            </a:r>
-            <a:r>
-              <a:rPr lang="en-US" dirty="0" err="1"/>
-              <a:t>Paratext</a:t>
-            </a:r>
-            <a:r>
-              <a:rPr lang="en-US" dirty="0"/>
-              <a:t> for Scripture editing.</a:t>
-            </a:r>
-          </a:p>
-          <a:p>
-            <a:r>
-              <a:rPr lang="en-US" dirty="0"/>
-              <a:t>The last version of FieldWorks with TE was FW8.3.12.</a:t>
-            </a:r>
-          </a:p>
-          <a:p>
-            <a:r>
-              <a:rPr lang="en-US" dirty="0"/>
-              <a:t>Although FieldWorks no longer allows editing scripture text, when a </a:t>
-            </a:r>
-            <a:r>
-              <a:rPr lang="en-US" dirty="0" err="1"/>
-              <a:t>Paratext</a:t>
-            </a:r>
-            <a:r>
-              <a:rPr lang="en-US" dirty="0"/>
-              <a:t> project is associated with a FLEx project, books from </a:t>
-            </a:r>
-            <a:r>
-              <a:rPr lang="en-US" dirty="0" err="1"/>
-              <a:t>Paratext</a:t>
-            </a:r>
-            <a:r>
-              <a:rPr lang="en-US" dirty="0"/>
-              <a:t> can be imported into FLEx. The data shows up as interlinear texts.</a:t>
-            </a:r>
-          </a:p>
-          <a:p>
-            <a:r>
-              <a:rPr lang="en-US" dirty="0"/>
-              <a:t>Interlinear analysis can be done on imported scripture, but FLEx does not provide any capability for editing or deleting the imported scripture. If you need to remove scripture from a project, you can use LCM Browser to delete the </a:t>
-            </a:r>
-            <a:r>
-              <a:rPr lang="en-US" dirty="0" err="1"/>
-              <a:t>ScrBook</a:t>
-            </a:r>
-            <a:r>
-              <a:rPr lang="en-US" dirty="0"/>
-              <a:t> objects.</a:t>
-            </a:r>
-          </a:p>
-        </p:txBody>
-      </p:sp>
+              <a:t>(pink) When you right-click a cell and choose “Mark as </a:t>
+            </a:r>
+            <a:r>
+              <a:rPr lang="en-US" dirty="0" err="1"/>
+              <a:t>Preposed</a:t>
+            </a:r>
+            <a:r>
+              <a:rPr lang="en-US" dirty="0"/>
+              <a:t> from” or “Mark as Postposed from”, and choose a target column, a </a:t>
+            </a:r>
+            <a:r>
+              <a:rPr lang="en-US" dirty="0" err="1"/>
+              <a:t>ConstChartMovedTextMarker</a:t>
+            </a:r>
+            <a:r>
+              <a:rPr lang="en-US" dirty="0"/>
+              <a:t> object (e.g., 917e) is placed in the target column. It has a Column property that references the target column </a:t>
+            </a:r>
+            <a:r>
+              <a:rPr lang="en-US" dirty="0" err="1"/>
+              <a:t>CmPossibility</a:t>
+            </a:r>
+            <a:r>
+              <a:rPr lang="en-US" dirty="0"/>
+              <a:t>, and a </a:t>
+            </a:r>
+            <a:r>
+              <a:rPr lang="en-US" dirty="0" err="1"/>
+              <a:t>WordGroup</a:t>
+            </a:r>
+            <a:r>
+              <a:rPr lang="en-US" dirty="0"/>
+              <a:t> property that references the source word group from which you gave the command. FLEx adds two wedges in red in the target cell, and it shows the source cell in red.</a:t>
+            </a:r>
+          </a:p>
+          <a:p>
+            <a:r>
+              <a:rPr lang="en-US" dirty="0"/>
+              <a:t>(yellow) When you right-click a cell and choose one of the last 3 menu items (Mark </a:t>
+            </a:r>
+            <a:r>
+              <a:rPr lang="en-US" dirty="0" err="1"/>
+              <a:t>TesnseAspectMood</a:t>
+            </a:r>
+            <a:r>
+              <a:rPr lang="en-US" dirty="0"/>
+              <a:t>, Mark Pronouns, or Mark Demonstratives) and pick a subitem, a </a:t>
+            </a:r>
+            <a:r>
+              <a:rPr lang="en-US" dirty="0" err="1"/>
+              <a:t>ConstChartTag</a:t>
+            </a:r>
+            <a:r>
+              <a:rPr lang="en-US" dirty="0"/>
+              <a:t> object (e.g. f037) is inserted in the current cell. It has a Column property that references the current column </a:t>
+            </a:r>
+            <a:r>
+              <a:rPr lang="en-US" dirty="0" err="1"/>
+              <a:t>CmPossibility</a:t>
+            </a:r>
+            <a:r>
+              <a:rPr lang="en-US" dirty="0"/>
+              <a:t>, and a Tag property that references the selected </a:t>
+            </a:r>
+            <a:r>
+              <a:rPr lang="en-US" dirty="0" err="1"/>
+              <a:t>CmPossibility</a:t>
+            </a:r>
+            <a:r>
+              <a:rPr lang="en-US" dirty="0"/>
+              <a:t> from the Text Chart Markers list. FLEx adds the </a:t>
+            </a:r>
+            <a:r>
+              <a:rPr lang="en-US" dirty="0" err="1"/>
+              <a:t>CmPossibility</a:t>
+            </a:r>
+            <a:r>
+              <a:rPr lang="en-US" dirty="0"/>
+              <a:t> name in parentheses in a different color (e.g., Timeless).</a:t>
+            </a:r>
+          </a:p>
+          <a:p>
+            <a:r>
+              <a:rPr lang="en-US" dirty="0"/>
+              <a:t>(blue) Clauses are in a sub-row by themselves. When you right-click a cell in one sub-row, you can choose one of the ‘Make a &lt;Type&gt; Clause out of’ menu items, you can choose the next or previous clause, a </a:t>
+            </a:r>
+            <a:r>
+              <a:rPr lang="en-US" dirty="0" err="1"/>
+              <a:t>ConstChartClauseMarker</a:t>
+            </a:r>
+            <a:r>
+              <a:rPr lang="en-US" dirty="0"/>
+              <a:t> object (e.g., 34ea) is inserted in the source cell. It has a Column property referencing a source column </a:t>
+            </a:r>
+            <a:r>
+              <a:rPr lang="en-US" dirty="0" err="1"/>
+              <a:t>CmPossibililty</a:t>
+            </a:r>
+            <a:r>
+              <a:rPr lang="en-US" dirty="0"/>
+              <a:t>, and a </a:t>
+            </a:r>
+            <a:r>
+              <a:rPr lang="en-US" dirty="0" err="1"/>
+              <a:t>DependentClauses</a:t>
+            </a:r>
+            <a:r>
+              <a:rPr lang="en-US" dirty="0"/>
+              <a:t> property that references the </a:t>
+            </a:r>
+            <a:r>
+              <a:rPr lang="en-US" dirty="0" err="1"/>
+              <a:t>ConstChartRow</a:t>
+            </a:r>
+            <a:r>
+              <a:rPr lang="en-US" dirty="0"/>
+              <a:t> that contains the clause. FLEx puts square brackets around the clause, and in the source cell it adds the target row label in square brackets.</a:t>
+            </a:r>
+          </a:p>
+          <a:p>
+            <a:endParaRPr lang="en-US" dirty="0"/>
+          </a:p>
+        </p:txBody>
+      </p:sp>
+      <p:pic>
+        <p:nvPicPr>
+          <p:cNvPr id="2" name="Picture 1">
+            <a:extLst>
+              <a:ext uri="{FF2B5EF4-FFF2-40B4-BE49-F238E27FC236}">
+                <a16:creationId xmlns:a16="http://schemas.microsoft.com/office/drawing/2014/main" id="{E6DBE609-F9FA-4DDE-8A98-98EA7C0D617B}"/>
+              </a:ext>
+            </a:extLst>
+          </p:cNvPr>
+          <p:cNvPicPr>
+            <a:picLocks noChangeAspect="1"/>
+          </p:cNvPicPr>
+          <p:nvPr/>
+        </p:nvPicPr>
+        <p:blipFill>
+          <a:blip r:embed="rId2"/>
+          <a:stretch>
+            <a:fillRect/>
+          </a:stretch>
+        </p:blipFill>
+        <p:spPr>
+          <a:xfrm>
+            <a:off x="8789180" y="939800"/>
+            <a:ext cx="2993574" cy="1323919"/>
+          </a:xfrm>
+          <a:prstGeom prst="rect">
+            <a:avLst/>
+          </a:prstGeom>
+        </p:spPr>
+      </p:pic>
+      <p:pic>
+        <p:nvPicPr>
+          <p:cNvPr id="3" name="Picture 2">
+            <a:extLst>
+              <a:ext uri="{FF2B5EF4-FFF2-40B4-BE49-F238E27FC236}">
+                <a16:creationId xmlns:a16="http://schemas.microsoft.com/office/drawing/2014/main" id="{3F381D50-86E5-4D5E-ACAE-991205FBBDF4}"/>
+              </a:ext>
+            </a:extLst>
+          </p:cNvPr>
+          <p:cNvPicPr>
+            <a:picLocks noChangeAspect="1"/>
+          </p:cNvPicPr>
+          <p:nvPr/>
+        </p:nvPicPr>
+        <p:blipFill>
+          <a:blip r:embed="rId3"/>
+          <a:stretch>
+            <a:fillRect/>
+          </a:stretch>
+        </p:blipFill>
+        <p:spPr>
+          <a:xfrm>
+            <a:off x="8643255" y="2517362"/>
+            <a:ext cx="3478269" cy="1099264"/>
+          </a:xfrm>
+          <a:prstGeom prst="rect">
+            <a:avLst/>
+          </a:prstGeom>
+        </p:spPr>
+      </p:pic>
+      <p:pic>
+        <p:nvPicPr>
+          <p:cNvPr id="6" name="Picture 5">
+            <a:extLst>
+              <a:ext uri="{FF2B5EF4-FFF2-40B4-BE49-F238E27FC236}">
+                <a16:creationId xmlns:a16="http://schemas.microsoft.com/office/drawing/2014/main" id="{DB065896-95EE-41D3-B470-EAA7ECDEAFE3}"/>
+              </a:ext>
+            </a:extLst>
+          </p:cNvPr>
+          <p:cNvPicPr>
+            <a:picLocks noChangeAspect="1"/>
+          </p:cNvPicPr>
+          <p:nvPr/>
+        </p:nvPicPr>
+        <p:blipFill>
+          <a:blip r:embed="rId4"/>
+          <a:stretch>
+            <a:fillRect/>
+          </a:stretch>
+        </p:blipFill>
+        <p:spPr>
+          <a:xfrm>
+            <a:off x="8815888" y="4414773"/>
+            <a:ext cx="3305636" cy="924054"/>
+          </a:xfrm>
+          <a:prstGeom prst="rect">
+            <a:avLst/>
+          </a:prstGeom>
+        </p:spPr>
+      </p:pic>
     </p:spTree>
     <p:extLst>
       <p:ext uri="{BB962C8B-B14F-4D97-AF65-F5344CB8AC3E}">
-        <p14:creationId xmlns:p14="http://schemas.microsoft.com/office/powerpoint/2010/main" val="958768023"/>
+        <p14:creationId xmlns:p14="http://schemas.microsoft.com/office/powerpoint/2010/main" val="1941723533"/>
       </p:ext>
     </p:extLst>
   </p:cSld>
@@ -9824,34 +9964,6 @@
           <a:chExt cx="0" cy="0"/>
         </a:xfrm>
       </p:grpSpPr>
-      <p:pic>
-        <p:nvPicPr>
-          <p:cNvPr id="6" name="Picture 5">
-            <a:extLst>
-              <a:ext uri="{FF2B5EF4-FFF2-40B4-BE49-F238E27FC236}">
-                <a16:creationId xmlns:a16="http://schemas.microsoft.com/office/drawing/2014/main" id="{2B53E3CE-9807-479A-B63A-193E5A4BC6AA}"/>
-              </a:ext>
-            </a:extLst>
-          </p:cNvPr>
-          <p:cNvPicPr/>
-          <p:nvPr/>
-        </p:nvPicPr>
-        <p:blipFill>
-          <a:blip r:embed="rId2"/>
-          <a:stretch>
-            <a:fillRect/>
-          </a:stretch>
-        </p:blipFill>
-        <p:spPr>
-          <a:xfrm>
-            <a:off x="3126007" y="1299934"/>
-            <a:ext cx="7029091" cy="5421541"/>
-          </a:xfrm>
-          <a:prstGeom prst="rect">
-            <a:avLst/>
-          </a:prstGeom>
-        </p:spPr>
-      </p:pic>
       <p:sp>
         <p:nvSpPr>
           <p:cNvPr id="4" name="Title 1">
@@ -9882,7 +9994,7 @@
           <a:p>
             <a:r>
               <a:rPr lang="en-US" dirty="0"/>
-              <a:t>Interlinear: Scripture continued</a:t>
+              <a:t>Interlinear: Scripture</a:t>
             </a:r>
           </a:p>
         </p:txBody>
@@ -9917,7 +10029,7 @@
           <a:p>
             <a:r>
               <a:rPr lang="en-US" dirty="0"/>
-              <a:t>This is how a section of Titus from the LS1910 French public domain Bible looks in </a:t>
+              <a:t>FieldWorks used to have a Translation Editor program for working on Scripture. Development on TE was stopped when we chose to help develop and work with </a:t>
             </a:r>
             <a:r>
               <a:rPr lang="en-US" dirty="0" err="1"/>
@@ -9925,7 +10037,49 @@
             </a:r>
             <a:r>
               <a:rPr lang="en-US" dirty="0"/>
-              <a:t>.</a:t>
+              <a:t> for Scripture editing.</a:t>
+            </a:r>
+          </a:p>
+          <a:p>
+            <a:r>
+              <a:rPr lang="en-US" dirty="0"/>
+              <a:t>The last version of FieldWorks with TE was FW8.3.12.</a:t>
+            </a:r>
+          </a:p>
+          <a:p>
+            <a:r>
+              <a:rPr lang="en-US" dirty="0"/>
+              <a:t>Although FieldWorks no longer allows editing scripture text, when a </a:t>
+            </a:r>
+            <a:r>
+              <a:rPr lang="en-US" dirty="0" err="1"/>
+              <a:t>Paratext</a:t>
+            </a:r>
+            <a:r>
+              <a:rPr lang="en-US" dirty="0"/>
+              <a:t> project is associated with a FLEx project, books from </a:t>
+            </a:r>
+            <a:r>
+              <a:rPr lang="en-US" dirty="0" err="1"/>
+              <a:t>Paratext</a:t>
+            </a:r>
+            <a:r>
+              <a:rPr lang="en-US" dirty="0"/>
+              <a:t> can be imported into FLEx. The data shows up as interlinear texts.</a:t>
+            </a:r>
+          </a:p>
+          <a:p>
+            <a:r>
+              <a:rPr lang="en-US" dirty="0"/>
+              <a:t>Interlinear analysis can be done on imported scripture, but FLEx does not provide any capability for editing or deleting the imported scripture. If you need to remove scripture from a project, you can use LCM Browser to delete the </a:t>
+            </a:r>
+            <a:r>
+              <a:rPr lang="en-US" dirty="0" err="1"/>
+              <a:t>ScrBook</a:t>
+            </a:r>
+            <a:r>
+              <a:rPr lang="en-US" dirty="0"/>
+              <a:t> objects.</a:t>
             </a:r>
           </a:p>
         </p:txBody>
@@ -9933,7 +10087,7 @@
     </p:spTree>
     <p:extLst>
       <p:ext uri="{BB962C8B-B14F-4D97-AF65-F5344CB8AC3E}">
-        <p14:creationId xmlns:p14="http://schemas.microsoft.com/office/powerpoint/2010/main" val="4224573175"/>
+        <p14:creationId xmlns:p14="http://schemas.microsoft.com/office/powerpoint/2010/main" val="958768023"/>
       </p:ext>
     </p:extLst>
   </p:cSld>
@@ -10017,13 +10171,13 @@
         </p:spPr>
         <p:txBody>
           <a:bodyPr>
-            <a:normAutofit fontScale="85000" lnSpcReduction="20000"/>
+            <a:normAutofit fontScale="77500" lnSpcReduction="20000"/>
           </a:bodyPr>
           <a:lstStyle/>
           <a:p>
             <a:r>
               <a:rPr lang="en-US" dirty="0"/>
-              <a:t>In the Inflection Features tool, add a new Complex Feature with check marks in person and number sections under subject agreement.</a:t>
+              <a:t>The first step to do this is adding features. In the Inflection Features tool, add a new Complex Feature with check marks in person and number sections under subject agreement.</a:t>
             </a:r>
             <a:br>
               <a:rPr lang="en-US" dirty="0"/>
@@ -10170,82 +10324,12 @@
           <a:chExt cx="0" cy="0"/>
         </a:xfrm>
       </p:grpSpPr>
-      <p:sp>
-        <p:nvSpPr>
-          <p:cNvPr id="4" name="Title 1">
-            <a:extLst>
-              <a:ext uri="{FF2B5EF4-FFF2-40B4-BE49-F238E27FC236}">
-                <a16:creationId xmlns:a16="http://schemas.microsoft.com/office/drawing/2014/main" id="{D020DABE-C917-4086-9913-77F3DFBC8176}"/>
-              </a:ext>
-            </a:extLst>
-          </p:cNvPr>
-          <p:cNvSpPr>
-            <a:spLocks noGrp="1"/>
-          </p:cNvSpPr>
-          <p:nvPr>
-            <p:ph type="title"/>
-          </p:nvPr>
-        </p:nvSpPr>
-        <p:spPr>
-          <a:xfrm>
-            <a:off x="838200" y="136525"/>
-            <a:ext cx="10515600" cy="803275"/>
-          </a:xfrm>
-        </p:spPr>
-        <p:txBody>
-          <a:bodyPr>
-            <a:normAutofit/>
-          </a:bodyPr>
-          <a:lstStyle/>
-          <a:p>
-            <a:r>
-              <a:rPr lang="en-US" dirty="0"/>
-              <a:t>Interlinear: Scripture continued</a:t>
-            </a:r>
-          </a:p>
-        </p:txBody>
-      </p:sp>
-      <p:sp>
-        <p:nvSpPr>
-          <p:cNvPr id="5" name="Content Placeholder 2">
-            <a:extLst>
-              <a:ext uri="{FF2B5EF4-FFF2-40B4-BE49-F238E27FC236}">
-                <a16:creationId xmlns:a16="http://schemas.microsoft.com/office/drawing/2014/main" id="{54980C95-9B20-461C-8447-ECB43E44F22E}"/>
-              </a:ext>
-            </a:extLst>
-          </p:cNvPr>
-          <p:cNvSpPr>
-            <a:spLocks noGrp="1"/>
-          </p:cNvSpPr>
-          <p:nvPr>
-            <p:ph idx="1"/>
-          </p:nvPr>
-        </p:nvSpPr>
-        <p:spPr>
-          <a:xfrm>
-            <a:off x="838200" y="939800"/>
-            <a:ext cx="10515600" cy="5681133"/>
-          </a:xfrm>
-        </p:spPr>
-        <p:txBody>
-          <a:bodyPr>
-            <a:normAutofit/>
-          </a:bodyPr>
-          <a:lstStyle/>
-          <a:p>
-            <a:r>
-              <a:rPr lang="en-US" dirty="0"/>
-              <a:t>This section shows up in FLEx as 4 Texts</a:t>
-            </a:r>
-          </a:p>
-        </p:txBody>
-      </p:sp>
       <p:pic>
         <p:nvPicPr>
-          <p:cNvPr id="9" name="Picture 8">
-            <a:extLst>
-              <a:ext uri="{FF2B5EF4-FFF2-40B4-BE49-F238E27FC236}">
-                <a16:creationId xmlns:a16="http://schemas.microsoft.com/office/drawing/2014/main" id="{ABCF1347-2700-4C04-9D87-D2F21FE3EAC7}"/>
+          <p:cNvPr id="6" name="Picture 5">
+            <a:extLst>
+              <a:ext uri="{FF2B5EF4-FFF2-40B4-BE49-F238E27FC236}">
+                <a16:creationId xmlns:a16="http://schemas.microsoft.com/office/drawing/2014/main" id="{2B53E3CE-9807-479A-B63A-193E5A4BC6AA}"/>
               </a:ext>
             </a:extLst>
           </p:cNvPr>
@@ -10260,104 +10344,96 @@
         </p:blipFill>
         <p:spPr>
           <a:xfrm>
-            <a:off x="5655211" y="1377020"/>
-            <a:ext cx="5401085" cy="3426313"/>
+            <a:off x="3126007" y="1299934"/>
+            <a:ext cx="7029091" cy="5421541"/>
           </a:xfrm>
           <a:prstGeom prst="rect">
             <a:avLst/>
           </a:prstGeom>
         </p:spPr>
       </p:pic>
-      <p:pic>
-        <p:nvPicPr>
-          <p:cNvPr id="10" name="Picture 9">
-            <a:extLst>
-              <a:ext uri="{FF2B5EF4-FFF2-40B4-BE49-F238E27FC236}">
-                <a16:creationId xmlns:a16="http://schemas.microsoft.com/office/drawing/2014/main" id="{6EE01C1B-598D-4832-99CA-08AF72FBE1D6}"/>
-              </a:ext>
-            </a:extLst>
-          </p:cNvPr>
-          <p:cNvPicPr/>
-          <p:nvPr/>
-        </p:nvPicPr>
-        <p:blipFill>
-          <a:blip r:embed="rId3"/>
-          <a:stretch>
-            <a:fillRect/>
-          </a:stretch>
-        </p:blipFill>
-        <p:spPr>
-          <a:xfrm>
-            <a:off x="853440" y="4371046"/>
-            <a:ext cx="3711474" cy="2126079"/>
-          </a:xfrm>
-          <a:prstGeom prst="rect">
-            <a:avLst/>
-          </a:prstGeom>
-        </p:spPr>
-      </p:pic>
-      <p:pic>
-        <p:nvPicPr>
-          <p:cNvPr id="11" name="Picture 10">
-            <a:extLst>
-              <a:ext uri="{FF2B5EF4-FFF2-40B4-BE49-F238E27FC236}">
-                <a16:creationId xmlns:a16="http://schemas.microsoft.com/office/drawing/2014/main" id="{BA70266A-BE73-48B1-97E5-C06E67A7DF97}"/>
-              </a:ext>
-            </a:extLst>
-          </p:cNvPr>
-          <p:cNvPicPr/>
-          <p:nvPr/>
-        </p:nvPicPr>
-        <p:blipFill>
-          <a:blip r:embed="rId4"/>
-          <a:stretch>
-            <a:fillRect/>
-          </a:stretch>
-        </p:blipFill>
-        <p:spPr>
-          <a:xfrm>
-            <a:off x="5589031" y="5050950"/>
-            <a:ext cx="4076113" cy="1569983"/>
-          </a:xfrm>
-          <a:prstGeom prst="rect">
-            <a:avLst/>
-          </a:prstGeom>
-        </p:spPr>
-      </p:pic>
-      <p:pic>
-        <p:nvPicPr>
-          <p:cNvPr id="2" name="Picture 1">
-            <a:extLst>
-              <a:ext uri="{FF2B5EF4-FFF2-40B4-BE49-F238E27FC236}">
-                <a16:creationId xmlns:a16="http://schemas.microsoft.com/office/drawing/2014/main" id="{6F2BF55F-32DA-47CD-8411-9469F84ECE97}"/>
-              </a:ext>
-            </a:extLst>
-          </p:cNvPr>
-          <p:cNvPicPr>
-            <a:picLocks noChangeAspect="1"/>
-          </p:cNvPicPr>
-          <p:nvPr/>
-        </p:nvPicPr>
-        <p:blipFill>
-          <a:blip r:embed="rId5"/>
-          <a:stretch>
-            <a:fillRect/>
-          </a:stretch>
-        </p:blipFill>
-        <p:spPr>
-          <a:xfrm>
-            <a:off x="944909" y="1430207"/>
-            <a:ext cx="4183422" cy="2543080"/>
-          </a:xfrm>
-          <a:prstGeom prst="rect">
-            <a:avLst/>
-          </a:prstGeom>
-        </p:spPr>
-      </p:pic>
+      <p:sp>
+        <p:nvSpPr>
+          <p:cNvPr id="4" name="Title 1">
+            <a:extLst>
+              <a:ext uri="{FF2B5EF4-FFF2-40B4-BE49-F238E27FC236}">
+                <a16:creationId xmlns:a16="http://schemas.microsoft.com/office/drawing/2014/main" id="{D020DABE-C917-4086-9913-77F3DFBC8176}"/>
+              </a:ext>
+            </a:extLst>
+          </p:cNvPr>
+          <p:cNvSpPr>
+            <a:spLocks noGrp="1"/>
+          </p:cNvSpPr>
+          <p:nvPr>
+            <p:ph type="title"/>
+          </p:nvPr>
+        </p:nvSpPr>
+        <p:spPr>
+          <a:xfrm>
+            <a:off x="838200" y="136525"/>
+            <a:ext cx="10515600" cy="803275"/>
+          </a:xfrm>
+        </p:spPr>
+        <p:txBody>
+          <a:bodyPr>
+            <a:normAutofit/>
+          </a:bodyPr>
+          <a:lstStyle/>
+          <a:p>
+            <a:r>
+              <a:rPr lang="en-US" dirty="0"/>
+              <a:t>Interlinear: Scripture continued</a:t>
+            </a:r>
+          </a:p>
+        </p:txBody>
+      </p:sp>
+      <p:sp>
+        <p:nvSpPr>
+          <p:cNvPr id="5" name="Content Placeholder 2">
+            <a:extLst>
+              <a:ext uri="{FF2B5EF4-FFF2-40B4-BE49-F238E27FC236}">
+                <a16:creationId xmlns:a16="http://schemas.microsoft.com/office/drawing/2014/main" id="{54980C95-9B20-461C-8447-ECB43E44F22E}"/>
+              </a:ext>
+            </a:extLst>
+          </p:cNvPr>
+          <p:cNvSpPr>
+            <a:spLocks noGrp="1"/>
+          </p:cNvSpPr>
+          <p:nvPr>
+            <p:ph idx="1"/>
+          </p:nvPr>
+        </p:nvSpPr>
+        <p:spPr>
+          <a:xfrm>
+            <a:off x="838200" y="939800"/>
+            <a:ext cx="10515600" cy="5681133"/>
+          </a:xfrm>
+        </p:spPr>
+        <p:txBody>
+          <a:bodyPr>
+            <a:normAutofit/>
+          </a:bodyPr>
+          <a:lstStyle/>
+          <a:p>
+            <a:r>
+              <a:rPr lang="en-US" dirty="0"/>
+              <a:t>This is how a section of Titus from the LS1910 French public domain Bible looks in </a:t>
+            </a:r>
+            <a:r>
+              <a:rPr lang="en-US" dirty="0" err="1"/>
+              <a:t>Paratext</a:t>
+            </a:r>
+            <a:r>
+              <a:rPr lang="en-US" dirty="0"/>
+              <a:t>.</a:t>
+            </a:r>
+          </a:p>
+        </p:txBody>
+      </p:sp>
     </p:spTree>
     <p:extLst>
       <p:ext uri="{BB962C8B-B14F-4D97-AF65-F5344CB8AC3E}">
-        <p14:creationId xmlns:p14="http://schemas.microsoft.com/office/powerpoint/2010/main" val="718289954"/>
+        <p14:creationId xmlns:p14="http://schemas.microsoft.com/office/powerpoint/2010/main" val="4224573175"/>
       </p:ext>
     </p:extLst>
   </p:cSld>
@@ -10443,236 +10519,135 @@
         </p:spPr>
         <p:txBody>
           <a:bodyPr>
-            <a:normAutofit fontScale="92500" lnSpcReduction="20000"/>
+            <a:normAutofit/>
           </a:bodyPr>
           <a:lstStyle/>
           <a:p>
             <a:r>
-              <a:rPr lang="en-US" dirty="0" err="1"/>
-              <a:t>LangProject</a:t>
-            </a:r>
-            <a:r>
-              <a:rPr lang="en-US" dirty="0"/>
-              <a:t> has a </a:t>
-            </a:r>
-            <a:r>
-              <a:rPr lang="en-US" dirty="0" err="1"/>
-              <a:t>TranslatedScriptures</a:t>
-            </a:r>
-            <a:r>
-              <a:rPr lang="en-US" dirty="0"/>
-              <a:t> atomic owning attribute that owns a Scripture object. Scripture has various properties that are no longer used, but it has an owning sequence of </a:t>
-            </a:r>
-            <a:r>
-              <a:rPr lang="en-US" dirty="0" err="1"/>
-              <a:t>ScrBooks</a:t>
-            </a:r>
-            <a:r>
-              <a:rPr lang="en-US" dirty="0"/>
-              <a:t> representing books of Scripture, each book in a </a:t>
-            </a:r>
-            <a:r>
-              <a:rPr lang="en-US" dirty="0" err="1"/>
-              <a:t>ScrBook</a:t>
-            </a:r>
-            <a:r>
-              <a:rPr lang="en-US" dirty="0"/>
-              <a:t> object.</a:t>
-            </a:r>
-          </a:p>
-          <a:p>
-            <a:r>
-              <a:rPr lang="en-US" dirty="0"/>
-              <a:t>Scripture uses the FLEx structured text classes starting with </a:t>
-            </a:r>
-            <a:r>
-              <a:rPr lang="en-US" dirty="0" err="1"/>
-              <a:t>StText</a:t>
-            </a:r>
-            <a:r>
-              <a:rPr lang="en-US" dirty="0"/>
-              <a:t>, but instead of </a:t>
-            </a:r>
-            <a:r>
-              <a:rPr lang="en-US" dirty="0" err="1"/>
-              <a:t>StText</a:t>
-            </a:r>
-            <a:r>
-              <a:rPr lang="en-US" dirty="0"/>
-              <a:t> owning </a:t>
-            </a:r>
-            <a:r>
-              <a:rPr lang="en-US" dirty="0" err="1"/>
-              <a:t>StTxtPara</a:t>
-            </a:r>
-            <a:r>
-              <a:rPr lang="en-US" dirty="0"/>
-              <a:t> objects, Scripture uses </a:t>
-            </a:r>
-            <a:r>
-              <a:rPr lang="en-US" dirty="0" err="1"/>
-              <a:t>ScrTxtPara</a:t>
-            </a:r>
-            <a:r>
-              <a:rPr lang="en-US" dirty="0"/>
-              <a:t> objects. In the Interlinear Texts tool, FLEx shows </a:t>
-            </a:r>
-            <a:r>
-              <a:rPr lang="en-US" dirty="0" err="1"/>
-              <a:t>StText</a:t>
-            </a:r>
-            <a:r>
-              <a:rPr lang="en-US" dirty="0"/>
-              <a:t> objects and </a:t>
-            </a:r>
-            <a:r>
-              <a:rPr lang="en-US" dirty="0" err="1"/>
-              <a:t>ScrFootnote</a:t>
-            </a:r>
-            <a:r>
-              <a:rPr lang="en-US" dirty="0"/>
-              <a:t> objects as interlinear texts. When showing </a:t>
-            </a:r>
-            <a:r>
-              <a:rPr lang="en-US" dirty="0" err="1"/>
-              <a:t>StText</a:t>
-            </a:r>
-            <a:r>
-              <a:rPr lang="en-US" dirty="0"/>
-              <a:t>, in the Interlinear Texts it </a:t>
-            </a:r>
-          </a:p>
-          <a:p>
-            <a:pPr lvl="1"/>
-            <a:r>
-              <a:rPr lang="en-US" dirty="0"/>
-              <a:t>appends (Title) for the </a:t>
-            </a:r>
-            <a:r>
-              <a:rPr lang="en-US" dirty="0" err="1"/>
-              <a:t>StText</a:t>
-            </a:r>
-            <a:r>
-              <a:rPr lang="en-US" dirty="0"/>
-              <a:t> owned in the </a:t>
-            </a:r>
-            <a:r>
-              <a:rPr lang="en-US" dirty="0" err="1"/>
-              <a:t>ScrBook</a:t>
-            </a:r>
-            <a:r>
-              <a:rPr lang="en-US" dirty="0"/>
-              <a:t> Title property</a:t>
-            </a:r>
-          </a:p>
-          <a:p>
-            <a:pPr lvl="1"/>
-            <a:r>
-              <a:rPr lang="en-US" dirty="0"/>
-              <a:t>appends (Heading) for the </a:t>
-            </a:r>
-            <a:r>
-              <a:rPr lang="en-US" dirty="0" err="1"/>
-              <a:t>StText</a:t>
-            </a:r>
-            <a:r>
-              <a:rPr lang="en-US" dirty="0"/>
-              <a:t> owned in the </a:t>
-            </a:r>
-            <a:r>
-              <a:rPr lang="en-US" dirty="0" err="1"/>
-              <a:t>ScrSection</a:t>
-            </a:r>
-            <a:r>
-              <a:rPr lang="en-US" dirty="0"/>
-              <a:t> Heading property</a:t>
-            </a:r>
-          </a:p>
-          <a:p>
-            <a:pPr lvl="1"/>
-            <a:r>
-              <a:rPr lang="en-US" dirty="0"/>
-              <a:t>it doesn’t append anything for the </a:t>
-            </a:r>
-            <a:r>
-              <a:rPr lang="en-US" dirty="0" err="1"/>
-              <a:t>StText</a:t>
-            </a:r>
-            <a:r>
-              <a:rPr lang="en-US" dirty="0"/>
-              <a:t> owned in the </a:t>
-            </a:r>
-            <a:r>
-              <a:rPr lang="en-US" dirty="0" err="1"/>
-              <a:t>ScrSection</a:t>
-            </a:r>
-            <a:r>
-              <a:rPr lang="en-US" dirty="0"/>
-              <a:t> Content property</a:t>
-            </a:r>
-          </a:p>
-          <a:p>
-            <a:pPr lvl="1"/>
-            <a:r>
-              <a:rPr lang="en-US" dirty="0"/>
-              <a:t>it appends Footnote(</a:t>
-            </a:r>
-            <a:r>
-              <a:rPr lang="en-US" dirty="0" err="1"/>
-              <a:t>c:v</a:t>
-            </a:r>
-            <a:r>
-              <a:rPr lang="en-US" dirty="0"/>
-              <a:t>) for </a:t>
-            </a:r>
-            <a:r>
-              <a:rPr lang="en-US" dirty="0" err="1"/>
-              <a:t>ScrFootnote</a:t>
-            </a:r>
-            <a:r>
-              <a:rPr lang="en-US" dirty="0"/>
-              <a:t> with the chapter and verse number in parentheses.</a:t>
-            </a:r>
-          </a:p>
-          <a:p>
-            <a:r>
-              <a:rPr lang="en-US" dirty="0"/>
-              <a:t>The vernacular </a:t>
-            </a:r>
-            <a:r>
-              <a:rPr lang="en-US" dirty="0" err="1"/>
-              <a:t>ScrBook</a:t>
-            </a:r>
-            <a:r>
-              <a:rPr lang="en-US" dirty="0"/>
-              <a:t> Name (or Abbrev) is used for the book name, and for </a:t>
-            </a:r>
-            <a:r>
-              <a:rPr lang="en-US" dirty="0" err="1"/>
-              <a:t>StTexts</a:t>
-            </a:r>
-            <a:r>
-              <a:rPr lang="en-US" dirty="0"/>
-              <a:t> owned in </a:t>
-            </a:r>
-            <a:r>
-              <a:rPr lang="en-US" dirty="0" err="1"/>
-              <a:t>ScrSection</a:t>
-            </a:r>
-            <a:r>
-              <a:rPr lang="en-US" dirty="0"/>
-              <a:t>, it appends the chapter/verse range for the section.</a:t>
-            </a:r>
-          </a:p>
-          <a:p>
-            <a:endParaRPr lang="en-US" dirty="0"/>
-          </a:p>
-        </p:txBody>
-      </p:sp>
+              <a:rPr lang="en-US" dirty="0"/>
+              <a:t>This section shows up in FLEx as 4 Texts</a:t>
+            </a:r>
+          </a:p>
+        </p:txBody>
+      </p:sp>
+      <p:pic>
+        <p:nvPicPr>
+          <p:cNvPr id="9" name="Picture 8">
+            <a:extLst>
+              <a:ext uri="{FF2B5EF4-FFF2-40B4-BE49-F238E27FC236}">
+                <a16:creationId xmlns:a16="http://schemas.microsoft.com/office/drawing/2014/main" id="{ABCF1347-2700-4C04-9D87-D2F21FE3EAC7}"/>
+              </a:ext>
+            </a:extLst>
+          </p:cNvPr>
+          <p:cNvPicPr/>
+          <p:nvPr/>
+        </p:nvPicPr>
+        <p:blipFill>
+          <a:blip r:embed="rId2"/>
+          <a:stretch>
+            <a:fillRect/>
+          </a:stretch>
+        </p:blipFill>
+        <p:spPr>
+          <a:xfrm>
+            <a:off x="5655211" y="1377020"/>
+            <a:ext cx="5401085" cy="3426313"/>
+          </a:xfrm>
+          <a:prstGeom prst="rect">
+            <a:avLst/>
+          </a:prstGeom>
+        </p:spPr>
+      </p:pic>
+      <p:pic>
+        <p:nvPicPr>
+          <p:cNvPr id="10" name="Picture 9">
+            <a:extLst>
+              <a:ext uri="{FF2B5EF4-FFF2-40B4-BE49-F238E27FC236}">
+                <a16:creationId xmlns:a16="http://schemas.microsoft.com/office/drawing/2014/main" id="{6EE01C1B-598D-4832-99CA-08AF72FBE1D6}"/>
+              </a:ext>
+            </a:extLst>
+          </p:cNvPr>
+          <p:cNvPicPr/>
+          <p:nvPr/>
+        </p:nvPicPr>
+        <p:blipFill>
+          <a:blip r:embed="rId3"/>
+          <a:stretch>
+            <a:fillRect/>
+          </a:stretch>
+        </p:blipFill>
+        <p:spPr>
+          <a:xfrm>
+            <a:off x="853440" y="4371046"/>
+            <a:ext cx="3711474" cy="2126079"/>
+          </a:xfrm>
+          <a:prstGeom prst="rect">
+            <a:avLst/>
+          </a:prstGeom>
+        </p:spPr>
+      </p:pic>
+      <p:pic>
+        <p:nvPicPr>
+          <p:cNvPr id="11" name="Picture 10">
+            <a:extLst>
+              <a:ext uri="{FF2B5EF4-FFF2-40B4-BE49-F238E27FC236}">
+                <a16:creationId xmlns:a16="http://schemas.microsoft.com/office/drawing/2014/main" id="{BA70266A-BE73-48B1-97E5-C06E67A7DF97}"/>
+              </a:ext>
+            </a:extLst>
+          </p:cNvPr>
+          <p:cNvPicPr/>
+          <p:nvPr/>
+        </p:nvPicPr>
+        <p:blipFill>
+          <a:blip r:embed="rId4"/>
+          <a:stretch>
+            <a:fillRect/>
+          </a:stretch>
+        </p:blipFill>
+        <p:spPr>
+          <a:xfrm>
+            <a:off x="5589031" y="5050950"/>
+            <a:ext cx="4076113" cy="1569983"/>
+          </a:xfrm>
+          <a:prstGeom prst="rect">
+            <a:avLst/>
+          </a:prstGeom>
+        </p:spPr>
+      </p:pic>
+      <p:pic>
+        <p:nvPicPr>
+          <p:cNvPr id="2" name="Picture 1">
+            <a:extLst>
+              <a:ext uri="{FF2B5EF4-FFF2-40B4-BE49-F238E27FC236}">
+                <a16:creationId xmlns:a16="http://schemas.microsoft.com/office/drawing/2014/main" id="{6F2BF55F-32DA-47CD-8411-9469F84ECE97}"/>
+              </a:ext>
+            </a:extLst>
+          </p:cNvPr>
+          <p:cNvPicPr>
+            <a:picLocks noChangeAspect="1"/>
+          </p:cNvPicPr>
+          <p:nvPr/>
+        </p:nvPicPr>
+        <p:blipFill>
+          <a:blip r:embed="rId5"/>
+          <a:stretch>
+            <a:fillRect/>
+          </a:stretch>
+        </p:blipFill>
+        <p:spPr>
+          <a:xfrm>
+            <a:off x="944909" y="1430207"/>
+            <a:ext cx="4183422" cy="2543080"/>
+          </a:xfrm>
+          <a:prstGeom prst="rect">
+            <a:avLst/>
+          </a:prstGeom>
+        </p:spPr>
+      </p:pic>
     </p:spTree>
     <p:extLst>
       <p:ext uri="{BB962C8B-B14F-4D97-AF65-F5344CB8AC3E}">
-        <p14:creationId xmlns:p14="http://schemas.microsoft.com/office/powerpoint/2010/main" val="3885049432"/>
+        <p14:creationId xmlns:p14="http://schemas.microsoft.com/office/powerpoint/2010/main" val="718289954"/>
       </p:ext>
     </p:extLst>
   </p:cSld>
@@ -10752,95 +10727,207 @@
         </p:nvSpPr>
         <p:spPr>
           <a:xfrm>
-            <a:off x="348343" y="939800"/>
-            <a:ext cx="8556171" cy="5918200"/>
+            <a:off x="838200" y="939800"/>
+            <a:ext cx="10515600" cy="5681133"/>
           </a:xfrm>
         </p:spPr>
         <p:txBody>
           <a:bodyPr>
-            <a:normAutofit fontScale="85000" lnSpcReduction="10000"/>
+            <a:normAutofit fontScale="92500" lnSpcReduction="20000"/>
           </a:bodyPr>
           <a:lstStyle/>
           <a:p>
             <a:r>
               <a:rPr lang="en-US" dirty="0" err="1"/>
+              <a:t>LangProject</a:t>
+            </a:r>
+            <a:r>
+              <a:rPr lang="en-US" dirty="0"/>
+              <a:t> has a </a:t>
+            </a:r>
+            <a:r>
+              <a:rPr lang="en-US" dirty="0" err="1"/>
+              <a:t>TranslatedScriptures</a:t>
+            </a:r>
+            <a:r>
+              <a:rPr lang="en-US" dirty="0"/>
+              <a:t> atomic owning attribute that owns a Scripture object. Scripture has various properties that are no longer used, but it has an owning sequence of </a:t>
+            </a:r>
+            <a:r>
+              <a:rPr lang="en-US" dirty="0" err="1"/>
+              <a:t>ScrBooks</a:t>
+            </a:r>
+            <a:r>
+              <a:rPr lang="en-US" dirty="0"/>
+              <a:t> representing books of Scripture, each book in a </a:t>
+            </a:r>
+            <a:r>
+              <a:rPr lang="en-US" dirty="0" err="1"/>
               <a:t>ScrBook</a:t>
             </a:r>
             <a:r>
               <a:rPr lang="en-US" dirty="0"/>
-              <a:t> has</a:t>
+              <a:t> object.</a:t>
+            </a:r>
+          </a:p>
+          <a:p>
+            <a:r>
+              <a:rPr lang="en-US" dirty="0"/>
+              <a:t>Scripture uses the FLEx structured text classes starting with </a:t>
+            </a:r>
+            <a:r>
+              <a:rPr lang="en-US" dirty="0" err="1"/>
+              <a:t>StText</a:t>
+            </a:r>
+            <a:r>
+              <a:rPr lang="en-US" dirty="0"/>
+              <a:t>, but instead of </a:t>
+            </a:r>
+            <a:r>
+              <a:rPr lang="en-US" dirty="0" err="1"/>
+              <a:t>StText</a:t>
+            </a:r>
+            <a:r>
+              <a:rPr lang="en-US" dirty="0"/>
+              <a:t> owning </a:t>
+            </a:r>
+            <a:r>
+              <a:rPr lang="en-US" dirty="0" err="1"/>
+              <a:t>StTxtPara</a:t>
+            </a:r>
+            <a:r>
+              <a:rPr lang="en-US" dirty="0"/>
+              <a:t> objects, Scripture uses </a:t>
+            </a:r>
+            <a:r>
+              <a:rPr lang="en-US" dirty="0" err="1"/>
+              <a:t>ScrTxtPara</a:t>
+            </a:r>
+            <a:r>
+              <a:rPr lang="en-US" dirty="0"/>
+              <a:t> objects. In the Interlinear Texts tool, FLEx shows </a:t>
+            </a:r>
+            <a:r>
+              <a:rPr lang="en-US" dirty="0" err="1"/>
+              <a:t>StText</a:t>
+            </a:r>
+            <a:r>
+              <a:rPr lang="en-US" dirty="0"/>
+              <a:t> objects and </a:t>
+            </a:r>
+            <a:r>
+              <a:rPr lang="en-US" dirty="0" err="1"/>
+              <a:t>ScrFootnote</a:t>
+            </a:r>
+            <a:r>
+              <a:rPr lang="en-US" dirty="0"/>
+              <a:t> objects as interlinear texts. When showing </a:t>
+            </a:r>
+            <a:r>
+              <a:rPr lang="en-US" dirty="0" err="1"/>
+              <a:t>StText</a:t>
+            </a:r>
+            <a:r>
+              <a:rPr lang="en-US" dirty="0"/>
+              <a:t>, in the Interlinear Texts it </a:t>
             </a:r>
           </a:p>
           <a:p>
             <a:pPr lvl="1"/>
             <a:r>
-              <a:rPr lang="en-US" dirty="0" err="1"/>
-              <a:t>CanonicalNum</a:t>
-            </a:r>
-            <a:r>
-              <a:rPr lang="en-US" dirty="0"/>
-              <a:t> – Integer giving the book number in Scripture starting at 1 for Genesis. The number for Titus, which is used in this example is 56.</a:t>
+              <a:rPr lang="en-US" dirty="0"/>
+              <a:t>appends (Title) for the </a:t>
+            </a:r>
+            <a:r>
+              <a:rPr lang="en-US" dirty="0" err="1"/>
+              <a:t>StText</a:t>
+            </a:r>
+            <a:r>
+              <a:rPr lang="en-US" dirty="0"/>
+              <a:t> owned in the </a:t>
+            </a:r>
+            <a:r>
+              <a:rPr lang="en-US" dirty="0" err="1"/>
+              <a:t>ScrBook</a:t>
+            </a:r>
+            <a:r>
+              <a:rPr lang="en-US" dirty="0"/>
+              <a:t> Title property</a:t>
             </a:r>
           </a:p>
           <a:p>
             <a:pPr lvl="1"/>
             <a:r>
               <a:rPr lang="en-US" dirty="0"/>
-              <a:t>Name – </a:t>
-            </a:r>
-            <a:r>
-              <a:rPr lang="en-US" dirty="0" err="1"/>
-              <a:t>MultiUnicode</a:t>
-            </a:r>
-            <a:r>
-              <a:rPr lang="en-US" dirty="0"/>
-              <a:t> name for the book, used in displaying the Title for FLEx interlinear text.</a:t>
+              <a:t>appends (Heading) for the </a:t>
+            </a:r>
+            <a:r>
+              <a:rPr lang="en-US" dirty="0" err="1"/>
+              <a:t>StText</a:t>
+            </a:r>
+            <a:r>
+              <a:rPr lang="en-US" dirty="0"/>
+              <a:t> owned in the </a:t>
+            </a:r>
+            <a:r>
+              <a:rPr lang="en-US" dirty="0" err="1"/>
+              <a:t>ScrSection</a:t>
+            </a:r>
+            <a:r>
+              <a:rPr lang="en-US" dirty="0"/>
+              <a:t> Heading property</a:t>
             </a:r>
           </a:p>
           <a:p>
             <a:pPr lvl="1"/>
             <a:r>
-              <a:rPr lang="en-US" dirty="0" err="1"/>
-              <a:t>IdText</a:t>
-            </a:r>
-            <a:r>
-              <a:rPr lang="en-US" dirty="0"/>
-              <a:t> – Unicode string showing identifying information for the book.</a:t>
+              <a:rPr lang="en-US" dirty="0"/>
+              <a:t>it doesn’t append anything for the </a:t>
+            </a:r>
+            <a:r>
+              <a:rPr lang="en-US" dirty="0" err="1"/>
+              <a:t>StText</a:t>
+            </a:r>
+            <a:r>
+              <a:rPr lang="en-US" dirty="0"/>
+              <a:t> owned in the </a:t>
+            </a:r>
+            <a:r>
+              <a:rPr lang="en-US" dirty="0" err="1"/>
+              <a:t>ScrSection</a:t>
+            </a:r>
+            <a:r>
+              <a:rPr lang="en-US" dirty="0"/>
+              <a:t> Content property</a:t>
             </a:r>
           </a:p>
           <a:p>
             <a:pPr lvl="1"/>
             <a:r>
-              <a:rPr lang="en-US" dirty="0" err="1"/>
-              <a:t>ImportedCheckSum</a:t>
-            </a:r>
-            <a:r>
-              <a:rPr lang="en-US" dirty="0"/>
-              <a:t> – A calculated checksum of the </a:t>
-            </a:r>
-            <a:r>
-              <a:rPr lang="en-US" dirty="0" err="1"/>
-              <a:t>Paratext</a:t>
-            </a:r>
-            <a:r>
-              <a:rPr lang="en-US" dirty="0"/>
-              <a:t> book file that is stored when FLEx imports a book from </a:t>
-            </a:r>
-            <a:r>
-              <a:rPr lang="en-US" dirty="0" err="1"/>
-              <a:t>Paratext</a:t>
-            </a:r>
-            <a:r>
-              <a:rPr lang="en-US" dirty="0"/>
-              <a:t>. When the user goes to the Choose Texts tool and the FLEx project is associated with </a:t>
-            </a:r>
-            <a:r>
-              <a:rPr lang="en-US" dirty="0" err="1"/>
-              <a:t>Paratext</a:t>
-            </a:r>
-            <a:r>
-              <a:rPr lang="en-US" dirty="0"/>
-              <a:t>, and a </a:t>
+              <a:rPr lang="en-US" dirty="0"/>
+              <a:t>it appends Footnote(</a:t>
+            </a:r>
+            <a:r>
+              <a:rPr lang="en-US" dirty="0" err="1"/>
+              <a:t>c:v</a:t>
+            </a:r>
+            <a:r>
+              <a:rPr lang="en-US" dirty="0"/>
+              <a:t>) for </a:t>
+            </a:r>
+            <a:r>
+              <a:rPr lang="en-US" dirty="0" err="1"/>
+              <a:t>ScrFootnote</a:t>
+            </a:r>
+            <a:r>
+              <a:rPr lang="en-US" dirty="0"/>
+              <a:t> with the chapter and verse number in parentheses.</a:t>
+            </a:r>
+          </a:p>
+          <a:p>
+            <a:r>
+              <a:rPr lang="en-US" dirty="0"/>
+              <a:t>The vernacular </a:t>
             </a:r>
             <a:r>
               <a:rPr lang="en-US" dirty="0" err="1"/>
@@ -10848,68 +10935,15 @@
             </a:r>
             <a:r>
               <a:rPr lang="en-US" dirty="0"/>
-              <a:t> for this book is already in the FLEx project, then FLEx calculates a current checksum for the </a:t>
-            </a:r>
-            <a:r>
-              <a:rPr lang="en-US" dirty="0" err="1"/>
-              <a:t>Paratext</a:t>
-            </a:r>
-            <a:r>
-              <a:rPr lang="en-US" dirty="0"/>
-              <a:t> book file, and if it is different, it means the file has been edited in </a:t>
-            </a:r>
-            <a:r>
-              <a:rPr lang="en-US" dirty="0" err="1"/>
-              <a:t>Paratext</a:t>
-            </a:r>
-            <a:r>
-              <a:rPr lang="en-US" dirty="0"/>
-              <a:t>, so it reimports the book from </a:t>
-            </a:r>
-            <a:r>
-              <a:rPr lang="en-US" dirty="0" err="1"/>
-              <a:t>Paratext</a:t>
-            </a:r>
-            <a:r>
-              <a:rPr lang="en-US" dirty="0"/>
-              <a:t> and stores the new checksum. When reimporting, FLEx attempts to maintain any interlinearization a user did in FLEx.</a:t>
-            </a:r>
-          </a:p>
-          <a:p>
-            <a:pPr lvl="1"/>
-            <a:r>
-              <a:rPr lang="en-US" dirty="0"/>
-              <a:t>Title – atomic owning property holding a </a:t>
-            </a:r>
-            <a:r>
-              <a:rPr lang="en-US" dirty="0" err="1"/>
-              <a:t>StText</a:t>
-            </a:r>
-            <a:r>
-              <a:rPr lang="en-US" dirty="0"/>
-              <a:t> with the title for the printed book.</a:t>
-            </a:r>
-          </a:p>
-          <a:p>
-            <a:pPr lvl="1"/>
-            <a:r>
-              <a:rPr lang="en-US" dirty="0"/>
-              <a:t>Footnotes – an owning sequence of </a:t>
-            </a:r>
-            <a:r>
-              <a:rPr lang="en-US" dirty="0" err="1"/>
-              <a:t>ScrFootnote</a:t>
-            </a:r>
-            <a:r>
-              <a:rPr lang="en-US" dirty="0"/>
-              <a:t> holding all of the footnotes for the book.</a:t>
-            </a:r>
-          </a:p>
-          <a:p>
-            <a:pPr lvl="1"/>
-            <a:r>
-              <a:rPr lang="en-US" dirty="0"/>
-              <a:t>Sections – an owning sequence of </a:t>
+              <a:t> Name (or Abbrev) is used for the book name, and for </a:t>
+            </a:r>
+            <a:r>
+              <a:rPr lang="en-US" dirty="0" err="1"/>
+              <a:t>StTexts</a:t>
+            </a:r>
+            <a:r>
+              <a:rPr lang="en-US" dirty="0"/>
+              <a:t> owned in </a:t>
             </a:r>
             <a:r>
               <a:rPr lang="en-US" dirty="0" err="1"/>
@@ -10917,48 +10951,18 @@
             </a:r>
             <a:r>
               <a:rPr lang="en-US" dirty="0"/>
-              <a:t>, which usually includes a section heading and all of the verses until a new chapter or section head occurs.</a:t>
-            </a:r>
-          </a:p>
-          <a:p>
-            <a:endParaRPr lang="en-US" dirty="0"/>
-          </a:p>
-        </p:txBody>
-      </p:sp>
-      <p:pic>
-        <p:nvPicPr>
-          <p:cNvPr id="2" name="Picture 1">
-            <a:extLst>
-              <a:ext uri="{FF2B5EF4-FFF2-40B4-BE49-F238E27FC236}">
-                <a16:creationId xmlns:a16="http://schemas.microsoft.com/office/drawing/2014/main" id="{CC376F3F-50A4-450C-8D61-7156AB625120}"/>
-              </a:ext>
-            </a:extLst>
-          </p:cNvPr>
-          <p:cNvPicPr>
-            <a:picLocks noChangeAspect="1"/>
-          </p:cNvPicPr>
-          <p:nvPr/>
-        </p:nvPicPr>
-        <p:blipFill>
-          <a:blip r:embed="rId2"/>
-          <a:stretch>
-            <a:fillRect/>
-          </a:stretch>
-        </p:blipFill>
-        <p:spPr>
-          <a:xfrm>
-            <a:off x="9191514" y="1295229"/>
-            <a:ext cx="2385953" cy="3679541"/>
-          </a:xfrm>
-          <a:prstGeom prst="rect">
-            <a:avLst/>
-          </a:prstGeom>
-        </p:spPr>
-      </p:pic>
+              <a:t>, it appends the chapter/verse range for the section.</a:t>
+            </a:r>
+          </a:p>
+          <a:p>
+            <a:endParaRPr lang="en-US" dirty="0"/>
+          </a:p>
+        </p:txBody>
+      </p:sp>
     </p:spTree>
     <p:extLst>
       <p:ext uri="{BB962C8B-B14F-4D97-AF65-F5344CB8AC3E}">
-        <p14:creationId xmlns:p14="http://schemas.microsoft.com/office/powerpoint/2010/main" val="2459792057"/>
+        <p14:creationId xmlns:p14="http://schemas.microsoft.com/office/powerpoint/2010/main" val="3885049432"/>
       </p:ext>
     </p:extLst>
   </p:cSld>
@@ -11038,51 +11042,173 @@
         </p:nvSpPr>
         <p:spPr>
           <a:xfrm>
-            <a:off x="838200" y="939800"/>
-            <a:ext cx="10515600" cy="5681133"/>
+            <a:off x="348343" y="939800"/>
+            <a:ext cx="8556171" cy="5918200"/>
           </a:xfrm>
         </p:spPr>
         <p:txBody>
           <a:bodyPr>
-            <a:normAutofit/>
+            <a:normAutofit fontScale="85000" lnSpcReduction="10000"/>
           </a:bodyPr>
           <a:lstStyle/>
           <a:p>
             <a:r>
               <a:rPr lang="en-US" dirty="0" err="1"/>
-              <a:t>ScrTxtPara</a:t>
-            </a:r>
-            <a:r>
-              <a:rPr lang="en-US" dirty="0"/>
-              <a:t> objects use a </a:t>
-            </a:r>
-            <a:r>
-              <a:rPr lang="en-US" dirty="0" err="1"/>
-              <a:t>StyleRules</a:t>
-            </a:r>
-            <a:r>
-              <a:rPr lang="en-US" dirty="0"/>
-              <a:t> property to store paragraph style information in a </a:t>
-            </a:r>
-            <a:r>
-              <a:rPr lang="en-US" dirty="0" err="1"/>
-              <a:t>namedStyle</a:t>
-            </a:r>
-            <a:r>
-              <a:rPr lang="en-US" dirty="0"/>
-              <a:t> prop element giving the name of the style for the paragraph. The Contents String property includes </a:t>
-            </a:r>
-            <a:r>
-              <a:rPr lang="en-US" dirty="0" err="1"/>
-              <a:t>namedStyle</a:t>
-            </a:r>
-            <a:r>
-              <a:rPr lang="en-US" dirty="0"/>
-              <a:t> attributes with the name of special styles designating a “Chapter Number”, “Verse Number”, “Title Secondary”, etc.</a:t>
-            </a:r>
-          </a:p>
-          <a:p>
-            <a:endParaRPr lang="en-US" dirty="0"/>
+              <a:t>ScrBook</a:t>
+            </a:r>
+            <a:r>
+              <a:rPr lang="en-US" dirty="0"/>
+              <a:t> has</a:t>
+            </a:r>
+          </a:p>
+          <a:p>
+            <a:pPr lvl="1"/>
+            <a:r>
+              <a:rPr lang="en-US" dirty="0" err="1"/>
+              <a:t>CanonicalNum</a:t>
+            </a:r>
+            <a:r>
+              <a:rPr lang="en-US" dirty="0"/>
+              <a:t> – Integer giving the book number in Scripture starting at 1 for Genesis. The number for Titus, which is used in this example is 56.</a:t>
+            </a:r>
+          </a:p>
+          <a:p>
+            <a:pPr lvl="1"/>
+            <a:r>
+              <a:rPr lang="en-US" dirty="0"/>
+              <a:t>Name – </a:t>
+            </a:r>
+            <a:r>
+              <a:rPr lang="en-US" dirty="0" err="1"/>
+              <a:t>MultiUnicode</a:t>
+            </a:r>
+            <a:r>
+              <a:rPr lang="en-US" dirty="0"/>
+              <a:t> name for the book, used in displaying the Title for FLEx interlinear text.</a:t>
+            </a:r>
+          </a:p>
+          <a:p>
+            <a:pPr lvl="1"/>
+            <a:r>
+              <a:rPr lang="en-US" dirty="0" err="1"/>
+              <a:t>IdText</a:t>
+            </a:r>
+            <a:r>
+              <a:rPr lang="en-US" dirty="0"/>
+              <a:t> – Unicode string showing identifying information for the book.</a:t>
+            </a:r>
+          </a:p>
+          <a:p>
+            <a:pPr lvl="1"/>
+            <a:r>
+              <a:rPr lang="en-US" dirty="0" err="1"/>
+              <a:t>ImportedCheckSum</a:t>
+            </a:r>
+            <a:r>
+              <a:rPr lang="en-US" dirty="0"/>
+              <a:t> – A calculated checksum of the </a:t>
+            </a:r>
+            <a:r>
+              <a:rPr lang="en-US" dirty="0" err="1"/>
+              <a:t>Paratext</a:t>
+            </a:r>
+            <a:r>
+              <a:rPr lang="en-US" dirty="0"/>
+              <a:t> book file that is stored when FLEx imports a book from </a:t>
+            </a:r>
+            <a:r>
+              <a:rPr lang="en-US" dirty="0" err="1"/>
+              <a:t>Paratext</a:t>
+            </a:r>
+            <a:r>
+              <a:rPr lang="en-US" dirty="0"/>
+              <a:t>. When the user goes to the Choose Texts tool and the FLEx project is associated with </a:t>
+            </a:r>
+            <a:r>
+              <a:rPr lang="en-US" dirty="0" err="1"/>
+              <a:t>Paratext</a:t>
+            </a:r>
+            <a:r>
+              <a:rPr lang="en-US" dirty="0"/>
+              <a:t>, and a </a:t>
+            </a:r>
+            <a:r>
+              <a:rPr lang="en-US" dirty="0" err="1"/>
+              <a:t>ScrBook</a:t>
+            </a:r>
+            <a:r>
+              <a:rPr lang="en-US" dirty="0"/>
+              <a:t> for this book is already in the FLEx project, then FLEx calculates a current checksum for the </a:t>
+            </a:r>
+            <a:r>
+              <a:rPr lang="en-US" dirty="0" err="1"/>
+              <a:t>Paratext</a:t>
+            </a:r>
+            <a:r>
+              <a:rPr lang="en-US" dirty="0"/>
+              <a:t> book file, and if it is different, it means the file has been edited in </a:t>
+            </a:r>
+            <a:r>
+              <a:rPr lang="en-US" dirty="0" err="1"/>
+              <a:t>Paratext</a:t>
+            </a:r>
+            <a:r>
+              <a:rPr lang="en-US" dirty="0"/>
+              <a:t>, so it reimports the book from </a:t>
+            </a:r>
+            <a:r>
+              <a:rPr lang="en-US" dirty="0" err="1"/>
+              <a:t>Paratext</a:t>
+            </a:r>
+            <a:r>
+              <a:rPr lang="en-US" dirty="0"/>
+              <a:t> and stores the new checksum. When reimporting, FLEx attempts to maintain any interlinearization a user did in FLEx.</a:t>
+            </a:r>
+          </a:p>
+          <a:p>
+            <a:pPr lvl="1"/>
+            <a:r>
+              <a:rPr lang="en-US" dirty="0"/>
+              <a:t>Title – atomic owning property holding a </a:t>
+            </a:r>
+            <a:r>
+              <a:rPr lang="en-US" dirty="0" err="1"/>
+              <a:t>StText</a:t>
+            </a:r>
+            <a:r>
+              <a:rPr lang="en-US" dirty="0"/>
+              <a:t> with the title for the printed book.</a:t>
+            </a:r>
+          </a:p>
+          <a:p>
+            <a:pPr lvl="1"/>
+            <a:r>
+              <a:rPr lang="en-US" dirty="0"/>
+              <a:t>Footnotes – an owning sequence of </a:t>
+            </a:r>
+            <a:r>
+              <a:rPr lang="en-US" dirty="0" err="1"/>
+              <a:t>ScrFootnote</a:t>
+            </a:r>
+            <a:r>
+              <a:rPr lang="en-US" dirty="0"/>
+              <a:t> holding all of the footnotes for the book.</a:t>
+            </a:r>
+          </a:p>
+          <a:p>
+            <a:pPr lvl="1"/>
+            <a:r>
+              <a:rPr lang="en-US" dirty="0"/>
+              <a:t>Sections – an owning sequence of </a:t>
+            </a:r>
+            <a:r>
+              <a:rPr lang="en-US" dirty="0" err="1"/>
+              <a:t>ScrSection</a:t>
+            </a:r>
+            <a:r>
+              <a:rPr lang="en-US" dirty="0"/>
+              <a:t>, which usually includes a section heading and all of the verses until a new chapter or section head occurs.</a:t>
+            </a:r>
           </a:p>
           <a:p>
             <a:endParaRPr lang="en-US" dirty="0"/>
@@ -11094,7 +11220,7 @@
           <p:cNvPr id="2" name="Picture 1">
             <a:extLst>
               <a:ext uri="{FF2B5EF4-FFF2-40B4-BE49-F238E27FC236}">
-                <a16:creationId xmlns:a16="http://schemas.microsoft.com/office/drawing/2014/main" id="{3C4943C8-7172-4638-BA13-6708976E4B5C}"/>
+                <a16:creationId xmlns:a16="http://schemas.microsoft.com/office/drawing/2014/main" id="{CC376F3F-50A4-450C-8D61-7156AB625120}"/>
               </a:ext>
             </a:extLst>
           </p:cNvPr>
@@ -11111,8 +11237,8 @@
         </p:blipFill>
         <p:spPr>
           <a:xfrm>
-            <a:off x="2850169" y="3169038"/>
-            <a:ext cx="5442904" cy="1783961"/>
+            <a:off x="9191514" y="1295229"/>
+            <a:ext cx="2385953" cy="3679541"/>
           </a:xfrm>
           <a:prstGeom prst="rect">
             <a:avLst/>
@@ -11122,7 +11248,7 @@
     </p:spTree>
     <p:extLst>
       <p:ext uri="{BB962C8B-B14F-4D97-AF65-F5344CB8AC3E}">
-        <p14:creationId xmlns:p14="http://schemas.microsoft.com/office/powerpoint/2010/main" val="1091744054"/>
+        <p14:creationId xmlns:p14="http://schemas.microsoft.com/office/powerpoint/2010/main" val="2459792057"/>
       </p:ext>
     </p:extLst>
   </p:cSld>
@@ -11214,64 +11340,39 @@
           <a:p>
             <a:r>
               <a:rPr lang="en-US" dirty="0" err="1"/>
-              <a:t>ScrSection</a:t>
-            </a:r>
-            <a:r>
-              <a:rPr lang="en-US" dirty="0"/>
-              <a:t> has</a:t>
-            </a:r>
-          </a:p>
-          <a:p>
-            <a:pPr lvl="1"/>
-            <a:r>
-              <a:rPr lang="en-US" dirty="0" err="1"/>
-              <a:t>VerseRefStart</a:t>
-            </a:r>
-            <a:r>
-              <a:rPr lang="en-US" dirty="0"/>
-              <a:t> – an Integer representing the book, chapter, and verse that starts this section in the form BBCCCCVVVV.</a:t>
-            </a:r>
-          </a:p>
-          <a:p>
-            <a:pPr lvl="1"/>
-            <a:r>
-              <a:rPr lang="en-US" dirty="0" err="1"/>
-              <a:t>VerseRefEnd</a:t>
-            </a:r>
-            <a:r>
-              <a:rPr lang="en-US" dirty="0"/>
-              <a:t> – an Integer representing the book, chapter, and verse that ends this section in the form BBCCCCVVVV.</a:t>
-            </a:r>
-          </a:p>
-          <a:p>
-            <a:pPr lvl="1"/>
-            <a:r>
-              <a:rPr lang="en-US" dirty="0"/>
-              <a:t>Heading – atomic owning property that holds an </a:t>
-            </a:r>
-            <a:r>
-              <a:rPr lang="en-US" dirty="0" err="1"/>
-              <a:t>StText</a:t>
-            </a:r>
-            <a:r>
-              <a:rPr lang="en-US" dirty="0"/>
-              <a:t> for the section heading.</a:t>
-            </a:r>
-          </a:p>
-          <a:p>
-            <a:pPr lvl="1"/>
-            <a:r>
-              <a:rPr lang="en-US" dirty="0"/>
-              <a:t>Content – atomic owning property that holds an </a:t>
-            </a:r>
-            <a:r>
-              <a:rPr lang="en-US" dirty="0" err="1"/>
-              <a:t>StText</a:t>
-            </a:r>
-            <a:r>
-              <a:rPr lang="en-US" dirty="0"/>
-              <a:t> for the rest of the paragraphs in a section.</a:t>
-            </a:r>
+              <a:t>ScrTxtPara</a:t>
+            </a:r>
+            <a:r>
+              <a:rPr lang="en-US" dirty="0"/>
+              <a:t> objects use a </a:t>
+            </a:r>
+            <a:r>
+              <a:rPr lang="en-US" dirty="0" err="1"/>
+              <a:t>StyleRules</a:t>
+            </a:r>
+            <a:r>
+              <a:rPr lang="en-US" dirty="0"/>
+              <a:t> property to store paragraph style information in a </a:t>
+            </a:r>
+            <a:r>
+              <a:rPr lang="en-US" dirty="0" err="1"/>
+              <a:t>namedStyle</a:t>
+            </a:r>
+            <a:r>
+              <a:rPr lang="en-US" dirty="0"/>
+              <a:t> prop element giving the name of the style for the paragraph. The Contents String property includes </a:t>
+            </a:r>
+            <a:r>
+              <a:rPr lang="en-US" dirty="0" err="1"/>
+              <a:t>namedStyle</a:t>
+            </a:r>
+            <a:r>
+              <a:rPr lang="en-US" dirty="0"/>
+              <a:t> attributes with the name of special styles designating a “Chapter Number”, “Verse Number”, “Title Secondary”, etc.</a:t>
+            </a:r>
+          </a:p>
+          <a:p>
+            <a:endParaRPr lang="en-US" dirty="0"/>
           </a:p>
           <a:p>
             <a:endParaRPr lang="en-US" dirty="0"/>
@@ -11280,10 +11381,10 @@
       </p:sp>
       <p:pic>
         <p:nvPicPr>
-          <p:cNvPr id="3" name="Picture 2">
-            <a:extLst>
-              <a:ext uri="{FF2B5EF4-FFF2-40B4-BE49-F238E27FC236}">
-                <a16:creationId xmlns:a16="http://schemas.microsoft.com/office/drawing/2014/main" id="{FBFCAF81-5FDA-4FB7-BC50-C2CAC44201B3}"/>
+          <p:cNvPr id="2" name="Picture 1">
+            <a:extLst>
+              <a:ext uri="{FF2B5EF4-FFF2-40B4-BE49-F238E27FC236}">
+                <a16:creationId xmlns:a16="http://schemas.microsoft.com/office/drawing/2014/main" id="{3C4943C8-7172-4638-BA13-6708976E4B5C}"/>
               </a:ext>
             </a:extLst>
           </p:cNvPr>
@@ -11300,8 +11401,8 @@
         </p:blipFill>
         <p:spPr>
           <a:xfrm>
-            <a:off x="4841970" y="4075197"/>
-            <a:ext cx="2436059" cy="2646278"/>
+            <a:off x="2850169" y="3169038"/>
+            <a:ext cx="5442904" cy="1783961"/>
           </a:xfrm>
           <a:prstGeom prst="rect">
             <a:avLst/>
@@ -11311,7 +11412,7 @@
     </p:spTree>
     <p:extLst>
       <p:ext uri="{BB962C8B-B14F-4D97-AF65-F5344CB8AC3E}">
-        <p14:creationId xmlns:p14="http://schemas.microsoft.com/office/powerpoint/2010/main" val="1611060557"/>
+        <p14:creationId xmlns:p14="http://schemas.microsoft.com/office/powerpoint/2010/main" val="1091744054"/>
       </p:ext>
     </p:extLst>
   </p:cSld>
@@ -11403,7 +11504,7 @@
           <a:p>
             <a:r>
               <a:rPr lang="en-US" dirty="0" err="1"/>
-              <a:t>ScrFootnote</a:t>
+              <a:t>ScrSection</a:t>
             </a:r>
             <a:r>
               <a:rPr lang="en-US" dirty="0"/>
@@ -11414,61 +11515,52 @@
             <a:pPr lvl="1"/>
             <a:r>
               <a:rPr lang="en-US" dirty="0" err="1"/>
-              <a:t>FootnoteMarker</a:t>
-            </a:r>
-            <a:r>
-              <a:rPr lang="en-US" dirty="0"/>
-              <a:t> – a String with the footnote marker in a “Note Marker” style.</a:t>
+              <a:t>VerseRefStart</a:t>
+            </a:r>
+            <a:r>
+              <a:rPr lang="en-US" dirty="0"/>
+              <a:t> – an Integer representing the book, chapter, and verse that starts this section in the form BBCCCCVVVV.</a:t>
             </a:r>
           </a:p>
           <a:p>
             <a:pPr lvl="1"/>
             <a:r>
               <a:rPr lang="en-US" dirty="0" err="1"/>
-              <a:t>ParaContainingOrc</a:t>
-            </a:r>
-            <a:r>
-              <a:rPr lang="en-US" dirty="0"/>
-              <a:t> – an atomic reference to </a:t>
-            </a:r>
-            <a:r>
-              <a:rPr lang="en-US" dirty="0" err="1"/>
-              <a:t>ScrTxtPara</a:t>
-            </a:r>
-            <a:r>
-              <a:rPr lang="en-US" dirty="0"/>
-              <a:t> that references the paragraph that contains the footnote. In the paragraph, the footnote is represented by an </a:t>
-            </a:r>
-            <a:r>
-              <a:rPr lang="en-US" dirty="0" err="1"/>
-              <a:t>ownlink</a:t>
-            </a:r>
-            <a:r>
-              <a:rPr lang="en-US" dirty="0"/>
-              <a:t> attribute in the Run with the guid of the </a:t>
-            </a:r>
-            <a:r>
-              <a:rPr lang="en-US" dirty="0" err="1"/>
-              <a:t>ScrFootnote</a:t>
-            </a:r>
-            <a:r>
-              <a:rPr lang="en-US" dirty="0"/>
-              <a:t>.</a:t>
+              <a:t>VerseRefEnd</a:t>
+            </a:r>
+            <a:r>
+              <a:rPr lang="en-US" dirty="0"/>
+              <a:t> – an Integer representing the book, chapter, and verse that ends this section in the form BBCCCCVVVV.</a:t>
             </a:r>
           </a:p>
           <a:p>
             <a:pPr lvl="1"/>
             <a:r>
               <a:rPr lang="en-US" dirty="0"/>
-              <a:t>Paragraphs – an owning sequence of </a:t>
-            </a:r>
-            <a:r>
-              <a:rPr lang="en-US" dirty="0" err="1"/>
-              <a:t>ScrTxtPara</a:t>
-            </a:r>
-            <a:r>
-              <a:rPr lang="en-US" dirty="0"/>
-              <a:t> that contains the content of the footnote.</a:t>
+              <a:t>Heading – atomic owning property that holds an </a:t>
+            </a:r>
+            <a:r>
+              <a:rPr lang="en-US" dirty="0" err="1"/>
+              <a:t>StText</a:t>
+            </a:r>
+            <a:r>
+              <a:rPr lang="en-US" dirty="0"/>
+              <a:t> for the section heading.</a:t>
+            </a:r>
+          </a:p>
+          <a:p>
+            <a:pPr lvl="1"/>
+            <a:r>
+              <a:rPr lang="en-US" dirty="0"/>
+              <a:t>Content – atomic owning property that holds an </a:t>
+            </a:r>
+            <a:r>
+              <a:rPr lang="en-US" dirty="0" err="1"/>
+              <a:t>StText</a:t>
+            </a:r>
+            <a:r>
+              <a:rPr lang="en-US" dirty="0"/>
+              <a:t> for the rest of the paragraphs in a section.</a:t>
             </a:r>
           </a:p>
           <a:p>
@@ -11478,10 +11570,10 @@
       </p:sp>
       <p:pic>
         <p:nvPicPr>
-          <p:cNvPr id="2" name="Picture 1">
-            <a:extLst>
-              <a:ext uri="{FF2B5EF4-FFF2-40B4-BE49-F238E27FC236}">
-                <a16:creationId xmlns:a16="http://schemas.microsoft.com/office/drawing/2014/main" id="{9757E38B-A6CA-424D-B25D-680C283694C5}"/>
+          <p:cNvPr id="3" name="Picture 2">
+            <a:extLst>
+              <a:ext uri="{FF2B5EF4-FFF2-40B4-BE49-F238E27FC236}">
+                <a16:creationId xmlns:a16="http://schemas.microsoft.com/office/drawing/2014/main" id="{FBFCAF81-5FDA-4FB7-BC50-C2CAC44201B3}"/>
               </a:ext>
             </a:extLst>
           </p:cNvPr>
@@ -11498,8 +11590,8 @@
         </p:blipFill>
         <p:spPr>
           <a:xfrm>
-            <a:off x="3325893" y="3780366"/>
-            <a:ext cx="7262025" cy="2718405"/>
+            <a:off x="4841970" y="4075197"/>
+            <a:ext cx="2436059" cy="2646278"/>
           </a:xfrm>
           <a:prstGeom prst="rect">
             <a:avLst/>
@@ -11509,7 +11601,7 @@
     </p:spTree>
     <p:extLst>
       <p:ext uri="{BB962C8B-B14F-4D97-AF65-F5344CB8AC3E}">
-        <p14:creationId xmlns:p14="http://schemas.microsoft.com/office/powerpoint/2010/main" val="1429828381"/>
+        <p14:creationId xmlns:p14="http://schemas.microsoft.com/office/powerpoint/2010/main" val="1611060557"/>
       </p:ext>
     </p:extLst>
   </p:cSld>
@@ -11560,20 +11652,13 @@
         </p:spPr>
         <p:txBody>
           <a:bodyPr>
-            <a:normAutofit fontScale="90000"/>
+            <a:normAutofit/>
           </a:bodyPr>
           <a:lstStyle/>
           <a:p>
             <a:r>
               <a:rPr lang="en-US" dirty="0"/>
-              <a:t>Interlinear: Scripture</a:t>
-            </a:r>
-            <a:br>
-              <a:rPr lang="en-US" dirty="0"/>
-            </a:br>
-            <a:r>
-              <a:rPr lang="en-US" dirty="0"/>
-              <a:t> continued</a:t>
+              <a:t>Interlinear: Scripture continued</a:t>
             </a:r>
           </a:p>
         </p:txBody>
@@ -11596,8 +11681,8 @@
         </p:nvSpPr>
         <p:spPr>
           <a:xfrm>
-            <a:off x="838200" y="1055914"/>
-            <a:ext cx="10515600" cy="5565019"/>
+            <a:off x="838200" y="939800"/>
+            <a:ext cx="10515600" cy="5681133"/>
           </a:xfrm>
         </p:spPr>
         <p:txBody>
@@ -11606,13 +11691,78 @@
           </a:bodyPr>
           <a:lstStyle/>
           <a:p>
-            <a:pPr marL="0" indent="0">
-              <a:buNone/>
-            </a:pPr>
-            <a:r>
-              <a:rPr lang="en-US" dirty="0"/>
-              <a:t> </a:t>
-            </a:r>
+            <a:r>
+              <a:rPr lang="en-US" dirty="0" err="1"/>
+              <a:t>ScrFootnote</a:t>
+            </a:r>
+            <a:r>
+              <a:rPr lang="en-US" dirty="0"/>
+              <a:t> has</a:t>
+            </a:r>
+          </a:p>
+          <a:p>
+            <a:pPr lvl="1"/>
+            <a:r>
+              <a:rPr lang="en-US" dirty="0" err="1"/>
+              <a:t>FootnoteMarker</a:t>
+            </a:r>
+            <a:r>
+              <a:rPr lang="en-US" dirty="0"/>
+              <a:t> – a String with the footnote marker in a “Note Marker” style.</a:t>
+            </a:r>
+          </a:p>
+          <a:p>
+            <a:pPr lvl="1"/>
+            <a:r>
+              <a:rPr lang="en-US" dirty="0" err="1"/>
+              <a:t>ParaContainingOrc</a:t>
+            </a:r>
+            <a:r>
+              <a:rPr lang="en-US" dirty="0"/>
+              <a:t> – an atomic reference to </a:t>
+            </a:r>
+            <a:r>
+              <a:rPr lang="en-US" dirty="0" err="1"/>
+              <a:t>ScrTxtPara</a:t>
+            </a:r>
+            <a:r>
+              <a:rPr lang="en-US" dirty="0"/>
+              <a:t> that references the paragraph that contains the footnote. In the paragraph, the footnote is represented by an </a:t>
+            </a:r>
+            <a:r>
+              <a:rPr lang="en-US" dirty="0" err="1"/>
+              <a:t>ownlink</a:t>
+            </a:r>
+            <a:r>
+              <a:rPr lang="en-US" dirty="0"/>
+              <a:t> attribute in the Run with the guid of the </a:t>
+            </a:r>
+            <a:r>
+              <a:rPr lang="en-US" dirty="0" err="1"/>
+              <a:t>ScrFootnote</a:t>
+            </a:r>
+            <a:r>
+              <a:rPr lang="en-US" dirty="0"/>
+              <a:t>.</a:t>
+            </a:r>
+          </a:p>
+          <a:p>
+            <a:pPr lvl="1"/>
+            <a:r>
+              <a:rPr lang="en-US" dirty="0"/>
+              <a:t>Paragraphs – an owning sequence of </a:t>
+            </a:r>
+            <a:r>
+              <a:rPr lang="en-US" dirty="0" err="1"/>
+              <a:t>ScrTxtPara</a:t>
+            </a:r>
+            <a:r>
+              <a:rPr lang="en-US" dirty="0"/>
+              <a:t> that contains the content of the footnote.</a:t>
+            </a:r>
+          </a:p>
+          <a:p>
+            <a:endParaRPr lang="en-US" dirty="0"/>
           </a:p>
         </p:txBody>
       </p:sp>
@@ -11621,7 +11771,7 @@
           <p:cNvPr id="2" name="Picture 1">
             <a:extLst>
               <a:ext uri="{FF2B5EF4-FFF2-40B4-BE49-F238E27FC236}">
-                <a16:creationId xmlns:a16="http://schemas.microsoft.com/office/drawing/2014/main" id="{A1C6727D-71A5-421F-96B9-7634D4294030}"/>
+                <a16:creationId xmlns:a16="http://schemas.microsoft.com/office/drawing/2014/main" id="{9757E38B-A6CA-424D-B25D-680C283694C5}"/>
               </a:ext>
             </a:extLst>
           </p:cNvPr>
@@ -11638,8 +11788,8 @@
         </p:blipFill>
         <p:spPr>
           <a:xfrm>
-            <a:off x="5863800" y="0"/>
-            <a:ext cx="4927544" cy="6858000"/>
+            <a:off x="3325893" y="3780366"/>
+            <a:ext cx="7262025" cy="2718405"/>
           </a:xfrm>
           <a:prstGeom prst="rect">
             <a:avLst/>
@@ -11649,7 +11799,7 @@
     </p:spTree>
     <p:extLst>
       <p:ext uri="{BB962C8B-B14F-4D97-AF65-F5344CB8AC3E}">
-        <p14:creationId xmlns:p14="http://schemas.microsoft.com/office/powerpoint/2010/main" val="2556539852"/>
+        <p14:creationId xmlns:p14="http://schemas.microsoft.com/office/powerpoint/2010/main" val="1429828381"/>
       </p:ext>
     </p:extLst>
   </p:cSld>
@@ -11700,13 +11850,20 @@
         </p:spPr>
         <p:txBody>
           <a:bodyPr>
-            <a:normAutofit/>
+            <a:normAutofit fontScale="90000"/>
           </a:bodyPr>
           <a:lstStyle/>
           <a:p>
             <a:r>
               <a:rPr lang="en-US" dirty="0"/>
-              <a:t>Notebook model</a:t>
+              <a:t>Interlinear: Scripture</a:t>
+            </a:r>
+            <a:br>
+              <a:rPr lang="en-US" dirty="0"/>
+            </a:br>
+            <a:r>
+              <a:rPr lang="en-US" dirty="0"/>
+              <a:t> continued</a:t>
             </a:r>
           </a:p>
         </p:txBody>
@@ -11729,8 +11886,8 @@
         </p:nvSpPr>
         <p:spPr>
           <a:xfrm>
-            <a:off x="838200" y="939800"/>
-            <a:ext cx="4979648" cy="5681133"/>
+            <a:off x="838200" y="1055914"/>
+            <a:ext cx="10515600" cy="5565019"/>
           </a:xfrm>
         </p:spPr>
         <p:txBody>
@@ -11739,37 +11896,28 @@
           </a:bodyPr>
           <a:lstStyle/>
           <a:p>
-            <a:r>
-              <a:rPr lang="en-US" dirty="0"/>
-              <a:t>FLEx has a Notebook area that allows a user to record information relating to the culture. Most of the fields in the Notebook are Multi-Paragraph fields with styles for paragraphs and text. A notebook record can reference a text that is an actual Text in Interlinear Texts.</a:t>
-            </a:r>
-          </a:p>
-          <a:p>
-            <a:r>
-              <a:rPr lang="en-US" dirty="0"/>
-              <a:t>Here’s a sample record with a few fields filled in, and how it looks from a linked </a:t>
-            </a:r>
-            <a:r>
-              <a:rPr lang="en-US"/>
-              <a:t>interlinear text.</a:t>
-            </a:r>
-            <a:endParaRPr lang="en-US" dirty="0"/>
-          </a:p>
-          <a:p>
-            <a:endParaRPr lang="en-US" dirty="0"/>
+            <a:pPr marL="0" indent="0">
+              <a:buNone/>
+            </a:pPr>
+            <a:r>
+              <a:rPr lang="en-US" dirty="0"/>
+              <a:t> </a:t>
+            </a:r>
           </a:p>
         </p:txBody>
       </p:sp>
       <p:pic>
         <p:nvPicPr>
-          <p:cNvPr id="6" name="Picture 5">
-            <a:extLst>
-              <a:ext uri="{FF2B5EF4-FFF2-40B4-BE49-F238E27FC236}">
-                <a16:creationId xmlns:a16="http://schemas.microsoft.com/office/drawing/2014/main" id="{A612A30B-B2D5-4E94-B585-7F1C34576E41}"/>
-              </a:ext>
-            </a:extLst>
-          </p:cNvPr>
-          <p:cNvPicPr/>
+          <p:cNvPr id="2" name="Picture 1">
+            <a:extLst>
+              <a:ext uri="{FF2B5EF4-FFF2-40B4-BE49-F238E27FC236}">
+                <a16:creationId xmlns:a16="http://schemas.microsoft.com/office/drawing/2014/main" id="{A1C6727D-71A5-421F-96B9-7634D4294030}"/>
+              </a:ext>
+            </a:extLst>
+          </p:cNvPr>
+          <p:cNvPicPr>
+            <a:picLocks noChangeAspect="1"/>
+          </p:cNvPicPr>
           <p:nvPr/>
         </p:nvPicPr>
         <p:blipFill>
@@ -11780,38 +11928,8 @@
         </p:blipFill>
         <p:spPr>
           <a:xfrm>
-            <a:off x="7796223" y="0"/>
-            <a:ext cx="3187463" cy="3071346"/>
-          </a:xfrm>
-          <a:prstGeom prst="rect">
-            <a:avLst/>
-          </a:prstGeom>
-        </p:spPr>
-      </p:pic>
-      <p:pic>
-        <p:nvPicPr>
-          <p:cNvPr id="2" name="Picture 1">
-            <a:extLst>
-              <a:ext uri="{FF2B5EF4-FFF2-40B4-BE49-F238E27FC236}">
-                <a16:creationId xmlns:a16="http://schemas.microsoft.com/office/drawing/2014/main" id="{E74DB68B-92D1-4D55-B943-D98DB14BDD5C}"/>
-              </a:ext>
-            </a:extLst>
-          </p:cNvPr>
-          <p:cNvPicPr>
-            <a:picLocks noChangeAspect="1"/>
-          </p:cNvPicPr>
-          <p:nvPr/>
-        </p:nvPicPr>
-        <p:blipFill>
-          <a:blip r:embed="rId3"/>
-          <a:stretch>
-            <a:fillRect/>
-          </a:stretch>
-        </p:blipFill>
-        <p:spPr>
-          <a:xfrm>
-            <a:off x="6730136" y="3195607"/>
-            <a:ext cx="4471265" cy="3662393"/>
+            <a:off x="5863800" y="0"/>
+            <a:ext cx="4927544" cy="6858000"/>
           </a:xfrm>
           <a:prstGeom prst="rect">
             <a:avLst/>
@@ -11821,7 +11939,7 @@
     </p:spTree>
     <p:extLst>
       <p:ext uri="{BB962C8B-B14F-4D97-AF65-F5344CB8AC3E}">
-        <p14:creationId xmlns:p14="http://schemas.microsoft.com/office/powerpoint/2010/main" val="331615815"/>
+        <p14:creationId xmlns:p14="http://schemas.microsoft.com/office/powerpoint/2010/main" val="2556539852"/>
       </p:ext>
     </p:extLst>
   </p:cSld>
@@ -11878,7 +11996,7 @@
           <a:p>
             <a:r>
               <a:rPr lang="en-US" dirty="0"/>
-              <a:t>Notebook model continued</a:t>
+              <a:t>Notebook model</a:t>
             </a:r>
           </a:p>
         </p:txBody>
@@ -11902,7 +12020,7 @@
         <p:spPr>
           <a:xfrm>
             <a:off x="838200" y="939800"/>
-            <a:ext cx="10515600" cy="5681133"/>
+            <a:ext cx="4979648" cy="5681133"/>
           </a:xfrm>
         </p:spPr>
         <p:txBody>
@@ -11913,17 +12031,31 @@
           <a:p>
             <a:r>
               <a:rPr lang="en-US" dirty="0"/>
-              <a:t>This is represented in FLEx as</a:t>
-            </a:r>
+              <a:t>FLEx has a Notebook area that allows a user to record information relating to the culture. Most of the fields in the Notebook are Multi-Paragraph fields with styles for paragraphs and text. A notebook record can reference a text that is an actual Text in Interlinear Texts.</a:t>
+            </a:r>
+          </a:p>
+          <a:p>
+            <a:r>
+              <a:rPr lang="en-US" dirty="0"/>
+              <a:t>Here’s a sample record with a few fields filled in, and how it looks from a linked </a:t>
+            </a:r>
+            <a:r>
+              <a:rPr lang="en-US"/>
+              <a:t>interlinear text.</a:t>
+            </a:r>
+            <a:endParaRPr lang="en-US" dirty="0"/>
+          </a:p>
+          <a:p>
+            <a:endParaRPr lang="en-US" dirty="0"/>
           </a:p>
         </p:txBody>
       </p:sp>
       <p:pic>
         <p:nvPicPr>
-          <p:cNvPr id="8" name="Picture 7">
-            <a:extLst>
-              <a:ext uri="{FF2B5EF4-FFF2-40B4-BE49-F238E27FC236}">
-                <a16:creationId xmlns:a16="http://schemas.microsoft.com/office/drawing/2014/main" id="{C9FB2C51-88C4-4075-864B-59406CC7809C}"/>
+          <p:cNvPr id="6" name="Picture 5">
+            <a:extLst>
+              <a:ext uri="{FF2B5EF4-FFF2-40B4-BE49-F238E27FC236}">
+                <a16:creationId xmlns:a16="http://schemas.microsoft.com/office/drawing/2014/main" id="{A612A30B-B2D5-4E94-B585-7F1C34576E41}"/>
               </a:ext>
             </a:extLst>
           </p:cNvPr>
@@ -11938,8 +12070,38 @@
         </p:blipFill>
         <p:spPr>
           <a:xfrm>
-            <a:off x="1104464" y="1388686"/>
-            <a:ext cx="7356082" cy="3682934"/>
+            <a:off x="7796223" y="0"/>
+            <a:ext cx="3187463" cy="3071346"/>
+          </a:xfrm>
+          <a:prstGeom prst="rect">
+            <a:avLst/>
+          </a:prstGeom>
+        </p:spPr>
+      </p:pic>
+      <p:pic>
+        <p:nvPicPr>
+          <p:cNvPr id="2" name="Picture 1">
+            <a:extLst>
+              <a:ext uri="{FF2B5EF4-FFF2-40B4-BE49-F238E27FC236}">
+                <a16:creationId xmlns:a16="http://schemas.microsoft.com/office/drawing/2014/main" id="{E74DB68B-92D1-4D55-B943-D98DB14BDD5C}"/>
+              </a:ext>
+            </a:extLst>
+          </p:cNvPr>
+          <p:cNvPicPr>
+            <a:picLocks noChangeAspect="1"/>
+          </p:cNvPicPr>
+          <p:nvPr/>
+        </p:nvPicPr>
+        <p:blipFill>
+          <a:blip r:embed="rId3"/>
+          <a:stretch>
+            <a:fillRect/>
+          </a:stretch>
+        </p:blipFill>
+        <p:spPr>
+          <a:xfrm>
+            <a:off x="6730136" y="3195607"/>
+            <a:ext cx="4471265" cy="3662393"/>
           </a:xfrm>
           <a:prstGeom prst="rect">
             <a:avLst/>
@@ -11949,7 +12111,7 @@
     </p:spTree>
     <p:extLst>
       <p:ext uri="{BB962C8B-B14F-4D97-AF65-F5344CB8AC3E}">
-        <p14:creationId xmlns:p14="http://schemas.microsoft.com/office/powerpoint/2010/main" val="2604125279"/>
+        <p14:creationId xmlns:p14="http://schemas.microsoft.com/office/powerpoint/2010/main" val="331615815"/>
       </p:ext>
     </p:extLst>
   </p:cSld>
@@ -12035,167 +12197,390 @@
         </p:spPr>
         <p:txBody>
           <a:bodyPr>
-            <a:normAutofit fontScale="92500" lnSpcReduction="20000"/>
+            <a:normAutofit/>
           </a:bodyPr>
           <a:lstStyle/>
           <a:p>
             <a:r>
-              <a:rPr lang="en-US" dirty="0" err="1"/>
+              <a:rPr lang="en-US" dirty="0"/>
+              <a:t>This is represented in FLEx as</a:t>
+            </a:r>
+          </a:p>
+        </p:txBody>
+      </p:sp>
+      <p:pic>
+        <p:nvPicPr>
+          <p:cNvPr id="8" name="Picture 7">
+            <a:extLst>
+              <a:ext uri="{FF2B5EF4-FFF2-40B4-BE49-F238E27FC236}">
+                <a16:creationId xmlns:a16="http://schemas.microsoft.com/office/drawing/2014/main" id="{C9FB2C51-88C4-4075-864B-59406CC7809C}"/>
+              </a:ext>
+            </a:extLst>
+          </p:cNvPr>
+          <p:cNvPicPr/>
+          <p:nvPr/>
+        </p:nvPicPr>
+        <p:blipFill>
+          <a:blip r:embed="rId2"/>
+          <a:stretch>
+            <a:fillRect/>
+          </a:stretch>
+        </p:blipFill>
+        <p:spPr>
+          <a:xfrm>
+            <a:off x="292902" y="1864675"/>
+            <a:ext cx="7356082" cy="3682934"/>
+          </a:xfrm>
+          <a:prstGeom prst="rect">
+            <a:avLst/>
+          </a:prstGeom>
+        </p:spPr>
+      </p:pic>
+      <p:sp>
+        <p:nvSpPr>
+          <p:cNvPr id="2" name="TextBox 1">
+            <a:extLst>
+              <a:ext uri="{FF2B5EF4-FFF2-40B4-BE49-F238E27FC236}">
+                <a16:creationId xmlns:a16="http://schemas.microsoft.com/office/drawing/2014/main" id="{9B588C41-87A8-40D3-ADB8-688C41FDE38F}"/>
+              </a:ext>
+            </a:extLst>
+          </p:cNvPr>
+          <p:cNvSpPr txBox="1"/>
+          <p:nvPr/>
+        </p:nvSpPr>
+        <p:spPr>
+          <a:xfrm>
+            <a:off x="7475617" y="4248296"/>
+            <a:ext cx="4436007" cy="830997"/>
+          </a:xfrm>
+          <a:prstGeom prst="rect">
+            <a:avLst/>
+          </a:prstGeom>
+          <a:noFill/>
+        </p:spPr>
+        <p:txBody>
+          <a:bodyPr wrap="square" rtlCol="0">
+            <a:spAutoFit/>
+          </a:bodyPr>
+          <a:lstStyle/>
+          <a:p>
+            <a:r>
+              <a:rPr lang="en-US" sz="1600" dirty="0" err="1"/>
+              <a:t>AnthroCodes</a:t>
+            </a:r>
+            <a:r>
+              <a:rPr lang="en-US" sz="1600" dirty="0"/>
+              <a:t> reference collection to </a:t>
+            </a:r>
+            <a:r>
+              <a:rPr lang="en-US" sz="1600" dirty="0" err="1"/>
+              <a:t>CmAnthroItem</a:t>
+            </a:r>
+            <a:r>
+              <a:rPr lang="en-US" sz="1600" dirty="0"/>
+              <a:t>. The display typically shows the abbreviation and name of the </a:t>
+            </a:r>
+            <a:r>
+              <a:rPr lang="en-US" sz="1600" dirty="0" err="1"/>
+              <a:t>anthro</a:t>
+            </a:r>
+            <a:r>
+              <a:rPr lang="en-US" sz="1600" dirty="0"/>
+              <a:t> items.</a:t>
+            </a:r>
+          </a:p>
+        </p:txBody>
+      </p:sp>
+      <p:sp>
+        <p:nvSpPr>
+          <p:cNvPr id="3" name="TextBox 2">
+            <a:extLst>
+              <a:ext uri="{FF2B5EF4-FFF2-40B4-BE49-F238E27FC236}">
+                <a16:creationId xmlns:a16="http://schemas.microsoft.com/office/drawing/2014/main" id="{A9D94EC3-F427-4D70-A8F1-3C1B33A20F28}"/>
+              </a:ext>
+            </a:extLst>
+          </p:cNvPr>
+          <p:cNvSpPr txBox="1"/>
+          <p:nvPr/>
+        </p:nvSpPr>
+        <p:spPr>
+          <a:xfrm>
+            <a:off x="5183614" y="4531793"/>
+            <a:ext cx="2166743" cy="1077218"/>
+          </a:xfrm>
+          <a:prstGeom prst="rect">
+            <a:avLst/>
+          </a:prstGeom>
+          <a:noFill/>
+        </p:spPr>
+        <p:txBody>
+          <a:bodyPr wrap="square" rtlCol="0">
+            <a:spAutoFit/>
+          </a:bodyPr>
+          <a:lstStyle/>
+          <a:p>
+            <a:r>
+              <a:rPr lang="en-US" sz="1600" dirty="0"/>
+              <a:t>Locations reference collection to </a:t>
+            </a:r>
+            <a:r>
+              <a:rPr lang="en-US" sz="1600" dirty="0" err="1"/>
+              <a:t>CmLocation</a:t>
+            </a:r>
+            <a:r>
+              <a:rPr lang="en-US" sz="1600" dirty="0"/>
+              <a:t> objects in the Locations list.</a:t>
+            </a:r>
+          </a:p>
+        </p:txBody>
+      </p:sp>
+      <p:sp>
+        <p:nvSpPr>
+          <p:cNvPr id="6" name="TextBox 5">
+            <a:extLst>
+              <a:ext uri="{FF2B5EF4-FFF2-40B4-BE49-F238E27FC236}">
+                <a16:creationId xmlns:a16="http://schemas.microsoft.com/office/drawing/2014/main" id="{B378F6E2-FDF0-40AA-BB6E-442F0D886D14}"/>
+              </a:ext>
+            </a:extLst>
+          </p:cNvPr>
+          <p:cNvSpPr txBox="1"/>
+          <p:nvPr/>
+        </p:nvSpPr>
+        <p:spPr>
+          <a:xfrm>
+            <a:off x="2639468" y="5221926"/>
+            <a:ext cx="2404997" cy="1077218"/>
+          </a:xfrm>
+          <a:prstGeom prst="rect">
+            <a:avLst/>
+          </a:prstGeom>
+          <a:noFill/>
+        </p:spPr>
+        <p:txBody>
+          <a:bodyPr wrap="square" rtlCol="0">
+            <a:spAutoFit/>
+          </a:bodyPr>
+          <a:lstStyle/>
+          <a:p>
+            <a:r>
+              <a:rPr lang="en-US" sz="1600" dirty="0"/>
+              <a:t>Type property referencing one of the </a:t>
+            </a:r>
+            <a:r>
+              <a:rPr lang="en-US" sz="1600" dirty="0" err="1"/>
+              <a:t>CmPossibility</a:t>
+            </a:r>
+            <a:r>
+              <a:rPr lang="en-US" sz="1600" dirty="0"/>
+              <a:t> items in the Notebook Record Types list.</a:t>
+            </a:r>
+          </a:p>
+        </p:txBody>
+      </p:sp>
+      <p:sp>
+        <p:nvSpPr>
+          <p:cNvPr id="7" name="TextBox 6">
+            <a:extLst>
+              <a:ext uri="{FF2B5EF4-FFF2-40B4-BE49-F238E27FC236}">
+                <a16:creationId xmlns:a16="http://schemas.microsoft.com/office/drawing/2014/main" id="{F1E0FB6C-6B38-4A23-985E-43DD1B6BCCA6}"/>
+              </a:ext>
+            </a:extLst>
+          </p:cNvPr>
+          <p:cNvSpPr txBox="1"/>
+          <p:nvPr/>
+        </p:nvSpPr>
+        <p:spPr>
+          <a:xfrm>
+            <a:off x="6939419" y="3354927"/>
+            <a:ext cx="5135671" cy="830997"/>
+          </a:xfrm>
+          <a:prstGeom prst="rect">
+            <a:avLst/>
+          </a:prstGeom>
+          <a:noFill/>
+        </p:spPr>
+        <p:txBody>
+          <a:bodyPr wrap="square" rtlCol="0">
+            <a:spAutoFit/>
+          </a:bodyPr>
+          <a:lstStyle/>
+          <a:p>
+            <a:r>
+              <a:rPr lang="en-US" sz="1600" dirty="0"/>
+              <a:t>Participants property references </a:t>
+            </a:r>
+            <a:r>
+              <a:rPr lang="en-US" sz="1600" dirty="0" err="1"/>
+              <a:t>CmPerson</a:t>
+            </a:r>
+            <a:r>
+              <a:rPr lang="en-US" sz="1600" dirty="0"/>
+              <a:t> objects from the People list. It also has a Role atomic reference to </a:t>
+            </a:r>
+            <a:r>
+              <a:rPr lang="en-US" sz="1600" dirty="0" err="1"/>
+              <a:t>CmPossibility</a:t>
+            </a:r>
+            <a:r>
+              <a:rPr lang="en-US" sz="1600" dirty="0"/>
+              <a:t> from the Roles list.</a:t>
+            </a:r>
+          </a:p>
+        </p:txBody>
+      </p:sp>
+      <p:sp>
+        <p:nvSpPr>
+          <p:cNvPr id="9" name="TextBox 8">
+            <a:extLst>
+              <a:ext uri="{FF2B5EF4-FFF2-40B4-BE49-F238E27FC236}">
+                <a16:creationId xmlns:a16="http://schemas.microsoft.com/office/drawing/2014/main" id="{26182A93-5D9D-48BA-AFBC-D62BBFE13258}"/>
+              </a:ext>
+            </a:extLst>
+          </p:cNvPr>
+          <p:cNvSpPr txBox="1"/>
+          <p:nvPr/>
+        </p:nvSpPr>
+        <p:spPr>
+          <a:xfrm>
+            <a:off x="6576165" y="2560391"/>
+            <a:ext cx="5381772" cy="830997"/>
+          </a:xfrm>
+          <a:prstGeom prst="rect">
+            <a:avLst/>
+          </a:prstGeom>
+          <a:noFill/>
+        </p:spPr>
+        <p:txBody>
+          <a:bodyPr wrap="square" rtlCol="0">
+            <a:spAutoFit/>
+          </a:bodyPr>
+          <a:lstStyle/>
+          <a:p>
+            <a:r>
+              <a:rPr lang="en-US" sz="1600" dirty="0"/>
+              <a:t>Description, and several other fields, are atomic owning properties holding a </a:t>
+            </a:r>
+            <a:r>
+              <a:rPr lang="en-US" sz="1600" dirty="0" err="1"/>
+              <a:t>StText</a:t>
+            </a:r>
+            <a:r>
+              <a:rPr lang="en-US" sz="1600" dirty="0"/>
+              <a:t>, which owns any number of </a:t>
+            </a:r>
+            <a:r>
+              <a:rPr lang="en-US" sz="1600" dirty="0" err="1"/>
+              <a:t>StTxtPara</a:t>
+            </a:r>
+            <a:r>
+              <a:rPr lang="en-US" sz="1600" dirty="0"/>
+              <a:t> objects that can have paragraph and character styles.</a:t>
+            </a:r>
+          </a:p>
+        </p:txBody>
+      </p:sp>
+      <p:sp>
+        <p:nvSpPr>
+          <p:cNvPr id="10" name="TextBox 9">
+            <a:extLst>
+              <a:ext uri="{FF2B5EF4-FFF2-40B4-BE49-F238E27FC236}">
+                <a16:creationId xmlns:a16="http://schemas.microsoft.com/office/drawing/2014/main" id="{FA35EC14-401D-4595-A15B-3B4E2356A22F}"/>
+              </a:ext>
+            </a:extLst>
+          </p:cNvPr>
+          <p:cNvSpPr txBox="1"/>
+          <p:nvPr/>
+        </p:nvSpPr>
+        <p:spPr>
+          <a:xfrm>
+            <a:off x="7761718" y="988900"/>
+            <a:ext cx="4196219" cy="1569660"/>
+          </a:xfrm>
+          <a:prstGeom prst="rect">
+            <a:avLst/>
+          </a:prstGeom>
+          <a:noFill/>
+        </p:spPr>
+        <p:txBody>
+          <a:bodyPr wrap="square" rtlCol="0">
+            <a:spAutoFit/>
+          </a:bodyPr>
+          <a:lstStyle/>
+          <a:p>
+            <a:r>
+              <a:rPr lang="en-US" sz="1600" dirty="0"/>
+              <a:t>Optional Text that shows up in Interlinear Text. It does this through the atomic reference Text property. The view in the Notebook just shows the baseline text. The view in the Interlinear Text Info tab shows some of the information from the Notebook record.</a:t>
+            </a:r>
+          </a:p>
+        </p:txBody>
+      </p:sp>
+      <p:sp>
+        <p:nvSpPr>
+          <p:cNvPr id="11" name="TextBox 10">
+            <a:extLst>
+              <a:ext uri="{FF2B5EF4-FFF2-40B4-BE49-F238E27FC236}">
+                <a16:creationId xmlns:a16="http://schemas.microsoft.com/office/drawing/2014/main" id="{11883BBC-9F07-4ABC-9C52-5DD09D684780}"/>
+              </a:ext>
+            </a:extLst>
+          </p:cNvPr>
+          <p:cNvSpPr txBox="1"/>
+          <p:nvPr/>
+        </p:nvSpPr>
+        <p:spPr>
+          <a:xfrm>
+            <a:off x="7340252" y="1"/>
+            <a:ext cx="4196219" cy="1077218"/>
+          </a:xfrm>
+          <a:prstGeom prst="rect">
+            <a:avLst/>
+          </a:prstGeom>
+          <a:noFill/>
+        </p:spPr>
+        <p:txBody>
+          <a:bodyPr wrap="square" rtlCol="0">
+            <a:spAutoFit/>
+          </a:bodyPr>
+          <a:lstStyle/>
+          <a:p>
+            <a:r>
+              <a:rPr lang="en-US" sz="1600" dirty="0" err="1"/>
               <a:t>RnResearchNbk</a:t>
             </a:r>
             <a:r>
-              <a:rPr lang="en-US" dirty="0"/>
+              <a:rPr lang="en-US" sz="1600" dirty="0"/>
               <a:t> is owned in </a:t>
             </a:r>
             <a:r>
-              <a:rPr lang="en-US" dirty="0" err="1"/>
+              <a:rPr lang="en-US" sz="1600" dirty="0" err="1"/>
               <a:t>LangProject</a:t>
             </a:r>
             <a:r>
-              <a:rPr lang="en-US" dirty="0"/>
+              <a:rPr lang="en-US" sz="1600" dirty="0"/>
               <a:t> in atomic owning </a:t>
             </a:r>
             <a:r>
-              <a:rPr lang="en-US" dirty="0" err="1"/>
+              <a:rPr lang="en-US" sz="1600" dirty="0" err="1"/>
               <a:t>ResearchNotebook</a:t>
             </a:r>
             <a:r>
-              <a:rPr lang="en-US" dirty="0"/>
+              <a:rPr lang="en-US" sz="1600" dirty="0"/>
               <a:t> property. </a:t>
             </a:r>
             <a:r>
-              <a:rPr lang="en-US" dirty="0" err="1"/>
+              <a:rPr lang="en-US" sz="1600" dirty="0" err="1"/>
               <a:t>RnReserachNbk</a:t>
             </a:r>
             <a:r>
-              <a:rPr lang="en-US" dirty="0"/>
+              <a:rPr lang="en-US" sz="1600" dirty="0"/>
               <a:t> has a Records owning collection of </a:t>
             </a:r>
             <a:r>
-              <a:rPr lang="en-US" dirty="0" err="1"/>
+              <a:rPr lang="en-US" sz="1600" dirty="0" err="1"/>
               <a:t>RnGenericRec</a:t>
             </a:r>
             <a:r>
-              <a:rPr lang="en-US" dirty="0"/>
-              <a:t> which includes the properties shown in this example, plus other ones including custom fields. The Title is a String. A </a:t>
-            </a:r>
-            <a:r>
-              <a:rPr lang="en-US" dirty="0" err="1"/>
-              <a:t>RnGenericRec</a:t>
-            </a:r>
-            <a:r>
-              <a:rPr lang="en-US" dirty="0"/>
-              <a:t> can be linked to a Text that shows up in Interlinear Text. It does this through the atomic reference Text property. The view in the Notebook just shows the baseline text. The view in the Interlinear Text Info tab shows some of the information from the Notebook record.</a:t>
-            </a:r>
-          </a:p>
-          <a:p>
-            <a:r>
-              <a:rPr lang="en-US" dirty="0"/>
-              <a:t>The Description is an owning atomic property holding a </a:t>
-            </a:r>
-            <a:r>
-              <a:rPr lang="en-US" dirty="0" err="1"/>
-              <a:t>StText</a:t>
-            </a:r>
-            <a:r>
-              <a:rPr lang="en-US" dirty="0"/>
-              <a:t>, which owns any number of </a:t>
-            </a:r>
-            <a:r>
-              <a:rPr lang="en-US" dirty="0" err="1"/>
-              <a:t>StTxtPara</a:t>
-            </a:r>
-            <a:r>
-              <a:rPr lang="en-US" dirty="0"/>
-              <a:t> objects that can have paragraph and character styles. The Participants field is an owning collection of </a:t>
-            </a:r>
-            <a:r>
-              <a:rPr lang="en-US" dirty="0" err="1"/>
-              <a:t>RnRoledPartic</a:t>
-            </a:r>
-            <a:r>
-              <a:rPr lang="en-US" dirty="0"/>
-              <a:t>. </a:t>
-            </a:r>
-            <a:r>
-              <a:rPr lang="en-US" dirty="0" err="1"/>
-              <a:t>RnRoledPartic</a:t>
-            </a:r>
-            <a:r>
-              <a:rPr lang="en-US" dirty="0"/>
-              <a:t> has reference collection Participants property referencing </a:t>
-            </a:r>
-            <a:r>
-              <a:rPr lang="en-US" dirty="0" err="1"/>
-              <a:t>CmPerson</a:t>
-            </a:r>
-            <a:r>
-              <a:rPr lang="en-US" dirty="0"/>
-              <a:t> objects from the People list. It also has a Role atomic reference to </a:t>
-            </a:r>
-            <a:r>
-              <a:rPr lang="en-US" dirty="0" err="1"/>
-              <a:t>CmPossibility</a:t>
-            </a:r>
-            <a:r>
-              <a:rPr lang="en-US" dirty="0"/>
-              <a:t> from the Roles list. </a:t>
-            </a:r>
-            <a:r>
-              <a:rPr lang="en-US" dirty="0" err="1"/>
-              <a:t>RnGenericRec</a:t>
-            </a:r>
-            <a:r>
-              <a:rPr lang="en-US" dirty="0"/>
-              <a:t> has an </a:t>
-            </a:r>
-            <a:r>
-              <a:rPr lang="en-US" dirty="0" err="1"/>
-              <a:t>AnthroCodes</a:t>
-            </a:r>
-            <a:r>
-              <a:rPr lang="en-US" dirty="0"/>
-              <a:t> reference collection to </a:t>
-            </a:r>
-            <a:r>
-              <a:rPr lang="en-US" dirty="0" err="1"/>
-              <a:t>CmAnthroItem</a:t>
-            </a:r>
-            <a:r>
-              <a:rPr lang="en-US" dirty="0"/>
-              <a:t>. The display typically shows the abbreviation and name of the </a:t>
-            </a:r>
-            <a:r>
-              <a:rPr lang="en-US" dirty="0" err="1"/>
-              <a:t>anthro</a:t>
-            </a:r>
-            <a:r>
-              <a:rPr lang="en-US" dirty="0"/>
-              <a:t> items. </a:t>
-            </a:r>
-            <a:r>
-              <a:rPr lang="en-US" dirty="0" err="1"/>
-              <a:t>RnGenericRec</a:t>
-            </a:r>
-            <a:r>
-              <a:rPr lang="en-US" dirty="0"/>
-              <a:t> has a Locations reference collection to </a:t>
-            </a:r>
-            <a:r>
-              <a:rPr lang="en-US" dirty="0" err="1"/>
-              <a:t>CmLocation</a:t>
-            </a:r>
-            <a:r>
-              <a:rPr lang="en-US" dirty="0"/>
-              <a:t> objects in the Locations list. It also has an atomic reference Type property referencing one of the </a:t>
-            </a:r>
-            <a:r>
-              <a:rPr lang="en-US" dirty="0" err="1"/>
-              <a:t>CmPossibility</a:t>
-            </a:r>
-            <a:r>
-              <a:rPr lang="en-US" dirty="0"/>
-              <a:t> items in the Notebook Record Types list.</a:t>
+              <a:rPr lang="en-US" sz="1600" dirty="0"/>
+              <a:t>.</a:t>
             </a:r>
           </a:p>
         </p:txBody>
@@ -12203,7 +12588,7 @@
     </p:spTree>
     <p:extLst>
       <p:ext uri="{BB962C8B-B14F-4D97-AF65-F5344CB8AC3E}">
-        <p14:creationId xmlns:p14="http://schemas.microsoft.com/office/powerpoint/2010/main" val="4230420870"/>
+        <p14:creationId xmlns:p14="http://schemas.microsoft.com/office/powerpoint/2010/main" val="2604125279"/>
       </p:ext>
     </p:extLst>
   </p:cSld>
@@ -12456,7 +12841,10 @@
           <a:bodyPr/>
           <a:lstStyle/>
           <a:p>
-            <a:endParaRPr lang="en-US" dirty="0"/>
+            <a:r>
+              <a:rPr lang="en-US" dirty="0"/>
+              <a:t>Documentation</a:t>
+            </a:r>
           </a:p>
         </p:txBody>
       </p:sp>
@@ -12487,6 +12875,32 @@
             <a:normAutofit/>
           </a:bodyPr>
           <a:lstStyle/>
+          <a:p>
+            <a:r>
+              <a:rPr lang="en-US" dirty="0"/>
+              <a:t>FLEx 9.1 Conceptual Model documentation covered in these webinars is available as “FLEx 9.1 Conceptual model.pdf”</a:t>
+            </a:r>
+            <a:br>
+              <a:rPr lang="en-US" dirty="0"/>
+            </a:br>
+            <a:r>
+              <a:rPr lang="en-US" dirty="0"/>
+              <a:t>in software.sil.org/fieldworks/support/technical-documents</a:t>
+            </a:r>
+            <a:br>
+              <a:rPr lang="en-US" dirty="0"/>
+            </a:br>
+            <a:r>
+              <a:rPr lang="en-US" dirty="0">
+                <a:hlinkClick r:id="rId2"/>
+              </a:rPr>
+              <a:t>https://downloads.languagetechnology.org/fieldworks/Documentation/FLEx%209.1%20Conceptual%20Model.pdf</a:t>
+            </a:r>
+            <a:r>
+              <a:rPr lang="en-US" dirty="0"/>
+              <a:t> (The file also has a link to a Flex 9.1 sample project used in this document, as well as the three PowerPoint presentations.)</a:t>
+            </a:r>
+          </a:p>
           <a:p>
             <a:endParaRPr lang="en-US" dirty="0"/>
           </a:p>
@@ -12593,7 +13007,7 @@
             </a:r>
             <a:r>
               <a:rPr lang="en-US" dirty="0"/>
-              <a:t>’ and the citation form as ‘manger’. In the Grammatical Info Details section the entry is classified as a verb, and the Inflection Class is set to ER Verbs.</a:t>
+              <a:t>’ and the citation form as ‘manger’. In the Grammatical Info Details section, the entry is classified as a verb, and the Inflection Class is set to ER Verbs.</a:t>
             </a:r>
           </a:p>
           <a:p>
@@ -13189,7 +13603,7 @@
             <a:pPr lvl="1"/>
             <a:r>
               <a:rPr lang="en-US" dirty="0"/>
-              <a:t>Contents – atomic owning holding a </a:t>
+              <a:t>Contents – atomic owning property holding a </a:t>
             </a:r>
             <a:r>
               <a:rPr lang="en-US" dirty="0" err="1"/>
@@ -13251,7 +13665,7 @@
             </a:r>
             <a:r>
               <a:rPr lang="en-US" dirty="0"/>
-              <a:t> in the Genres list. This allows texts to be hierarchically arranged in the Choose Tools dialog making it easier to filter on certain types of text.</a:t>
+              <a:t> in the Genres list. This allows texts to be hierarchically arranged in the Choose Texts dialog making it easier to filter on certain types of text.</a:t>
             </a:r>
           </a:p>
           <a:p>

--- a/HelpResourcesSources/TechnicalNotes/FLEx 9.1 Conceptual Model - Grammar and interlinear model.pptx
+++ b/HelpResourcesSources/TechnicalNotes/FLEx 9.1 Conceptual Model - Grammar and interlinear model.pptx
@@ -320,7 +320,7 @@
           <a:p>
             <a:fld id="{33088F3C-9E81-4E49-8427-25161F1C0BC9}" type="datetimeFigureOut">
               <a:rPr lang="en-US" smtClean="0"/>
-              <a:t>6/21/2024</a:t>
+              <a:t>6/25/2024</a:t>
             </a:fld>
             <a:endParaRPr lang="en-US" dirty="0"/>
           </a:p>
@@ -518,7 +518,7 @@
           <a:p>
             <a:fld id="{33088F3C-9E81-4E49-8427-25161F1C0BC9}" type="datetimeFigureOut">
               <a:rPr lang="en-US" smtClean="0"/>
-              <a:t>6/21/2024</a:t>
+              <a:t>6/25/2024</a:t>
             </a:fld>
             <a:endParaRPr lang="en-US" dirty="0"/>
           </a:p>
@@ -726,7 +726,7 @@
           <a:p>
             <a:fld id="{33088F3C-9E81-4E49-8427-25161F1C0BC9}" type="datetimeFigureOut">
               <a:rPr lang="en-US" smtClean="0"/>
-              <a:t>6/21/2024</a:t>
+              <a:t>6/25/2024</a:t>
             </a:fld>
             <a:endParaRPr lang="en-US" dirty="0"/>
           </a:p>
@@ -924,7 +924,7 @@
           <a:p>
             <a:fld id="{33088F3C-9E81-4E49-8427-25161F1C0BC9}" type="datetimeFigureOut">
               <a:rPr lang="en-US" smtClean="0"/>
-              <a:t>6/21/2024</a:t>
+              <a:t>6/25/2024</a:t>
             </a:fld>
             <a:endParaRPr lang="en-US" dirty="0"/>
           </a:p>
@@ -1199,7 +1199,7 @@
           <a:p>
             <a:fld id="{33088F3C-9E81-4E49-8427-25161F1C0BC9}" type="datetimeFigureOut">
               <a:rPr lang="en-US" smtClean="0"/>
-              <a:t>6/21/2024</a:t>
+              <a:t>6/25/2024</a:t>
             </a:fld>
             <a:endParaRPr lang="en-US" dirty="0"/>
           </a:p>
@@ -1464,7 +1464,7 @@
           <a:p>
             <a:fld id="{33088F3C-9E81-4E49-8427-25161F1C0BC9}" type="datetimeFigureOut">
               <a:rPr lang="en-US" smtClean="0"/>
-              <a:t>6/21/2024</a:t>
+              <a:t>6/25/2024</a:t>
             </a:fld>
             <a:endParaRPr lang="en-US" dirty="0"/>
           </a:p>
@@ -1876,7 +1876,7 @@
           <a:p>
             <a:fld id="{33088F3C-9E81-4E49-8427-25161F1C0BC9}" type="datetimeFigureOut">
               <a:rPr lang="en-US" smtClean="0"/>
-              <a:t>6/21/2024</a:t>
+              <a:t>6/25/2024</a:t>
             </a:fld>
             <a:endParaRPr lang="en-US" dirty="0"/>
           </a:p>
@@ -2017,7 +2017,7 @@
           <a:p>
             <a:fld id="{33088F3C-9E81-4E49-8427-25161F1C0BC9}" type="datetimeFigureOut">
               <a:rPr lang="en-US" smtClean="0"/>
-              <a:t>6/21/2024</a:t>
+              <a:t>6/25/2024</a:t>
             </a:fld>
             <a:endParaRPr lang="en-US" dirty="0"/>
           </a:p>
@@ -2130,7 +2130,7 @@
           <a:p>
             <a:fld id="{33088F3C-9E81-4E49-8427-25161F1C0BC9}" type="datetimeFigureOut">
               <a:rPr lang="en-US" smtClean="0"/>
-              <a:t>6/21/2024</a:t>
+              <a:t>6/25/2024</a:t>
             </a:fld>
             <a:endParaRPr lang="en-US" dirty="0"/>
           </a:p>
@@ -2441,7 +2441,7 @@
           <a:p>
             <a:fld id="{33088F3C-9E81-4E49-8427-25161F1C0BC9}" type="datetimeFigureOut">
               <a:rPr lang="en-US" smtClean="0"/>
-              <a:t>6/21/2024</a:t>
+              <a:t>6/25/2024</a:t>
             </a:fld>
             <a:endParaRPr lang="en-US" dirty="0"/>
           </a:p>
@@ -2729,7 +2729,7 @@
           <a:p>
             <a:fld id="{33088F3C-9E81-4E49-8427-25161F1C0BC9}" type="datetimeFigureOut">
               <a:rPr lang="en-US" smtClean="0"/>
-              <a:t>6/21/2024</a:t>
+              <a:t>6/25/2024</a:t>
             </a:fld>
             <a:endParaRPr lang="en-US" dirty="0"/>
           </a:p>
@@ -2970,7 +2970,7 @@
           <a:p>
             <a:fld id="{33088F3C-9E81-4E49-8427-25161F1C0BC9}" type="datetimeFigureOut">
               <a:rPr lang="en-US" smtClean="0"/>
-              <a:t>6/21/2024</a:t>
+              <a:t>6/25/2024</a:t>
             </a:fld>
             <a:endParaRPr lang="en-US" dirty="0"/>
           </a:p>
@@ -3445,7 +3445,9 @@
           <a:lstStyle/>
           <a:p>
             <a:r>
-              <a:rPr lang="en-US" dirty="0"/>
+              <a:rPr lang="en-US" b="1" dirty="0">
+                <a:latin typeface="+mn-lt"/>
+              </a:rPr>
               <a:t>FLEx 9.1 Conceptual Model</a:t>
             </a:r>
           </a:p>
@@ -3478,7 +3480,7 @@
           <a:lstStyle/>
           <a:p>
             <a:r>
-              <a:rPr lang="en-US" sz="4800" dirty="0"/>
+              <a:rPr lang="en-US" sz="4800" b="1" dirty="0"/>
               <a:t>Grammar and Interlinear model</a:t>
             </a:r>
             <a:br>
@@ -11768,10 +11770,10 @@
       </p:sp>
       <p:pic>
         <p:nvPicPr>
-          <p:cNvPr id="2" name="Picture 1">
-            <a:extLst>
-              <a:ext uri="{FF2B5EF4-FFF2-40B4-BE49-F238E27FC236}">
-                <a16:creationId xmlns:a16="http://schemas.microsoft.com/office/drawing/2014/main" id="{9757E38B-A6CA-424D-B25D-680C283694C5}"/>
+          <p:cNvPr id="3" name="Picture 2">
+            <a:extLst>
+              <a:ext uri="{FF2B5EF4-FFF2-40B4-BE49-F238E27FC236}">
+                <a16:creationId xmlns:a16="http://schemas.microsoft.com/office/drawing/2014/main" id="{3600359A-AA95-4C10-953F-4082AE63ADD2}"/>
               </a:ext>
             </a:extLst>
           </p:cNvPr>
@@ -11788,8 +11790,8 @@
         </p:blipFill>
         <p:spPr>
           <a:xfrm>
-            <a:off x="3325893" y="3780366"/>
-            <a:ext cx="7262025" cy="2718405"/>
+            <a:off x="3550804" y="3860800"/>
+            <a:ext cx="6922511" cy="2512690"/>
           </a:xfrm>
           <a:prstGeom prst="rect">
             <a:avLst/>
@@ -12138,86 +12140,18 @@
           <a:chExt cx="0" cy="0"/>
         </a:xfrm>
       </p:grpSpPr>
-      <p:sp>
-        <p:nvSpPr>
-          <p:cNvPr id="4" name="Title 1">
-            <a:extLst>
-              <a:ext uri="{FF2B5EF4-FFF2-40B4-BE49-F238E27FC236}">
-                <a16:creationId xmlns:a16="http://schemas.microsoft.com/office/drawing/2014/main" id="{D020DABE-C917-4086-9913-77F3DFBC8176}"/>
-              </a:ext>
-            </a:extLst>
-          </p:cNvPr>
-          <p:cNvSpPr>
-            <a:spLocks noGrp="1"/>
-          </p:cNvSpPr>
-          <p:nvPr>
-            <p:ph type="title"/>
-          </p:nvPr>
-        </p:nvSpPr>
-        <p:spPr>
-          <a:xfrm>
-            <a:off x="838200" y="136525"/>
-            <a:ext cx="10515600" cy="803275"/>
-          </a:xfrm>
-        </p:spPr>
-        <p:txBody>
-          <a:bodyPr>
-            <a:normAutofit/>
-          </a:bodyPr>
-          <a:lstStyle/>
-          <a:p>
-            <a:r>
-              <a:rPr lang="en-US" dirty="0"/>
-              <a:t>Notebook model continued</a:t>
-            </a:r>
-          </a:p>
-        </p:txBody>
-      </p:sp>
-      <p:sp>
-        <p:nvSpPr>
-          <p:cNvPr id="5" name="Content Placeholder 2">
-            <a:extLst>
-              <a:ext uri="{FF2B5EF4-FFF2-40B4-BE49-F238E27FC236}">
-                <a16:creationId xmlns:a16="http://schemas.microsoft.com/office/drawing/2014/main" id="{54980C95-9B20-461C-8447-ECB43E44F22E}"/>
-              </a:ext>
-            </a:extLst>
-          </p:cNvPr>
-          <p:cNvSpPr>
-            <a:spLocks noGrp="1"/>
-          </p:cNvSpPr>
-          <p:nvPr>
-            <p:ph idx="1"/>
-          </p:nvPr>
-        </p:nvSpPr>
-        <p:spPr>
-          <a:xfrm>
-            <a:off x="838200" y="939800"/>
-            <a:ext cx="10515600" cy="5681133"/>
-          </a:xfrm>
-        </p:spPr>
-        <p:txBody>
-          <a:bodyPr>
-            <a:normAutofit/>
-          </a:bodyPr>
-          <a:lstStyle/>
-          <a:p>
-            <a:r>
-              <a:rPr lang="en-US" dirty="0"/>
-              <a:t>This is represented in FLEx as</a:t>
-            </a:r>
-          </a:p>
-        </p:txBody>
-      </p:sp>
       <p:pic>
         <p:nvPicPr>
-          <p:cNvPr id="8" name="Picture 7">
-            <a:extLst>
-              <a:ext uri="{FF2B5EF4-FFF2-40B4-BE49-F238E27FC236}">
-                <a16:creationId xmlns:a16="http://schemas.microsoft.com/office/drawing/2014/main" id="{C9FB2C51-88C4-4075-864B-59406CC7809C}"/>
-              </a:ext>
-            </a:extLst>
-          </p:cNvPr>
-          <p:cNvPicPr/>
+          <p:cNvPr id="12" name="Picture 11">
+            <a:extLst>
+              <a:ext uri="{FF2B5EF4-FFF2-40B4-BE49-F238E27FC236}">
+                <a16:creationId xmlns:a16="http://schemas.microsoft.com/office/drawing/2014/main" id="{7ABC3E0C-E10B-44F5-AC2B-F1654C5CCD0C}"/>
+              </a:ext>
+            </a:extLst>
+          </p:cNvPr>
+          <p:cNvPicPr>
+            <a:picLocks noChangeAspect="1"/>
+          </p:cNvPicPr>
           <p:nvPr/>
         </p:nvPicPr>
         <p:blipFill>
@@ -12228,14 +12162,84 @@
         </p:blipFill>
         <p:spPr>
           <a:xfrm>
-            <a:off x="292902" y="1864675"/>
-            <a:ext cx="7356082" cy="3682934"/>
+            <a:off x="152275" y="1841418"/>
+            <a:ext cx="7366198" cy="3660613"/>
           </a:xfrm>
           <a:prstGeom prst="rect">
             <a:avLst/>
           </a:prstGeom>
         </p:spPr>
       </p:pic>
+      <p:sp>
+        <p:nvSpPr>
+          <p:cNvPr id="4" name="Title 1">
+            <a:extLst>
+              <a:ext uri="{FF2B5EF4-FFF2-40B4-BE49-F238E27FC236}">
+                <a16:creationId xmlns:a16="http://schemas.microsoft.com/office/drawing/2014/main" id="{D020DABE-C917-4086-9913-77F3DFBC8176}"/>
+              </a:ext>
+            </a:extLst>
+          </p:cNvPr>
+          <p:cNvSpPr>
+            <a:spLocks noGrp="1"/>
+          </p:cNvSpPr>
+          <p:nvPr>
+            <p:ph type="title"/>
+          </p:nvPr>
+        </p:nvSpPr>
+        <p:spPr>
+          <a:xfrm>
+            <a:off x="838200" y="136525"/>
+            <a:ext cx="10515600" cy="803275"/>
+          </a:xfrm>
+        </p:spPr>
+        <p:txBody>
+          <a:bodyPr>
+            <a:normAutofit/>
+          </a:bodyPr>
+          <a:lstStyle/>
+          <a:p>
+            <a:r>
+              <a:rPr lang="en-US" dirty="0"/>
+              <a:t>Notebook model continued</a:t>
+            </a:r>
+          </a:p>
+        </p:txBody>
+      </p:sp>
+      <p:sp>
+        <p:nvSpPr>
+          <p:cNvPr id="5" name="Content Placeholder 2">
+            <a:extLst>
+              <a:ext uri="{FF2B5EF4-FFF2-40B4-BE49-F238E27FC236}">
+                <a16:creationId xmlns:a16="http://schemas.microsoft.com/office/drawing/2014/main" id="{54980C95-9B20-461C-8447-ECB43E44F22E}"/>
+              </a:ext>
+            </a:extLst>
+          </p:cNvPr>
+          <p:cNvSpPr>
+            <a:spLocks noGrp="1"/>
+          </p:cNvSpPr>
+          <p:nvPr>
+            <p:ph idx="1"/>
+          </p:nvPr>
+        </p:nvSpPr>
+        <p:spPr>
+          <a:xfrm>
+            <a:off x="838200" y="939800"/>
+            <a:ext cx="10515600" cy="5681133"/>
+          </a:xfrm>
+        </p:spPr>
+        <p:txBody>
+          <a:bodyPr>
+            <a:normAutofit/>
+          </a:bodyPr>
+          <a:lstStyle/>
+          <a:p>
+            <a:r>
+              <a:rPr lang="en-US" dirty="0"/>
+              <a:t>This is represented in FLEx as</a:t>
+            </a:r>
+          </a:p>
+        </p:txBody>
+      </p:sp>
       <p:sp>
         <p:nvSpPr>
           <p:cNvPr id="2" name="TextBox 1">
@@ -13101,6 +13105,80 @@
           </a:prstGeom>
         </p:spPr>
       </p:pic>
+      <p:sp>
+        <p:nvSpPr>
+          <p:cNvPr id="6" name="TextBox 5">
+            <a:extLst>
+              <a:ext uri="{FF2B5EF4-FFF2-40B4-BE49-F238E27FC236}">
+                <a16:creationId xmlns:a16="http://schemas.microsoft.com/office/drawing/2014/main" id="{C6F527EE-E5C4-4B0F-9451-A5FCFC192CD1}"/>
+              </a:ext>
+            </a:extLst>
+          </p:cNvPr>
+          <p:cNvSpPr txBox="1"/>
+          <p:nvPr/>
+        </p:nvSpPr>
+        <p:spPr>
+          <a:xfrm>
+            <a:off x="8136488" y="796670"/>
+            <a:ext cx="1978267" cy="400110"/>
+          </a:xfrm>
+          <a:prstGeom prst="rect">
+            <a:avLst/>
+          </a:prstGeom>
+          <a:noFill/>
+        </p:spPr>
+        <p:txBody>
+          <a:bodyPr wrap="square" rtlCol="0">
+            <a:spAutoFit/>
+          </a:bodyPr>
+          <a:lstStyle/>
+          <a:p>
+            <a:r>
+              <a:rPr lang="en-US" sz="2000" b="1" dirty="0" err="1"/>
+              <a:t>mang</a:t>
+            </a:r>
+            <a:r>
+              <a:rPr lang="en-US" sz="2000" b="1" dirty="0"/>
+              <a:t> / manger</a:t>
+            </a:r>
+          </a:p>
+        </p:txBody>
+      </p:sp>
+      <p:sp>
+        <p:nvSpPr>
+          <p:cNvPr id="7" name="TextBox 6">
+            <a:extLst>
+              <a:ext uri="{FF2B5EF4-FFF2-40B4-BE49-F238E27FC236}">
+                <a16:creationId xmlns:a16="http://schemas.microsoft.com/office/drawing/2014/main" id="{963664E0-2F07-4D07-B241-58BA0FAAF3BA}"/>
+              </a:ext>
+            </a:extLst>
+          </p:cNvPr>
+          <p:cNvSpPr txBox="1"/>
+          <p:nvPr/>
+        </p:nvSpPr>
+        <p:spPr>
+          <a:xfrm>
+            <a:off x="9616943" y="2376221"/>
+            <a:ext cx="441455" cy="400110"/>
+          </a:xfrm>
+          <a:prstGeom prst="rect">
+            <a:avLst/>
+          </a:prstGeom>
+          <a:noFill/>
+        </p:spPr>
+        <p:txBody>
+          <a:bodyPr wrap="square" rtlCol="0">
+            <a:spAutoFit/>
+          </a:bodyPr>
+          <a:lstStyle/>
+          <a:p>
+            <a:r>
+              <a:rPr lang="en-US" sz="2000" b="1" dirty="0"/>
+              <a:t>-e</a:t>
+            </a:r>
+          </a:p>
+        </p:txBody>
+      </p:sp>
     </p:spTree>
     <p:extLst>
       <p:ext uri="{BB962C8B-B14F-4D97-AF65-F5344CB8AC3E}">
@@ -13239,15 +13317,7 @@
             </a:r>
             <a:r>
               <a:rPr lang="en-US" dirty="0"/>
-              <a:t> connection to </a:t>
-            </a:r>
-            <a:r>
-              <a:rPr lang="en-US" dirty="0" err="1"/>
-              <a:t>varios</a:t>
-            </a:r>
-            <a:r>
-              <a:rPr lang="en-US" dirty="0"/>
-              <a:t> parts of the feature system</a:t>
+              <a:t> connection to various parts of the feature system</a:t>
             </a:r>
           </a:p>
         </p:txBody>
@@ -13274,6 +13344,36 @@
           <a:xfrm>
             <a:off x="6457722" y="46943"/>
             <a:ext cx="5331507" cy="6791132"/>
+          </a:xfrm>
+          <a:prstGeom prst="rect">
+            <a:avLst/>
+          </a:prstGeom>
+        </p:spPr>
+      </p:pic>
+      <p:pic>
+        <p:nvPicPr>
+          <p:cNvPr id="2" name="Picture 1">
+            <a:extLst>
+              <a:ext uri="{FF2B5EF4-FFF2-40B4-BE49-F238E27FC236}">
+                <a16:creationId xmlns:a16="http://schemas.microsoft.com/office/drawing/2014/main" id="{46F15017-E279-4422-BBF5-37FF010633BD}"/>
+              </a:ext>
+            </a:extLst>
+          </p:cNvPr>
+          <p:cNvPicPr>
+            <a:picLocks noChangeAspect="1"/>
+          </p:cNvPicPr>
+          <p:nvPr/>
+        </p:nvPicPr>
+        <p:blipFill>
+          <a:blip r:embed="rId3"/>
+          <a:stretch>
+            <a:fillRect/>
+          </a:stretch>
+        </p:blipFill>
+        <p:spPr>
+          <a:xfrm>
+            <a:off x="1259382" y="4493845"/>
+            <a:ext cx="4171596" cy="1813413"/>
           </a:xfrm>
           <a:prstGeom prst="rect">
             <a:avLst/>
@@ -13419,7 +13519,7 @@
             </a:br>
             <a:r>
               <a:rPr lang="en-US" dirty="0"/>
-              <a:t>Word Analyses.</a:t>
+              <a:t>Word Analyses and Interlinear Texts.</a:t>
             </a:r>
           </a:p>
           <a:p>

--- a/HelpResourcesSources/TechnicalNotes/FLEx 9.1 Conceptual Model - Grammar and interlinear model.pptx
+++ b/HelpResourcesSources/TechnicalNotes/FLEx 9.1 Conceptual Model - Grammar and interlinear model.pptx
@@ -320,7 +320,7 @@
           <a:p>
             <a:fld id="{33088F3C-9E81-4E49-8427-25161F1C0BC9}" type="datetimeFigureOut">
               <a:rPr lang="en-US" smtClean="0"/>
-              <a:t>6/25/2024</a:t>
+              <a:t>7/9/2024</a:t>
             </a:fld>
             <a:endParaRPr lang="en-US" dirty="0"/>
           </a:p>
@@ -518,7 +518,7 @@
           <a:p>
             <a:fld id="{33088F3C-9E81-4E49-8427-25161F1C0BC9}" type="datetimeFigureOut">
               <a:rPr lang="en-US" smtClean="0"/>
-              <a:t>6/25/2024</a:t>
+              <a:t>7/9/2024</a:t>
             </a:fld>
             <a:endParaRPr lang="en-US" dirty="0"/>
           </a:p>
@@ -726,7 +726,7 @@
           <a:p>
             <a:fld id="{33088F3C-9E81-4E49-8427-25161F1C0BC9}" type="datetimeFigureOut">
               <a:rPr lang="en-US" smtClean="0"/>
-              <a:t>6/25/2024</a:t>
+              <a:t>7/9/2024</a:t>
             </a:fld>
             <a:endParaRPr lang="en-US" dirty="0"/>
           </a:p>
@@ -924,7 +924,7 @@
           <a:p>
             <a:fld id="{33088F3C-9E81-4E49-8427-25161F1C0BC9}" type="datetimeFigureOut">
               <a:rPr lang="en-US" smtClean="0"/>
-              <a:t>6/25/2024</a:t>
+              <a:t>7/9/2024</a:t>
             </a:fld>
             <a:endParaRPr lang="en-US" dirty="0"/>
           </a:p>
@@ -1199,7 +1199,7 @@
           <a:p>
             <a:fld id="{33088F3C-9E81-4E49-8427-25161F1C0BC9}" type="datetimeFigureOut">
               <a:rPr lang="en-US" smtClean="0"/>
-              <a:t>6/25/2024</a:t>
+              <a:t>7/9/2024</a:t>
             </a:fld>
             <a:endParaRPr lang="en-US" dirty="0"/>
           </a:p>
@@ -1464,7 +1464,7 @@
           <a:p>
             <a:fld id="{33088F3C-9E81-4E49-8427-25161F1C0BC9}" type="datetimeFigureOut">
               <a:rPr lang="en-US" smtClean="0"/>
-              <a:t>6/25/2024</a:t>
+              <a:t>7/9/2024</a:t>
             </a:fld>
             <a:endParaRPr lang="en-US" dirty="0"/>
           </a:p>
@@ -1876,7 +1876,7 @@
           <a:p>
             <a:fld id="{33088F3C-9E81-4E49-8427-25161F1C0BC9}" type="datetimeFigureOut">
               <a:rPr lang="en-US" smtClean="0"/>
-              <a:t>6/25/2024</a:t>
+              <a:t>7/9/2024</a:t>
             </a:fld>
             <a:endParaRPr lang="en-US" dirty="0"/>
           </a:p>
@@ -2017,7 +2017,7 @@
           <a:p>
             <a:fld id="{33088F3C-9E81-4E49-8427-25161F1C0BC9}" type="datetimeFigureOut">
               <a:rPr lang="en-US" smtClean="0"/>
-              <a:t>6/25/2024</a:t>
+              <a:t>7/9/2024</a:t>
             </a:fld>
             <a:endParaRPr lang="en-US" dirty="0"/>
           </a:p>
@@ -2130,7 +2130,7 @@
           <a:p>
             <a:fld id="{33088F3C-9E81-4E49-8427-25161F1C0BC9}" type="datetimeFigureOut">
               <a:rPr lang="en-US" smtClean="0"/>
-              <a:t>6/25/2024</a:t>
+              <a:t>7/9/2024</a:t>
             </a:fld>
             <a:endParaRPr lang="en-US" dirty="0"/>
           </a:p>
@@ -2441,7 +2441,7 @@
           <a:p>
             <a:fld id="{33088F3C-9E81-4E49-8427-25161F1C0BC9}" type="datetimeFigureOut">
               <a:rPr lang="en-US" smtClean="0"/>
-              <a:t>6/25/2024</a:t>
+              <a:t>7/9/2024</a:t>
             </a:fld>
             <a:endParaRPr lang="en-US" dirty="0"/>
           </a:p>
@@ -2729,7 +2729,7 @@
           <a:p>
             <a:fld id="{33088F3C-9E81-4E49-8427-25161F1C0BC9}" type="datetimeFigureOut">
               <a:rPr lang="en-US" smtClean="0"/>
-              <a:t>6/25/2024</a:t>
+              <a:t>7/9/2024</a:t>
             </a:fld>
             <a:endParaRPr lang="en-US" dirty="0"/>
           </a:p>
@@ -2970,7 +2970,7 @@
           <a:p>
             <a:fld id="{33088F3C-9E81-4E49-8427-25161F1C0BC9}" type="datetimeFigureOut">
               <a:rPr lang="en-US" smtClean="0"/>
-              <a:t>6/25/2024</a:t>
+              <a:t>7/9/2024</a:t>
             </a:fld>
             <a:endParaRPr lang="en-US" dirty="0"/>
           </a:p>
@@ -8903,7 +8903,7 @@
             <a:pPr lvl="1"/>
             <a:r>
               <a:rPr lang="en-US" dirty="0"/>
-              <a:t>The “Text Markup Tags” list is owned in the </a:t>
+              <a:t>The “Text Chart Markers” list is owned in the </a:t>
             </a:r>
             <a:r>
               <a:rPr lang="en-US" dirty="0" err="1"/>
@@ -9764,7 +9764,7 @@
             </a:r>
             <a:r>
               <a:rPr lang="en-US" dirty="0" err="1"/>
-              <a:t>TesnseAspectMood</a:t>
+              <a:t>TenseAspectMood</a:t>
             </a:r>
             <a:r>
               <a:rPr lang="en-US" dirty="0"/>
@@ -11521,7 +11521,7 @@
             </a:r>
             <a:r>
               <a:rPr lang="en-US" dirty="0"/>
-              <a:t> – an Integer representing the book, chapter, and verse that starts this section in the form BBCCCCVVVV.</a:t>
+              <a:t> – an Integer representing the book, chapter, and verse that starts this section in the form BBCCCVVV.</a:t>
             </a:r>
           </a:p>
           <a:p>
@@ -11532,7 +11532,7 @@
             </a:r>
             <a:r>
               <a:rPr lang="en-US" dirty="0"/>
-              <a:t> – an Integer representing the book, chapter, and verse that ends this section in the form BBCCCCVVVV.</a:t>
+              <a:t> – an Integer representing the book, chapter, and verse that ends this section in the form BBCCCVVV.</a:t>
             </a:r>
           </a:p>
           <a:p>
@@ -12142,10 +12142,10 @@
       </p:grpSpPr>
       <p:pic>
         <p:nvPicPr>
-          <p:cNvPr id="12" name="Picture 11">
-            <a:extLst>
-              <a:ext uri="{FF2B5EF4-FFF2-40B4-BE49-F238E27FC236}">
-                <a16:creationId xmlns:a16="http://schemas.microsoft.com/office/drawing/2014/main" id="{7ABC3E0C-E10B-44F5-AC2B-F1654C5CCD0C}"/>
+          <p:cNvPr id="8" name="Picture 7">
+            <a:extLst>
+              <a:ext uri="{FF2B5EF4-FFF2-40B4-BE49-F238E27FC236}">
+                <a16:creationId xmlns:a16="http://schemas.microsoft.com/office/drawing/2014/main" id="{7F48A357-A5C9-4A45-B37C-E94EEF6CC4FB}"/>
               </a:ext>
             </a:extLst>
           </p:cNvPr>
@@ -12162,8 +12162,8 @@
         </p:blipFill>
         <p:spPr>
           <a:xfrm>
-            <a:off x="152275" y="1841418"/>
-            <a:ext cx="7366198" cy="3660613"/>
+            <a:off x="352842" y="1841344"/>
+            <a:ext cx="7360819" cy="3666828"/>
           </a:xfrm>
           <a:prstGeom prst="rect">
             <a:avLst/>
